--- a/slides/day2.pptx
+++ b/slides/day2.pptx
@@ -19823,7 +19823,7 @@
               </a:rPr>
               <a:t>Python + Claude Code 실행·로그인 완료
 문제 시 진단: claude doctor
-(스크린샷 placeholder)</a:t>
+(설치 완료 화면 캡처 삽입)</a:t>
             </a:r>
           </a:p>
         </p:txBody>
@@ -29247,7 +29247,7 @@
                 <a:cs typeface="NanumGothic"/>
               </a:rPr>
               <a:t>설정 완료 + 플러그인 설치된 작업 환경
-(설정·커맨드 예시 placeholder)</a:t>
+예시: examples/claude-setup (settings.json · CLAUDE.md)</a:t>
             </a:r>
           </a:p>
         </p:txBody>

--- a/slides/day2.pptx
+++ b/slides/day2.pptx
@@ -19131,7 +19131,7 @@
                 <a:ea typeface="NanumGothic"/>
                 <a:cs typeface="NanumGothic"/>
               </a:rPr>
-              <a:t>실습 단계 (placeholder)</a:t>
+              <a:t>실습 단계</a:t>
             </a:r>
           </a:p>
         </p:txBody>
@@ -28556,7 +28556,7 @@
                 <a:ea typeface="NanumGothic"/>
                 <a:cs typeface="NanumGothic"/>
               </a:rPr>
-              <a:t>실습 단계 (placeholder)</a:t>
+              <a:t>실습 단계</a:t>
             </a:r>
           </a:p>
         </p:txBody>

--- a/slides/day2.pptx
+++ b/slides/day2.pptx
@@ -4005,6 +4005,64 @@
           </a:p>
         </p:txBody>
       </p:sp>
+      <p:sp>
+        <p:nvSpPr>
+          <p:cNvPr id="21" name="TextBox 20"/>
+          <p:cNvSpPr txBox="1"/>
+          <p:nvPr/>
+        </p:nvSpPr>
+        <p:spPr>
+          <a:xfrm>
+            <a:off x="8988552" y="6419088"/>
+            <a:ext cx="2697480" cy="365760"/>
+          </a:xfrm>
+          <a:prstGeom prst="rect">
+            <a:avLst/>
+          </a:prstGeom>
+          <a:noFill/>
+        </p:spPr>
+        <p:txBody>
+          <a:bodyPr wrap="square" anchor="ctr" lIns="0" rIns="0" tIns="0" bIns="0">
+            <a:spAutoFit/>
+          </a:bodyPr>
+          <a:lstStyle/>
+          <a:p>
+            <a:pPr algn="r">
+              <a:lnSpc>
+                <a:spcPct val="100000"/>
+              </a:lnSpc>
+              <a:spcBef>
+                <a:spcPts val="0"/>
+              </a:spcBef>
+              <a:spcAft>
+                <a:spcPts val="600"/>
+              </a:spcAft>
+            </a:pPr>
+            <a:r>
+              <a:rPr sz="900" b="1">
+                <a:solidFill>
+                  <a:srgbClr val="0EA5E9"/>
+                </a:solidFill>
+                <a:latin typeface="NanumGothic"/>
+                <a:ea typeface="NanumGothic"/>
+                <a:cs typeface="NanumGothic"/>
+              </a:rPr>
+              <a:t>Day 2 · 화</a:t>
+            </a:r>
+            <a:r>
+              <a:rPr sz="900" b="1">
+                <a:solidFill>
+                  <a:srgbClr val="CBD5E1"/>
+                </a:solidFill>
+                <a:latin typeface="NanumGothic"/>
+                <a:ea typeface="NanumGothic"/>
+                <a:cs typeface="NanumGothic"/>
+              </a:rPr>
+              <a:t>   ·   1 / 43</a:t>
+            </a:r>
+          </a:p>
+        </p:txBody>
+      </p:sp>
     </p:spTree>
   </p:cSld>
   <p:clrMapOvr>
@@ -4298,54 +4356,7 @@
       </p:sp>
       <p:sp>
         <p:nvSpPr>
-          <p:cNvPr id="8" name="TextBox 7"/>
-          <p:cNvSpPr txBox="1"/>
-          <p:nvPr/>
-        </p:nvSpPr>
-        <p:spPr>
-          <a:xfrm>
-            <a:off x="10241280" y="6419088"/>
-            <a:ext cx="1463040" cy="365760"/>
-          </a:xfrm>
-          <a:prstGeom prst="rect">
-            <a:avLst/>
-          </a:prstGeom>
-          <a:noFill/>
-        </p:spPr>
-        <p:txBody>
-          <a:bodyPr wrap="square" anchor="ctr" lIns="0" rIns="0" tIns="0" bIns="0">
-            <a:spAutoFit/>
-          </a:bodyPr>
-          <a:lstStyle/>
-          <a:p>
-            <a:pPr algn="r">
-              <a:lnSpc>
-                <a:spcPct val="100000"/>
-              </a:lnSpc>
-              <a:spcBef>
-                <a:spcPts val="0"/>
-              </a:spcBef>
-              <a:spcAft>
-                <a:spcPts val="600"/>
-              </a:spcAft>
-            </a:pPr>
-            <a:r>
-              <a:rPr sz="900" b="1">
-                <a:solidFill>
-                  <a:srgbClr val="0EA5E9"/>
-                </a:solidFill>
-                <a:latin typeface="NanumGothic"/>
-                <a:ea typeface="NanumGothic"/>
-                <a:cs typeface="NanumGothic"/>
-              </a:rPr>
-              <a:t>Day 2 · 화</a:t>
-            </a:r>
-          </a:p>
-        </p:txBody>
-      </p:sp>
-      <p:sp>
-        <p:nvSpPr>
-          <p:cNvPr id="9" name="Oval 8"/>
+          <p:cNvPr id="8" name="Oval 7"/>
           <p:cNvSpPr/>
           <p:nvPr/>
         </p:nvSpPr>
@@ -4389,7 +4400,7 @@
       </p:sp>
       <p:sp>
         <p:nvSpPr>
-          <p:cNvPr id="10" name="TextBox 9"/>
+          <p:cNvPr id="9" name="TextBox 8"/>
           <p:cNvSpPr txBox="1"/>
           <p:nvPr/>
         </p:nvSpPr>
@@ -4436,7 +4447,7 @@
       </p:sp>
       <p:sp>
         <p:nvSpPr>
-          <p:cNvPr id="11" name="TextBox 10"/>
+          <p:cNvPr id="10" name="TextBox 9"/>
           <p:cNvSpPr txBox="1"/>
           <p:nvPr/>
         </p:nvSpPr>
@@ -4483,7 +4494,7 @@
       </p:sp>
       <p:sp>
         <p:nvSpPr>
-          <p:cNvPr id="12" name="Oval 11"/>
+          <p:cNvPr id="11" name="Oval 10"/>
           <p:cNvSpPr/>
           <p:nvPr/>
         </p:nvSpPr>
@@ -4527,7 +4538,7 @@
       </p:sp>
       <p:sp>
         <p:nvSpPr>
-          <p:cNvPr id="13" name="TextBox 12"/>
+          <p:cNvPr id="12" name="TextBox 11"/>
           <p:cNvSpPr txBox="1"/>
           <p:nvPr/>
         </p:nvSpPr>
@@ -4574,7 +4585,7 @@
       </p:sp>
       <p:sp>
         <p:nvSpPr>
-          <p:cNvPr id="14" name="TextBox 13"/>
+          <p:cNvPr id="13" name="TextBox 12"/>
           <p:cNvSpPr txBox="1"/>
           <p:nvPr/>
         </p:nvSpPr>
@@ -4621,7 +4632,7 @@
       </p:sp>
       <p:sp>
         <p:nvSpPr>
-          <p:cNvPr id="15" name="Oval 14"/>
+          <p:cNvPr id="14" name="Oval 13"/>
           <p:cNvSpPr/>
           <p:nvPr/>
         </p:nvSpPr>
@@ -4665,7 +4676,7 @@
       </p:sp>
       <p:sp>
         <p:nvSpPr>
-          <p:cNvPr id="16" name="TextBox 15"/>
+          <p:cNvPr id="15" name="TextBox 14"/>
           <p:cNvSpPr txBox="1"/>
           <p:nvPr/>
         </p:nvSpPr>
@@ -4712,7 +4723,7 @@
       </p:sp>
       <p:sp>
         <p:nvSpPr>
-          <p:cNvPr id="17" name="TextBox 16"/>
+          <p:cNvPr id="16" name="TextBox 15"/>
           <p:cNvSpPr txBox="1"/>
           <p:nvPr/>
         </p:nvSpPr>
@@ -4753,6 +4764,64 @@
                 <a:cs typeface="NanumGothic"/>
               </a:rPr>
               <a:t>다음 판단의 근거가 됨</a:t>
+            </a:r>
+          </a:p>
+        </p:txBody>
+      </p:sp>
+      <p:sp>
+        <p:nvSpPr>
+          <p:cNvPr id="17" name="TextBox 16"/>
+          <p:cNvSpPr txBox="1"/>
+          <p:nvPr/>
+        </p:nvSpPr>
+        <p:spPr>
+          <a:xfrm>
+            <a:off x="8988552" y="6419088"/>
+            <a:ext cx="2697480" cy="365760"/>
+          </a:xfrm>
+          <a:prstGeom prst="rect">
+            <a:avLst/>
+          </a:prstGeom>
+          <a:noFill/>
+        </p:spPr>
+        <p:txBody>
+          <a:bodyPr wrap="square" anchor="ctr" lIns="0" rIns="0" tIns="0" bIns="0">
+            <a:spAutoFit/>
+          </a:bodyPr>
+          <a:lstStyle/>
+          <a:p>
+            <a:pPr algn="r">
+              <a:lnSpc>
+                <a:spcPct val="100000"/>
+              </a:lnSpc>
+              <a:spcBef>
+                <a:spcPts val="0"/>
+              </a:spcBef>
+              <a:spcAft>
+                <a:spcPts val="600"/>
+              </a:spcAft>
+            </a:pPr>
+            <a:r>
+              <a:rPr sz="900" b="1">
+                <a:solidFill>
+                  <a:srgbClr val="0EA5E9"/>
+                </a:solidFill>
+                <a:latin typeface="NanumGothic"/>
+                <a:ea typeface="NanumGothic"/>
+                <a:cs typeface="NanumGothic"/>
+              </a:rPr>
+              <a:t>Day 2 · 화</a:t>
+            </a:r>
+            <a:r>
+              <a:rPr sz="900" b="1">
+                <a:solidFill>
+                  <a:srgbClr val="64748B"/>
+                </a:solidFill>
+                <a:latin typeface="NanumGothic"/>
+                <a:ea typeface="NanumGothic"/>
+                <a:cs typeface="NanumGothic"/>
+              </a:rPr>
+              <a:t>   ·   10 / 43</a:t>
             </a:r>
           </a:p>
         </p:txBody>
@@ -5050,54 +5119,7 @@
       </p:sp>
       <p:sp>
         <p:nvSpPr>
-          <p:cNvPr id="8" name="TextBox 7"/>
-          <p:cNvSpPr txBox="1"/>
-          <p:nvPr/>
-        </p:nvSpPr>
-        <p:spPr>
-          <a:xfrm>
-            <a:off x="10241280" y="6419088"/>
-            <a:ext cx="1463040" cy="365760"/>
-          </a:xfrm>
-          <a:prstGeom prst="rect">
-            <a:avLst/>
-          </a:prstGeom>
-          <a:noFill/>
-        </p:spPr>
-        <p:txBody>
-          <a:bodyPr wrap="square" anchor="ctr" lIns="0" rIns="0" tIns="0" bIns="0">
-            <a:spAutoFit/>
-          </a:bodyPr>
-          <a:lstStyle/>
-          <a:p>
-            <a:pPr algn="r">
-              <a:lnSpc>
-                <a:spcPct val="100000"/>
-              </a:lnSpc>
-              <a:spcBef>
-                <a:spcPts val="0"/>
-              </a:spcBef>
-              <a:spcAft>
-                <a:spcPts val="600"/>
-              </a:spcAft>
-            </a:pPr>
-            <a:r>
-              <a:rPr sz="900" b="1">
-                <a:solidFill>
-                  <a:srgbClr val="0EA5E9"/>
-                </a:solidFill>
-                <a:latin typeface="NanumGothic"/>
-                <a:ea typeface="NanumGothic"/>
-                <a:cs typeface="NanumGothic"/>
-              </a:rPr>
-              <a:t>Day 2 · 화</a:t>
-            </a:r>
-          </a:p>
-        </p:txBody>
-      </p:sp>
-      <p:sp>
-        <p:nvSpPr>
-          <p:cNvPr id="9" name="Oval 8"/>
+          <p:cNvPr id="8" name="Oval 7"/>
           <p:cNvSpPr/>
           <p:nvPr/>
         </p:nvSpPr>
@@ -5141,7 +5163,7 @@
       </p:sp>
       <p:sp>
         <p:nvSpPr>
-          <p:cNvPr id="10" name="TextBox 9"/>
+          <p:cNvPr id="9" name="TextBox 8"/>
           <p:cNvSpPr txBox="1"/>
           <p:nvPr/>
         </p:nvSpPr>
@@ -5188,7 +5210,7 @@
       </p:sp>
       <p:sp>
         <p:nvSpPr>
-          <p:cNvPr id="11" name="TextBox 10"/>
+          <p:cNvPr id="10" name="TextBox 9"/>
           <p:cNvSpPr txBox="1"/>
           <p:nvPr/>
         </p:nvSpPr>
@@ -5235,7 +5257,7 @@
       </p:sp>
       <p:sp>
         <p:nvSpPr>
-          <p:cNvPr id="12" name="Oval 11"/>
+          <p:cNvPr id="11" name="Oval 10"/>
           <p:cNvSpPr/>
           <p:nvPr/>
         </p:nvSpPr>
@@ -5279,7 +5301,7 @@
       </p:sp>
       <p:sp>
         <p:nvSpPr>
-          <p:cNvPr id="13" name="TextBox 12"/>
+          <p:cNvPr id="12" name="TextBox 11"/>
           <p:cNvSpPr txBox="1"/>
           <p:nvPr/>
         </p:nvSpPr>
@@ -5326,7 +5348,7 @@
       </p:sp>
       <p:sp>
         <p:nvSpPr>
-          <p:cNvPr id="14" name="TextBox 13"/>
+          <p:cNvPr id="13" name="TextBox 12"/>
           <p:cNvSpPr txBox="1"/>
           <p:nvPr/>
         </p:nvSpPr>
@@ -5373,7 +5395,7 @@
       </p:sp>
       <p:sp>
         <p:nvSpPr>
-          <p:cNvPr id="15" name="Oval 14"/>
+          <p:cNvPr id="14" name="Oval 13"/>
           <p:cNvSpPr/>
           <p:nvPr/>
         </p:nvSpPr>
@@ -5417,7 +5439,7 @@
       </p:sp>
       <p:sp>
         <p:nvSpPr>
-          <p:cNvPr id="16" name="TextBox 15"/>
+          <p:cNvPr id="15" name="TextBox 14"/>
           <p:cNvSpPr txBox="1"/>
           <p:nvPr/>
         </p:nvSpPr>
@@ -5464,7 +5486,7 @@
       </p:sp>
       <p:sp>
         <p:nvSpPr>
-          <p:cNvPr id="17" name="TextBox 16"/>
+          <p:cNvPr id="16" name="TextBox 15"/>
           <p:cNvSpPr txBox="1"/>
           <p:nvPr/>
         </p:nvSpPr>
@@ -5505,6 +5527,64 @@
                 <a:cs typeface="NanumGothic"/>
               </a:rPr>
               <a:t>여기서 어떤 도구를 쓸지도 결정</a:t>
+            </a:r>
+          </a:p>
+        </p:txBody>
+      </p:sp>
+      <p:sp>
+        <p:nvSpPr>
+          <p:cNvPr id="17" name="TextBox 16"/>
+          <p:cNvSpPr txBox="1"/>
+          <p:nvPr/>
+        </p:nvSpPr>
+        <p:spPr>
+          <a:xfrm>
+            <a:off x="8988552" y="6419088"/>
+            <a:ext cx="2697480" cy="365760"/>
+          </a:xfrm>
+          <a:prstGeom prst="rect">
+            <a:avLst/>
+          </a:prstGeom>
+          <a:noFill/>
+        </p:spPr>
+        <p:txBody>
+          <a:bodyPr wrap="square" anchor="ctr" lIns="0" rIns="0" tIns="0" bIns="0">
+            <a:spAutoFit/>
+          </a:bodyPr>
+          <a:lstStyle/>
+          <a:p>
+            <a:pPr algn="r">
+              <a:lnSpc>
+                <a:spcPct val="100000"/>
+              </a:lnSpc>
+              <a:spcBef>
+                <a:spcPts val="0"/>
+              </a:spcBef>
+              <a:spcAft>
+                <a:spcPts val="600"/>
+              </a:spcAft>
+            </a:pPr>
+            <a:r>
+              <a:rPr sz="900" b="1">
+                <a:solidFill>
+                  <a:srgbClr val="0EA5E9"/>
+                </a:solidFill>
+                <a:latin typeface="NanumGothic"/>
+                <a:ea typeface="NanumGothic"/>
+                <a:cs typeface="NanumGothic"/>
+              </a:rPr>
+              <a:t>Day 2 · 화</a:t>
+            </a:r>
+            <a:r>
+              <a:rPr sz="900" b="1">
+                <a:solidFill>
+                  <a:srgbClr val="64748B"/>
+                </a:solidFill>
+                <a:latin typeface="NanumGothic"/>
+                <a:ea typeface="NanumGothic"/>
+                <a:cs typeface="NanumGothic"/>
+              </a:rPr>
+              <a:t>   ·   11 / 43</a:t>
             </a:r>
           </a:p>
         </p:txBody>
@@ -5802,54 +5882,7 @@
       </p:sp>
       <p:sp>
         <p:nvSpPr>
-          <p:cNvPr id="8" name="TextBox 7"/>
-          <p:cNvSpPr txBox="1"/>
-          <p:nvPr/>
-        </p:nvSpPr>
-        <p:spPr>
-          <a:xfrm>
-            <a:off x="10241280" y="6419088"/>
-            <a:ext cx="1463040" cy="365760"/>
-          </a:xfrm>
-          <a:prstGeom prst="rect">
-            <a:avLst/>
-          </a:prstGeom>
-          <a:noFill/>
-        </p:spPr>
-        <p:txBody>
-          <a:bodyPr wrap="square" anchor="ctr" lIns="0" rIns="0" tIns="0" bIns="0">
-            <a:spAutoFit/>
-          </a:bodyPr>
-          <a:lstStyle/>
-          <a:p>
-            <a:pPr algn="r">
-              <a:lnSpc>
-                <a:spcPct val="100000"/>
-              </a:lnSpc>
-              <a:spcBef>
-                <a:spcPts val="0"/>
-              </a:spcBef>
-              <a:spcAft>
-                <a:spcPts val="600"/>
-              </a:spcAft>
-            </a:pPr>
-            <a:r>
-              <a:rPr sz="900" b="1">
-                <a:solidFill>
-                  <a:srgbClr val="0EA5E9"/>
-                </a:solidFill>
-                <a:latin typeface="NanumGothic"/>
-                <a:ea typeface="NanumGothic"/>
-                <a:cs typeface="NanumGothic"/>
-              </a:rPr>
-              <a:t>Day 2 · 화</a:t>
-            </a:r>
-          </a:p>
-        </p:txBody>
-      </p:sp>
-      <p:sp>
-        <p:nvSpPr>
-          <p:cNvPr id="9" name="Oval 8"/>
+          <p:cNvPr id="8" name="Oval 7"/>
           <p:cNvSpPr/>
           <p:nvPr/>
         </p:nvSpPr>
@@ -5893,7 +5926,7 @@
       </p:sp>
       <p:sp>
         <p:nvSpPr>
-          <p:cNvPr id="10" name="TextBox 9"/>
+          <p:cNvPr id="9" name="TextBox 8"/>
           <p:cNvSpPr txBox="1"/>
           <p:nvPr/>
         </p:nvSpPr>
@@ -5940,7 +5973,7 @@
       </p:sp>
       <p:sp>
         <p:nvSpPr>
-          <p:cNvPr id="11" name="TextBox 10"/>
+          <p:cNvPr id="10" name="TextBox 9"/>
           <p:cNvSpPr txBox="1"/>
           <p:nvPr/>
         </p:nvSpPr>
@@ -5987,7 +6020,7 @@
       </p:sp>
       <p:sp>
         <p:nvSpPr>
-          <p:cNvPr id="12" name="Oval 11"/>
+          <p:cNvPr id="11" name="Oval 10"/>
           <p:cNvSpPr/>
           <p:nvPr/>
         </p:nvSpPr>
@@ -6031,7 +6064,7 @@
       </p:sp>
       <p:sp>
         <p:nvSpPr>
-          <p:cNvPr id="13" name="TextBox 12"/>
+          <p:cNvPr id="12" name="TextBox 11"/>
           <p:cNvSpPr txBox="1"/>
           <p:nvPr/>
         </p:nvSpPr>
@@ -6078,7 +6111,7 @@
       </p:sp>
       <p:sp>
         <p:nvSpPr>
-          <p:cNvPr id="14" name="TextBox 13"/>
+          <p:cNvPr id="13" name="TextBox 12"/>
           <p:cNvSpPr txBox="1"/>
           <p:nvPr/>
         </p:nvSpPr>
@@ -6125,7 +6158,7 @@
       </p:sp>
       <p:sp>
         <p:nvSpPr>
-          <p:cNvPr id="15" name="Oval 14"/>
+          <p:cNvPr id="14" name="Oval 13"/>
           <p:cNvSpPr/>
           <p:nvPr/>
         </p:nvSpPr>
@@ -6169,7 +6202,7 @@
       </p:sp>
       <p:sp>
         <p:nvSpPr>
-          <p:cNvPr id="16" name="TextBox 15"/>
+          <p:cNvPr id="15" name="TextBox 14"/>
           <p:cNvSpPr txBox="1"/>
           <p:nvPr/>
         </p:nvSpPr>
@@ -6216,7 +6249,7 @@
       </p:sp>
       <p:sp>
         <p:nvSpPr>
-          <p:cNvPr id="17" name="TextBox 16"/>
+          <p:cNvPr id="16" name="TextBox 15"/>
           <p:cNvSpPr txBox="1"/>
           <p:nvPr/>
         </p:nvSpPr>
@@ -6257,6 +6290,64 @@
                 <a:cs typeface="NanumGothic"/>
               </a:rPr>
               <a:t>환경이 바뀌고 새 결과가 나옴</a:t>
+            </a:r>
+          </a:p>
+        </p:txBody>
+      </p:sp>
+      <p:sp>
+        <p:nvSpPr>
+          <p:cNvPr id="17" name="TextBox 16"/>
+          <p:cNvSpPr txBox="1"/>
+          <p:nvPr/>
+        </p:nvSpPr>
+        <p:spPr>
+          <a:xfrm>
+            <a:off x="8988552" y="6419088"/>
+            <a:ext cx="2697480" cy="365760"/>
+          </a:xfrm>
+          <a:prstGeom prst="rect">
+            <a:avLst/>
+          </a:prstGeom>
+          <a:noFill/>
+        </p:spPr>
+        <p:txBody>
+          <a:bodyPr wrap="square" anchor="ctr" lIns="0" rIns="0" tIns="0" bIns="0">
+            <a:spAutoFit/>
+          </a:bodyPr>
+          <a:lstStyle/>
+          <a:p>
+            <a:pPr algn="r">
+              <a:lnSpc>
+                <a:spcPct val="100000"/>
+              </a:lnSpc>
+              <a:spcBef>
+                <a:spcPts val="0"/>
+              </a:spcBef>
+              <a:spcAft>
+                <a:spcPts val="600"/>
+              </a:spcAft>
+            </a:pPr>
+            <a:r>
+              <a:rPr sz="900" b="1">
+                <a:solidFill>
+                  <a:srgbClr val="0EA5E9"/>
+                </a:solidFill>
+                <a:latin typeface="NanumGothic"/>
+                <a:ea typeface="NanumGothic"/>
+                <a:cs typeface="NanumGothic"/>
+              </a:rPr>
+              <a:t>Day 2 · 화</a:t>
+            </a:r>
+            <a:r>
+              <a:rPr sz="900" b="1">
+                <a:solidFill>
+                  <a:srgbClr val="64748B"/>
+                </a:solidFill>
+                <a:latin typeface="NanumGothic"/>
+                <a:ea typeface="NanumGothic"/>
+                <a:cs typeface="NanumGothic"/>
+              </a:rPr>
+              <a:t>   ·   12 / 43</a:t>
             </a:r>
           </a:p>
         </p:txBody>
@@ -6554,54 +6645,7 @@
       </p:sp>
       <p:sp>
         <p:nvSpPr>
-          <p:cNvPr id="8" name="TextBox 7"/>
-          <p:cNvSpPr txBox="1"/>
-          <p:nvPr/>
-        </p:nvSpPr>
-        <p:spPr>
-          <a:xfrm>
-            <a:off x="10241280" y="6419088"/>
-            <a:ext cx="1463040" cy="365760"/>
-          </a:xfrm>
-          <a:prstGeom prst="rect">
-            <a:avLst/>
-          </a:prstGeom>
-          <a:noFill/>
-        </p:spPr>
-        <p:txBody>
-          <a:bodyPr wrap="square" anchor="ctr" lIns="0" rIns="0" tIns="0" bIns="0">
-            <a:spAutoFit/>
-          </a:bodyPr>
-          <a:lstStyle/>
-          <a:p>
-            <a:pPr algn="r">
-              <a:lnSpc>
-                <a:spcPct val="100000"/>
-              </a:lnSpc>
-              <a:spcBef>
-                <a:spcPts val="0"/>
-              </a:spcBef>
-              <a:spcAft>
-                <a:spcPts val="600"/>
-              </a:spcAft>
-            </a:pPr>
-            <a:r>
-              <a:rPr sz="900" b="1">
-                <a:solidFill>
-                  <a:srgbClr val="0EA5E9"/>
-                </a:solidFill>
-                <a:latin typeface="NanumGothic"/>
-                <a:ea typeface="NanumGothic"/>
-                <a:cs typeface="NanumGothic"/>
-              </a:rPr>
-              <a:t>Day 2 · 화</a:t>
-            </a:r>
-          </a:p>
-        </p:txBody>
-      </p:sp>
-      <p:sp>
-        <p:nvSpPr>
-          <p:cNvPr id="9" name="Oval 8"/>
+          <p:cNvPr id="8" name="Oval 7"/>
           <p:cNvSpPr/>
           <p:nvPr/>
         </p:nvSpPr>
@@ -6645,7 +6689,7 @@
       </p:sp>
       <p:sp>
         <p:nvSpPr>
-          <p:cNvPr id="10" name="TextBox 9"/>
+          <p:cNvPr id="9" name="TextBox 8"/>
           <p:cNvSpPr txBox="1"/>
           <p:nvPr/>
         </p:nvSpPr>
@@ -6692,7 +6736,7 @@
       </p:sp>
       <p:sp>
         <p:nvSpPr>
-          <p:cNvPr id="11" name="TextBox 10"/>
+          <p:cNvPr id="10" name="TextBox 9"/>
           <p:cNvSpPr txBox="1"/>
           <p:nvPr/>
         </p:nvSpPr>
@@ -6739,7 +6783,7 @@
       </p:sp>
       <p:sp>
         <p:nvSpPr>
-          <p:cNvPr id="12" name="Oval 11"/>
+          <p:cNvPr id="11" name="Oval 10"/>
           <p:cNvSpPr/>
           <p:nvPr/>
         </p:nvSpPr>
@@ -6783,7 +6827,7 @@
       </p:sp>
       <p:sp>
         <p:nvSpPr>
-          <p:cNvPr id="13" name="TextBox 12"/>
+          <p:cNvPr id="12" name="TextBox 11"/>
           <p:cNvSpPr txBox="1"/>
           <p:nvPr/>
         </p:nvSpPr>
@@ -6830,7 +6874,7 @@
       </p:sp>
       <p:sp>
         <p:nvSpPr>
-          <p:cNvPr id="14" name="TextBox 13"/>
+          <p:cNvPr id="13" name="TextBox 12"/>
           <p:cNvSpPr txBox="1"/>
           <p:nvPr/>
         </p:nvSpPr>
@@ -6877,7 +6921,7 @@
       </p:sp>
       <p:sp>
         <p:nvSpPr>
-          <p:cNvPr id="15" name="Oval 14"/>
+          <p:cNvPr id="14" name="Oval 13"/>
           <p:cNvSpPr/>
           <p:nvPr/>
         </p:nvSpPr>
@@ -6921,7 +6965,7 @@
       </p:sp>
       <p:sp>
         <p:nvSpPr>
-          <p:cNvPr id="16" name="TextBox 15"/>
+          <p:cNvPr id="15" name="TextBox 14"/>
           <p:cNvSpPr txBox="1"/>
           <p:nvPr/>
         </p:nvSpPr>
@@ -6968,7 +7012,7 @@
       </p:sp>
       <p:sp>
         <p:nvSpPr>
-          <p:cNvPr id="17" name="TextBox 16"/>
+          <p:cNvPr id="16" name="TextBox 15"/>
           <p:cNvSpPr txBox="1"/>
           <p:nvPr/>
         </p:nvSpPr>
@@ -7015,7 +7059,7 @@
       </p:sp>
       <p:sp>
         <p:nvSpPr>
-          <p:cNvPr id="18" name="Rounded Rectangle 17"/>
+          <p:cNvPr id="17" name="Rounded Rectangle 16"/>
           <p:cNvSpPr/>
           <p:nvPr/>
         </p:nvSpPr>
@@ -7061,7 +7105,7 @@
       </p:sp>
       <p:sp>
         <p:nvSpPr>
-          <p:cNvPr id="19" name="TextBox 18"/>
+          <p:cNvPr id="18" name="TextBox 17"/>
           <p:cNvSpPr txBox="1"/>
           <p:nvPr/>
         </p:nvSpPr>
@@ -7113,6 +7157,64 @@
                 <a:cs typeface="NanumGothic"/>
               </a:rPr>
               <a:t>이 반복이 LLM과 에이전트를 가르는 핵심</a:t>
+            </a:r>
+          </a:p>
+        </p:txBody>
+      </p:sp>
+      <p:sp>
+        <p:nvSpPr>
+          <p:cNvPr id="19" name="TextBox 18"/>
+          <p:cNvSpPr txBox="1"/>
+          <p:nvPr/>
+        </p:nvSpPr>
+        <p:spPr>
+          <a:xfrm>
+            <a:off x="8988552" y="6419088"/>
+            <a:ext cx="2697480" cy="365760"/>
+          </a:xfrm>
+          <a:prstGeom prst="rect">
+            <a:avLst/>
+          </a:prstGeom>
+          <a:noFill/>
+        </p:spPr>
+        <p:txBody>
+          <a:bodyPr wrap="square" anchor="ctr" lIns="0" rIns="0" tIns="0" bIns="0">
+            <a:spAutoFit/>
+          </a:bodyPr>
+          <a:lstStyle/>
+          <a:p>
+            <a:pPr algn="r">
+              <a:lnSpc>
+                <a:spcPct val="100000"/>
+              </a:lnSpc>
+              <a:spcBef>
+                <a:spcPts val="0"/>
+              </a:spcBef>
+              <a:spcAft>
+                <a:spcPts val="600"/>
+              </a:spcAft>
+            </a:pPr>
+            <a:r>
+              <a:rPr sz="900" b="1">
+                <a:solidFill>
+                  <a:srgbClr val="0EA5E9"/>
+                </a:solidFill>
+                <a:latin typeface="NanumGothic"/>
+                <a:ea typeface="NanumGothic"/>
+                <a:cs typeface="NanumGothic"/>
+              </a:rPr>
+              <a:t>Day 2 · 화</a:t>
+            </a:r>
+            <a:r>
+              <a:rPr sz="900" b="1">
+                <a:solidFill>
+                  <a:srgbClr val="64748B"/>
+                </a:solidFill>
+                <a:latin typeface="NanumGothic"/>
+                <a:ea typeface="NanumGothic"/>
+                <a:cs typeface="NanumGothic"/>
+              </a:rPr>
+              <a:t>   ·   13 / 43</a:t>
             </a:r>
           </a:p>
         </p:txBody>
@@ -7410,54 +7512,7 @@
       </p:sp>
       <p:sp>
         <p:nvSpPr>
-          <p:cNvPr id="8" name="TextBox 7"/>
-          <p:cNvSpPr txBox="1"/>
-          <p:nvPr/>
-        </p:nvSpPr>
-        <p:spPr>
-          <a:xfrm>
-            <a:off x="10241280" y="6419088"/>
-            <a:ext cx="1463040" cy="365760"/>
-          </a:xfrm>
-          <a:prstGeom prst="rect">
-            <a:avLst/>
-          </a:prstGeom>
-          <a:noFill/>
-        </p:spPr>
-        <p:txBody>
-          <a:bodyPr wrap="square" anchor="ctr" lIns="0" rIns="0" tIns="0" bIns="0">
-            <a:spAutoFit/>
-          </a:bodyPr>
-          <a:lstStyle/>
-          <a:p>
-            <a:pPr algn="r">
-              <a:lnSpc>
-                <a:spcPct val="100000"/>
-              </a:lnSpc>
-              <a:spcBef>
-                <a:spcPts val="0"/>
-              </a:spcBef>
-              <a:spcAft>
-                <a:spcPts val="600"/>
-              </a:spcAft>
-            </a:pPr>
-            <a:r>
-              <a:rPr sz="900" b="1">
-                <a:solidFill>
-                  <a:srgbClr val="0EA5E9"/>
-                </a:solidFill>
-                <a:latin typeface="NanumGothic"/>
-                <a:ea typeface="NanumGothic"/>
-                <a:cs typeface="NanumGothic"/>
-              </a:rPr>
-              <a:t>Day 2 · 화</a:t>
-            </a:r>
-          </a:p>
-        </p:txBody>
-      </p:sp>
-      <p:sp>
-        <p:nvSpPr>
-          <p:cNvPr id="9" name="Oval 8"/>
+          <p:cNvPr id="8" name="Oval 7"/>
           <p:cNvSpPr/>
           <p:nvPr/>
         </p:nvSpPr>
@@ -7501,7 +7556,7 @@
       </p:sp>
       <p:sp>
         <p:nvSpPr>
-          <p:cNvPr id="10" name="TextBox 9"/>
+          <p:cNvPr id="9" name="TextBox 8"/>
           <p:cNvSpPr txBox="1"/>
           <p:nvPr/>
         </p:nvSpPr>
@@ -7548,7 +7603,7 @@
       </p:sp>
       <p:sp>
         <p:nvSpPr>
-          <p:cNvPr id="11" name="TextBox 10"/>
+          <p:cNvPr id="10" name="TextBox 9"/>
           <p:cNvSpPr txBox="1"/>
           <p:nvPr/>
         </p:nvSpPr>
@@ -7595,7 +7650,7 @@
       </p:sp>
       <p:sp>
         <p:nvSpPr>
-          <p:cNvPr id="12" name="Oval 11"/>
+          <p:cNvPr id="11" name="Oval 10"/>
           <p:cNvSpPr/>
           <p:nvPr/>
         </p:nvSpPr>
@@ -7639,7 +7694,7 @@
       </p:sp>
       <p:sp>
         <p:nvSpPr>
-          <p:cNvPr id="13" name="TextBox 12"/>
+          <p:cNvPr id="12" name="TextBox 11"/>
           <p:cNvSpPr txBox="1"/>
           <p:nvPr/>
         </p:nvSpPr>
@@ -7686,7 +7741,7 @@
       </p:sp>
       <p:sp>
         <p:nvSpPr>
-          <p:cNvPr id="14" name="TextBox 13"/>
+          <p:cNvPr id="13" name="TextBox 12"/>
           <p:cNvSpPr txBox="1"/>
           <p:nvPr/>
         </p:nvSpPr>
@@ -7733,7 +7788,7 @@
       </p:sp>
       <p:sp>
         <p:nvSpPr>
-          <p:cNvPr id="15" name="Oval 14"/>
+          <p:cNvPr id="14" name="Oval 13"/>
           <p:cNvSpPr/>
           <p:nvPr/>
         </p:nvSpPr>
@@ -7777,7 +7832,7 @@
       </p:sp>
       <p:sp>
         <p:nvSpPr>
-          <p:cNvPr id="16" name="TextBox 15"/>
+          <p:cNvPr id="15" name="TextBox 14"/>
           <p:cNvSpPr txBox="1"/>
           <p:nvPr/>
         </p:nvSpPr>
@@ -7824,7 +7879,7 @@
       </p:sp>
       <p:sp>
         <p:nvSpPr>
-          <p:cNvPr id="17" name="TextBox 16"/>
+          <p:cNvPr id="16" name="TextBox 15"/>
           <p:cNvSpPr txBox="1"/>
           <p:nvPr/>
         </p:nvSpPr>
@@ -7871,7 +7926,7 @@
       </p:sp>
       <p:sp>
         <p:nvSpPr>
-          <p:cNvPr id="18" name="Oval 17"/>
+          <p:cNvPr id="17" name="Oval 16"/>
           <p:cNvSpPr/>
           <p:nvPr/>
         </p:nvSpPr>
@@ -7915,7 +7970,7 @@
       </p:sp>
       <p:sp>
         <p:nvSpPr>
-          <p:cNvPr id="19" name="TextBox 18"/>
+          <p:cNvPr id="18" name="TextBox 17"/>
           <p:cNvSpPr txBox="1"/>
           <p:nvPr/>
         </p:nvSpPr>
@@ -7962,7 +8017,7 @@
       </p:sp>
       <p:sp>
         <p:nvSpPr>
-          <p:cNvPr id="20" name="TextBox 19"/>
+          <p:cNvPr id="19" name="TextBox 18"/>
           <p:cNvSpPr txBox="1"/>
           <p:nvPr/>
         </p:nvSpPr>
@@ -8009,7 +8064,7 @@
       </p:sp>
       <p:sp>
         <p:nvSpPr>
-          <p:cNvPr id="21" name="Rounded Rectangle 20"/>
+          <p:cNvPr id="20" name="Rounded Rectangle 19"/>
           <p:cNvSpPr/>
           <p:nvPr/>
         </p:nvSpPr>
@@ -8055,7 +8110,7 @@
       </p:sp>
       <p:sp>
         <p:nvSpPr>
-          <p:cNvPr id="22" name="TextBox 21"/>
+          <p:cNvPr id="21" name="TextBox 20"/>
           <p:cNvSpPr txBox="1"/>
           <p:nvPr/>
         </p:nvSpPr>
@@ -8107,6 +8162,64 @@
                 <a:cs typeface="NanumGothic"/>
               </a:rPr>
               <a:t>도구가 LLM의 한계(최신성·계산·실행)를 메운다</a:t>
+            </a:r>
+          </a:p>
+        </p:txBody>
+      </p:sp>
+      <p:sp>
+        <p:nvSpPr>
+          <p:cNvPr id="22" name="TextBox 21"/>
+          <p:cNvSpPr txBox="1"/>
+          <p:nvPr/>
+        </p:nvSpPr>
+        <p:spPr>
+          <a:xfrm>
+            <a:off x="8988552" y="6419088"/>
+            <a:ext cx="2697480" cy="365760"/>
+          </a:xfrm>
+          <a:prstGeom prst="rect">
+            <a:avLst/>
+          </a:prstGeom>
+          <a:noFill/>
+        </p:spPr>
+        <p:txBody>
+          <a:bodyPr wrap="square" anchor="ctr" lIns="0" rIns="0" tIns="0" bIns="0">
+            <a:spAutoFit/>
+          </a:bodyPr>
+          <a:lstStyle/>
+          <a:p>
+            <a:pPr algn="r">
+              <a:lnSpc>
+                <a:spcPct val="100000"/>
+              </a:lnSpc>
+              <a:spcBef>
+                <a:spcPts val="0"/>
+              </a:spcBef>
+              <a:spcAft>
+                <a:spcPts val="600"/>
+              </a:spcAft>
+            </a:pPr>
+            <a:r>
+              <a:rPr sz="900" b="1">
+                <a:solidFill>
+                  <a:srgbClr val="0EA5E9"/>
+                </a:solidFill>
+                <a:latin typeface="NanumGothic"/>
+                <a:ea typeface="NanumGothic"/>
+                <a:cs typeface="NanumGothic"/>
+              </a:rPr>
+              <a:t>Day 2 · 화</a:t>
+            </a:r>
+            <a:r>
+              <a:rPr sz="900" b="1">
+                <a:solidFill>
+                  <a:srgbClr val="64748B"/>
+                </a:solidFill>
+                <a:latin typeface="NanumGothic"/>
+                <a:ea typeface="NanumGothic"/>
+                <a:cs typeface="NanumGothic"/>
+              </a:rPr>
+              <a:t>   ·   14 / 43</a:t>
             </a:r>
           </a:p>
         </p:txBody>
@@ -8404,54 +8517,7 @@
       </p:sp>
       <p:sp>
         <p:nvSpPr>
-          <p:cNvPr id="8" name="TextBox 7"/>
-          <p:cNvSpPr txBox="1"/>
-          <p:nvPr/>
-        </p:nvSpPr>
-        <p:spPr>
-          <a:xfrm>
-            <a:off x="10241280" y="6419088"/>
-            <a:ext cx="1463040" cy="365760"/>
-          </a:xfrm>
-          <a:prstGeom prst="rect">
-            <a:avLst/>
-          </a:prstGeom>
-          <a:noFill/>
-        </p:spPr>
-        <p:txBody>
-          <a:bodyPr wrap="square" anchor="ctr" lIns="0" rIns="0" tIns="0" bIns="0">
-            <a:spAutoFit/>
-          </a:bodyPr>
-          <a:lstStyle/>
-          <a:p>
-            <a:pPr algn="r">
-              <a:lnSpc>
-                <a:spcPct val="100000"/>
-              </a:lnSpc>
-              <a:spcBef>
-                <a:spcPts val="0"/>
-              </a:spcBef>
-              <a:spcAft>
-                <a:spcPts val="600"/>
-              </a:spcAft>
-            </a:pPr>
-            <a:r>
-              <a:rPr sz="900" b="1">
-                <a:solidFill>
-                  <a:srgbClr val="0EA5E9"/>
-                </a:solidFill>
-                <a:latin typeface="NanumGothic"/>
-                <a:ea typeface="NanumGothic"/>
-                <a:cs typeface="NanumGothic"/>
-              </a:rPr>
-              <a:t>Day 2 · 화</a:t>
-            </a:r>
-          </a:p>
-        </p:txBody>
-      </p:sp>
-      <p:sp>
-        <p:nvSpPr>
-          <p:cNvPr id="9" name="Oval 8"/>
+          <p:cNvPr id="8" name="Oval 7"/>
           <p:cNvSpPr/>
           <p:nvPr/>
         </p:nvSpPr>
@@ -8495,7 +8561,7 @@
       </p:sp>
       <p:sp>
         <p:nvSpPr>
-          <p:cNvPr id="10" name="TextBox 9"/>
+          <p:cNvPr id="9" name="TextBox 8"/>
           <p:cNvSpPr txBox="1"/>
           <p:nvPr/>
         </p:nvSpPr>
@@ -8542,7 +8608,7 @@
       </p:sp>
       <p:sp>
         <p:nvSpPr>
-          <p:cNvPr id="11" name="TextBox 10"/>
+          <p:cNvPr id="10" name="TextBox 9"/>
           <p:cNvSpPr txBox="1"/>
           <p:nvPr/>
         </p:nvSpPr>
@@ -8589,7 +8655,7 @@
       </p:sp>
       <p:sp>
         <p:nvSpPr>
-          <p:cNvPr id="12" name="Oval 11"/>
+          <p:cNvPr id="11" name="Oval 10"/>
           <p:cNvSpPr/>
           <p:nvPr/>
         </p:nvSpPr>
@@ -8633,7 +8699,7 @@
       </p:sp>
       <p:sp>
         <p:nvSpPr>
-          <p:cNvPr id="13" name="TextBox 12"/>
+          <p:cNvPr id="12" name="TextBox 11"/>
           <p:cNvSpPr txBox="1"/>
           <p:nvPr/>
         </p:nvSpPr>
@@ -8680,7 +8746,7 @@
       </p:sp>
       <p:sp>
         <p:nvSpPr>
-          <p:cNvPr id="14" name="TextBox 13"/>
+          <p:cNvPr id="13" name="TextBox 12"/>
           <p:cNvSpPr txBox="1"/>
           <p:nvPr/>
         </p:nvSpPr>
@@ -8727,7 +8793,7 @@
       </p:sp>
       <p:sp>
         <p:nvSpPr>
-          <p:cNvPr id="15" name="Oval 14"/>
+          <p:cNvPr id="14" name="Oval 13"/>
           <p:cNvSpPr/>
           <p:nvPr/>
         </p:nvSpPr>
@@ -8771,7 +8837,7 @@
       </p:sp>
       <p:sp>
         <p:nvSpPr>
-          <p:cNvPr id="16" name="TextBox 15"/>
+          <p:cNvPr id="15" name="TextBox 14"/>
           <p:cNvSpPr txBox="1"/>
           <p:nvPr/>
         </p:nvSpPr>
@@ -8818,7 +8884,7 @@
       </p:sp>
       <p:sp>
         <p:nvSpPr>
-          <p:cNvPr id="17" name="TextBox 16"/>
+          <p:cNvPr id="16" name="TextBox 15"/>
           <p:cNvSpPr txBox="1"/>
           <p:nvPr/>
         </p:nvSpPr>
@@ -8859,6 +8925,64 @@
                 <a:cs typeface="NanumGothic"/>
               </a:rPr>
               <a:t>긴 작업의 일관성 유지 · 맥락 한계 극복</a:t>
+            </a:r>
+          </a:p>
+        </p:txBody>
+      </p:sp>
+      <p:sp>
+        <p:nvSpPr>
+          <p:cNvPr id="17" name="TextBox 16"/>
+          <p:cNvSpPr txBox="1"/>
+          <p:nvPr/>
+        </p:nvSpPr>
+        <p:spPr>
+          <a:xfrm>
+            <a:off x="8988552" y="6419088"/>
+            <a:ext cx="2697480" cy="365760"/>
+          </a:xfrm>
+          <a:prstGeom prst="rect">
+            <a:avLst/>
+          </a:prstGeom>
+          <a:noFill/>
+        </p:spPr>
+        <p:txBody>
+          <a:bodyPr wrap="square" anchor="ctr" lIns="0" rIns="0" tIns="0" bIns="0">
+            <a:spAutoFit/>
+          </a:bodyPr>
+          <a:lstStyle/>
+          <a:p>
+            <a:pPr algn="r">
+              <a:lnSpc>
+                <a:spcPct val="100000"/>
+              </a:lnSpc>
+              <a:spcBef>
+                <a:spcPts val="0"/>
+              </a:spcBef>
+              <a:spcAft>
+                <a:spcPts val="600"/>
+              </a:spcAft>
+            </a:pPr>
+            <a:r>
+              <a:rPr sz="900" b="1">
+                <a:solidFill>
+                  <a:srgbClr val="0EA5E9"/>
+                </a:solidFill>
+                <a:latin typeface="NanumGothic"/>
+                <a:ea typeface="NanumGothic"/>
+                <a:cs typeface="NanumGothic"/>
+              </a:rPr>
+              <a:t>Day 2 · 화</a:t>
+            </a:r>
+            <a:r>
+              <a:rPr sz="900" b="1">
+                <a:solidFill>
+                  <a:srgbClr val="64748B"/>
+                </a:solidFill>
+                <a:latin typeface="NanumGothic"/>
+                <a:ea typeface="NanumGothic"/>
+                <a:cs typeface="NanumGothic"/>
+              </a:rPr>
+              <a:t>   ·   15 / 43</a:t>
             </a:r>
           </a:p>
         </p:txBody>
@@ -9156,54 +9280,7 @@
       </p:sp>
       <p:sp>
         <p:nvSpPr>
-          <p:cNvPr id="8" name="TextBox 7"/>
-          <p:cNvSpPr txBox="1"/>
-          <p:nvPr/>
-        </p:nvSpPr>
-        <p:spPr>
-          <a:xfrm>
-            <a:off x="10241280" y="6419088"/>
-            <a:ext cx="1463040" cy="365760"/>
-          </a:xfrm>
-          <a:prstGeom prst="rect">
-            <a:avLst/>
-          </a:prstGeom>
-          <a:noFill/>
-        </p:spPr>
-        <p:txBody>
-          <a:bodyPr wrap="square" anchor="ctr" lIns="0" rIns="0" tIns="0" bIns="0">
-            <a:spAutoFit/>
-          </a:bodyPr>
-          <a:lstStyle/>
-          <a:p>
-            <a:pPr algn="r">
-              <a:lnSpc>
-                <a:spcPct val="100000"/>
-              </a:lnSpc>
-              <a:spcBef>
-                <a:spcPts val="0"/>
-              </a:spcBef>
-              <a:spcAft>
-                <a:spcPts val="600"/>
-              </a:spcAft>
-            </a:pPr>
-            <a:r>
-              <a:rPr sz="900" b="1">
-                <a:solidFill>
-                  <a:srgbClr val="0EA5E9"/>
-                </a:solidFill>
-                <a:latin typeface="NanumGothic"/>
-                <a:ea typeface="NanumGothic"/>
-                <a:cs typeface="NanumGothic"/>
-              </a:rPr>
-              <a:t>Day 2 · 화</a:t>
-            </a:r>
-          </a:p>
-        </p:txBody>
-      </p:sp>
-      <p:sp>
-        <p:nvSpPr>
-          <p:cNvPr id="9" name="Oval 8"/>
+          <p:cNvPr id="8" name="Oval 7"/>
           <p:cNvSpPr/>
           <p:nvPr/>
         </p:nvSpPr>
@@ -9247,7 +9324,7 @@
       </p:sp>
       <p:sp>
         <p:nvSpPr>
-          <p:cNvPr id="10" name="TextBox 9"/>
+          <p:cNvPr id="9" name="TextBox 8"/>
           <p:cNvSpPr txBox="1"/>
           <p:nvPr/>
         </p:nvSpPr>
@@ -9294,7 +9371,7 @@
       </p:sp>
       <p:sp>
         <p:nvSpPr>
-          <p:cNvPr id="11" name="TextBox 10"/>
+          <p:cNvPr id="10" name="TextBox 9"/>
           <p:cNvSpPr txBox="1"/>
           <p:nvPr/>
         </p:nvSpPr>
@@ -9341,7 +9418,7 @@
       </p:sp>
       <p:sp>
         <p:nvSpPr>
-          <p:cNvPr id="12" name="Oval 11"/>
+          <p:cNvPr id="11" name="Oval 10"/>
           <p:cNvSpPr/>
           <p:nvPr/>
         </p:nvSpPr>
@@ -9385,7 +9462,7 @@
       </p:sp>
       <p:sp>
         <p:nvSpPr>
-          <p:cNvPr id="13" name="TextBox 12"/>
+          <p:cNvPr id="12" name="TextBox 11"/>
           <p:cNvSpPr txBox="1"/>
           <p:nvPr/>
         </p:nvSpPr>
@@ -9432,7 +9509,7 @@
       </p:sp>
       <p:sp>
         <p:nvSpPr>
-          <p:cNvPr id="14" name="TextBox 13"/>
+          <p:cNvPr id="13" name="TextBox 12"/>
           <p:cNvSpPr txBox="1"/>
           <p:nvPr/>
         </p:nvSpPr>
@@ -9479,7 +9556,7 @@
       </p:sp>
       <p:sp>
         <p:nvSpPr>
-          <p:cNvPr id="15" name="Oval 14"/>
+          <p:cNvPr id="14" name="Oval 13"/>
           <p:cNvSpPr/>
           <p:nvPr/>
         </p:nvSpPr>
@@ -9523,7 +9600,7 @@
       </p:sp>
       <p:sp>
         <p:nvSpPr>
-          <p:cNvPr id="16" name="TextBox 15"/>
+          <p:cNvPr id="15" name="TextBox 14"/>
           <p:cNvSpPr txBox="1"/>
           <p:nvPr/>
         </p:nvSpPr>
@@ -9570,7 +9647,7 @@
       </p:sp>
       <p:sp>
         <p:nvSpPr>
-          <p:cNvPr id="17" name="TextBox 16"/>
+          <p:cNvPr id="16" name="TextBox 15"/>
           <p:cNvSpPr txBox="1"/>
           <p:nvPr/>
         </p:nvSpPr>
@@ -9617,7 +9694,7 @@
       </p:sp>
       <p:sp>
         <p:nvSpPr>
-          <p:cNvPr id="18" name="Oval 17"/>
+          <p:cNvPr id="17" name="Oval 16"/>
           <p:cNvSpPr/>
           <p:nvPr/>
         </p:nvSpPr>
@@ -9661,7 +9738,7 @@
       </p:sp>
       <p:sp>
         <p:nvSpPr>
-          <p:cNvPr id="19" name="TextBox 18"/>
+          <p:cNvPr id="18" name="TextBox 17"/>
           <p:cNvSpPr txBox="1"/>
           <p:nvPr/>
         </p:nvSpPr>
@@ -9708,7 +9785,7 @@
       </p:sp>
       <p:sp>
         <p:nvSpPr>
-          <p:cNvPr id="20" name="TextBox 19"/>
+          <p:cNvPr id="19" name="TextBox 18"/>
           <p:cNvSpPr txBox="1"/>
           <p:nvPr/>
         </p:nvSpPr>
@@ -9755,7 +9832,7 @@
       </p:sp>
       <p:sp>
         <p:nvSpPr>
-          <p:cNvPr id="21" name="Rounded Rectangle 20"/>
+          <p:cNvPr id="20" name="Rounded Rectangle 19"/>
           <p:cNvSpPr/>
           <p:nvPr/>
         </p:nvSpPr>
@@ -9801,7 +9878,7 @@
       </p:sp>
       <p:sp>
         <p:nvSpPr>
-          <p:cNvPr id="22" name="TextBox 21"/>
+          <p:cNvPr id="21" name="TextBox 20"/>
           <p:cNvSpPr txBox="1"/>
           <p:nvPr/>
         </p:nvSpPr>
@@ -9853,6 +9930,64 @@
                 <a:cs typeface="NanumGothic"/>
               </a:rPr>
               <a:t>자율성이 높을수록 검증·안전장치가 중요</a:t>
+            </a:r>
+          </a:p>
+        </p:txBody>
+      </p:sp>
+      <p:sp>
+        <p:nvSpPr>
+          <p:cNvPr id="22" name="TextBox 21"/>
+          <p:cNvSpPr txBox="1"/>
+          <p:nvPr/>
+        </p:nvSpPr>
+        <p:spPr>
+          <a:xfrm>
+            <a:off x="8988552" y="6419088"/>
+            <a:ext cx="2697480" cy="365760"/>
+          </a:xfrm>
+          <a:prstGeom prst="rect">
+            <a:avLst/>
+          </a:prstGeom>
+          <a:noFill/>
+        </p:spPr>
+        <p:txBody>
+          <a:bodyPr wrap="square" anchor="ctr" lIns="0" rIns="0" tIns="0" bIns="0">
+            <a:spAutoFit/>
+          </a:bodyPr>
+          <a:lstStyle/>
+          <a:p>
+            <a:pPr algn="r">
+              <a:lnSpc>
+                <a:spcPct val="100000"/>
+              </a:lnSpc>
+              <a:spcBef>
+                <a:spcPts val="0"/>
+              </a:spcBef>
+              <a:spcAft>
+                <a:spcPts val="600"/>
+              </a:spcAft>
+            </a:pPr>
+            <a:r>
+              <a:rPr sz="900" b="1">
+                <a:solidFill>
+                  <a:srgbClr val="0EA5E9"/>
+                </a:solidFill>
+                <a:latin typeface="NanumGothic"/>
+                <a:ea typeface="NanumGothic"/>
+                <a:cs typeface="NanumGothic"/>
+              </a:rPr>
+              <a:t>Day 2 · 화</a:t>
+            </a:r>
+            <a:r>
+              <a:rPr sz="900" b="1">
+                <a:solidFill>
+                  <a:srgbClr val="64748B"/>
+                </a:solidFill>
+                <a:latin typeface="NanumGothic"/>
+                <a:ea typeface="NanumGothic"/>
+                <a:cs typeface="NanumGothic"/>
+              </a:rPr>
+              <a:t>   ·   16 / 43</a:t>
             </a:r>
           </a:p>
         </p:txBody>
@@ -10150,54 +10285,7 @@
       </p:sp>
       <p:sp>
         <p:nvSpPr>
-          <p:cNvPr id="8" name="TextBox 7"/>
-          <p:cNvSpPr txBox="1"/>
-          <p:nvPr/>
-        </p:nvSpPr>
-        <p:spPr>
-          <a:xfrm>
-            <a:off x="10241280" y="6419088"/>
-            <a:ext cx="1463040" cy="365760"/>
-          </a:xfrm>
-          <a:prstGeom prst="rect">
-            <a:avLst/>
-          </a:prstGeom>
-          <a:noFill/>
-        </p:spPr>
-        <p:txBody>
-          <a:bodyPr wrap="square" anchor="ctr" lIns="0" rIns="0" tIns="0" bIns="0">
-            <a:spAutoFit/>
-          </a:bodyPr>
-          <a:lstStyle/>
-          <a:p>
-            <a:pPr algn="r">
-              <a:lnSpc>
-                <a:spcPct val="100000"/>
-              </a:lnSpc>
-              <a:spcBef>
-                <a:spcPts val="0"/>
-              </a:spcBef>
-              <a:spcAft>
-                <a:spcPts val="600"/>
-              </a:spcAft>
-            </a:pPr>
-            <a:r>
-              <a:rPr sz="900" b="1">
-                <a:solidFill>
-                  <a:srgbClr val="0EA5E9"/>
-                </a:solidFill>
-                <a:latin typeface="NanumGothic"/>
-                <a:ea typeface="NanumGothic"/>
-                <a:cs typeface="NanumGothic"/>
-              </a:rPr>
-              <a:t>Day 2 · 화</a:t>
-            </a:r>
-          </a:p>
-        </p:txBody>
-      </p:sp>
-      <p:sp>
-        <p:nvSpPr>
-          <p:cNvPr id="9" name="Oval 8"/>
+          <p:cNvPr id="8" name="Oval 7"/>
           <p:cNvSpPr/>
           <p:nvPr/>
         </p:nvSpPr>
@@ -10241,7 +10329,7 @@
       </p:sp>
       <p:sp>
         <p:nvSpPr>
-          <p:cNvPr id="10" name="TextBox 9"/>
+          <p:cNvPr id="9" name="TextBox 8"/>
           <p:cNvSpPr txBox="1"/>
           <p:nvPr/>
         </p:nvSpPr>
@@ -10288,7 +10376,7 @@
       </p:sp>
       <p:sp>
         <p:nvSpPr>
-          <p:cNvPr id="11" name="TextBox 10"/>
+          <p:cNvPr id="10" name="TextBox 9"/>
           <p:cNvSpPr txBox="1"/>
           <p:nvPr/>
         </p:nvSpPr>
@@ -10335,7 +10423,7 @@
       </p:sp>
       <p:sp>
         <p:nvSpPr>
-          <p:cNvPr id="12" name="Oval 11"/>
+          <p:cNvPr id="11" name="Oval 10"/>
           <p:cNvSpPr/>
           <p:nvPr/>
         </p:nvSpPr>
@@ -10379,7 +10467,7 @@
       </p:sp>
       <p:sp>
         <p:nvSpPr>
-          <p:cNvPr id="13" name="TextBox 12"/>
+          <p:cNvPr id="12" name="TextBox 11"/>
           <p:cNvSpPr txBox="1"/>
           <p:nvPr/>
         </p:nvSpPr>
@@ -10426,7 +10514,7 @@
       </p:sp>
       <p:sp>
         <p:nvSpPr>
-          <p:cNvPr id="14" name="TextBox 13"/>
+          <p:cNvPr id="13" name="TextBox 12"/>
           <p:cNvSpPr txBox="1"/>
           <p:nvPr/>
         </p:nvSpPr>
@@ -10473,7 +10561,7 @@
       </p:sp>
       <p:sp>
         <p:nvSpPr>
-          <p:cNvPr id="15" name="Oval 14"/>
+          <p:cNvPr id="14" name="Oval 13"/>
           <p:cNvSpPr/>
           <p:nvPr/>
         </p:nvSpPr>
@@ -10517,7 +10605,7 @@
       </p:sp>
       <p:sp>
         <p:nvSpPr>
-          <p:cNvPr id="16" name="TextBox 15"/>
+          <p:cNvPr id="15" name="TextBox 14"/>
           <p:cNvSpPr txBox="1"/>
           <p:nvPr/>
         </p:nvSpPr>
@@ -10564,7 +10652,7 @@
       </p:sp>
       <p:sp>
         <p:nvSpPr>
-          <p:cNvPr id="17" name="TextBox 16"/>
+          <p:cNvPr id="16" name="TextBox 15"/>
           <p:cNvSpPr txBox="1"/>
           <p:nvPr/>
         </p:nvSpPr>
@@ -10611,7 +10699,7 @@
       </p:sp>
       <p:sp>
         <p:nvSpPr>
-          <p:cNvPr id="18" name="Oval 17"/>
+          <p:cNvPr id="17" name="Oval 16"/>
           <p:cNvSpPr/>
           <p:nvPr/>
         </p:nvSpPr>
@@ -10655,7 +10743,7 @@
       </p:sp>
       <p:sp>
         <p:nvSpPr>
-          <p:cNvPr id="19" name="TextBox 18"/>
+          <p:cNvPr id="18" name="TextBox 17"/>
           <p:cNvSpPr txBox="1"/>
           <p:nvPr/>
         </p:nvSpPr>
@@ -10702,7 +10790,7 @@
       </p:sp>
       <p:sp>
         <p:nvSpPr>
-          <p:cNvPr id="20" name="TextBox 19"/>
+          <p:cNvPr id="19" name="TextBox 18"/>
           <p:cNvSpPr txBox="1"/>
           <p:nvPr/>
         </p:nvSpPr>
@@ -10749,7 +10837,7 @@
       </p:sp>
       <p:sp>
         <p:nvSpPr>
-          <p:cNvPr id="21" name="Rounded Rectangle 20"/>
+          <p:cNvPr id="20" name="Rounded Rectangle 19"/>
           <p:cNvSpPr/>
           <p:nvPr/>
         </p:nvSpPr>
@@ -10795,7 +10883,7 @@
       </p:sp>
       <p:sp>
         <p:nvSpPr>
-          <p:cNvPr id="22" name="TextBox 21"/>
+          <p:cNvPr id="21" name="TextBox 20"/>
           <p:cNvSpPr txBox="1"/>
           <p:nvPr/>
         </p:nvSpPr>
@@ -10847,6 +10935,64 @@
                 <a:cs typeface="NanumGothic"/>
               </a:rPr>
               <a:t>성공담은 생존편향 큼 — 검증·보안·유지보수가 취약</a:t>
+            </a:r>
+          </a:p>
+        </p:txBody>
+      </p:sp>
+      <p:sp>
+        <p:nvSpPr>
+          <p:cNvPr id="22" name="TextBox 21"/>
+          <p:cNvSpPr txBox="1"/>
+          <p:nvPr/>
+        </p:nvSpPr>
+        <p:spPr>
+          <a:xfrm>
+            <a:off x="8988552" y="6419088"/>
+            <a:ext cx="2697480" cy="365760"/>
+          </a:xfrm>
+          <a:prstGeom prst="rect">
+            <a:avLst/>
+          </a:prstGeom>
+          <a:noFill/>
+        </p:spPr>
+        <p:txBody>
+          <a:bodyPr wrap="square" anchor="ctr" lIns="0" rIns="0" tIns="0" bIns="0">
+            <a:spAutoFit/>
+          </a:bodyPr>
+          <a:lstStyle/>
+          <a:p>
+            <a:pPr algn="r">
+              <a:lnSpc>
+                <a:spcPct val="100000"/>
+              </a:lnSpc>
+              <a:spcBef>
+                <a:spcPts val="0"/>
+              </a:spcBef>
+              <a:spcAft>
+                <a:spcPts val="600"/>
+              </a:spcAft>
+            </a:pPr>
+            <a:r>
+              <a:rPr sz="900" b="1">
+                <a:solidFill>
+                  <a:srgbClr val="0EA5E9"/>
+                </a:solidFill>
+                <a:latin typeface="NanumGothic"/>
+                <a:ea typeface="NanumGothic"/>
+                <a:cs typeface="NanumGothic"/>
+              </a:rPr>
+              <a:t>Day 2 · 화</a:t>
+            </a:r>
+            <a:r>
+              <a:rPr sz="900" b="1">
+                <a:solidFill>
+                  <a:srgbClr val="64748B"/>
+                </a:solidFill>
+                <a:latin typeface="NanumGothic"/>
+                <a:ea typeface="NanumGothic"/>
+                <a:cs typeface="NanumGothic"/>
+              </a:rPr>
+              <a:t>   ·   17 / 43</a:t>
             </a:r>
           </a:p>
         </p:txBody>
@@ -11144,54 +11290,7 @@
       </p:sp>
       <p:sp>
         <p:nvSpPr>
-          <p:cNvPr id="8" name="TextBox 7"/>
-          <p:cNvSpPr txBox="1"/>
-          <p:nvPr/>
-        </p:nvSpPr>
-        <p:spPr>
-          <a:xfrm>
-            <a:off x="10241280" y="6419088"/>
-            <a:ext cx="1463040" cy="365760"/>
-          </a:xfrm>
-          <a:prstGeom prst="rect">
-            <a:avLst/>
-          </a:prstGeom>
-          <a:noFill/>
-        </p:spPr>
-        <p:txBody>
-          <a:bodyPr wrap="square" anchor="ctr" lIns="0" rIns="0" tIns="0" bIns="0">
-            <a:spAutoFit/>
-          </a:bodyPr>
-          <a:lstStyle/>
-          <a:p>
-            <a:pPr algn="r">
-              <a:lnSpc>
-                <a:spcPct val="100000"/>
-              </a:lnSpc>
-              <a:spcBef>
-                <a:spcPts val="0"/>
-              </a:spcBef>
-              <a:spcAft>
-                <a:spcPts val="600"/>
-              </a:spcAft>
-            </a:pPr>
-            <a:r>
-              <a:rPr sz="900" b="1">
-                <a:solidFill>
-                  <a:srgbClr val="0EA5E9"/>
-                </a:solidFill>
-                <a:latin typeface="NanumGothic"/>
-                <a:ea typeface="NanumGothic"/>
-                <a:cs typeface="NanumGothic"/>
-              </a:rPr>
-              <a:t>Day 2 · 화</a:t>
-            </a:r>
-          </a:p>
-        </p:txBody>
-      </p:sp>
-      <p:sp>
-        <p:nvSpPr>
-          <p:cNvPr id="9" name="Rounded Rectangle 8"/>
+          <p:cNvPr id="8" name="Rounded Rectangle 7"/>
           <p:cNvSpPr/>
           <p:nvPr/>
         </p:nvSpPr>
@@ -11237,7 +11336,7 @@
       </p:sp>
       <p:sp>
         <p:nvSpPr>
-          <p:cNvPr id="10" name="Rectangle 9"/>
+          <p:cNvPr id="9" name="Rectangle 8"/>
           <p:cNvSpPr/>
           <p:nvPr/>
         </p:nvSpPr>
@@ -11281,7 +11380,7 @@
       </p:sp>
       <p:sp>
         <p:nvSpPr>
-          <p:cNvPr id="11" name="TextBox 10"/>
+          <p:cNvPr id="10" name="TextBox 9"/>
           <p:cNvSpPr txBox="1"/>
           <p:nvPr/>
         </p:nvSpPr>
@@ -11328,7 +11427,7 @@
       </p:sp>
       <p:sp>
         <p:nvSpPr>
-          <p:cNvPr id="12" name="TextBox 11"/>
+          <p:cNvPr id="11" name="TextBox 10"/>
           <p:cNvSpPr txBox="1"/>
           <p:nvPr/>
         </p:nvSpPr>
@@ -11375,7 +11474,7 @@
       </p:sp>
       <p:sp>
         <p:nvSpPr>
-          <p:cNvPr id="13" name="TextBox 12"/>
+          <p:cNvPr id="12" name="TextBox 11"/>
           <p:cNvSpPr txBox="1"/>
           <p:nvPr/>
         </p:nvSpPr>
@@ -11422,7 +11521,7 @@
       </p:sp>
       <p:sp>
         <p:nvSpPr>
-          <p:cNvPr id="14" name="TextBox 13"/>
+          <p:cNvPr id="13" name="TextBox 12"/>
           <p:cNvSpPr txBox="1"/>
           <p:nvPr/>
         </p:nvSpPr>
@@ -11469,7 +11568,7 @@
       </p:sp>
       <p:sp>
         <p:nvSpPr>
-          <p:cNvPr id="15" name="Rounded Rectangle 14"/>
+          <p:cNvPr id="14" name="Rounded Rectangle 13"/>
           <p:cNvSpPr/>
           <p:nvPr/>
         </p:nvSpPr>
@@ -11515,7 +11614,7 @@
       </p:sp>
       <p:sp>
         <p:nvSpPr>
-          <p:cNvPr id="16" name="Rectangle 15"/>
+          <p:cNvPr id="15" name="Rectangle 14"/>
           <p:cNvSpPr/>
           <p:nvPr/>
         </p:nvSpPr>
@@ -11559,7 +11658,7 @@
       </p:sp>
       <p:sp>
         <p:nvSpPr>
-          <p:cNvPr id="17" name="TextBox 16"/>
+          <p:cNvPr id="16" name="TextBox 15"/>
           <p:cNvSpPr txBox="1"/>
           <p:nvPr/>
         </p:nvSpPr>
@@ -11606,7 +11705,7 @@
       </p:sp>
       <p:sp>
         <p:nvSpPr>
-          <p:cNvPr id="18" name="TextBox 17"/>
+          <p:cNvPr id="17" name="TextBox 16"/>
           <p:cNvSpPr txBox="1"/>
           <p:nvPr/>
         </p:nvSpPr>
@@ -11653,7 +11752,7 @@
       </p:sp>
       <p:sp>
         <p:nvSpPr>
-          <p:cNvPr id="19" name="TextBox 18"/>
+          <p:cNvPr id="18" name="TextBox 17"/>
           <p:cNvSpPr txBox="1"/>
           <p:nvPr/>
         </p:nvSpPr>
@@ -11700,7 +11799,7 @@
       </p:sp>
       <p:sp>
         <p:nvSpPr>
-          <p:cNvPr id="20" name="TextBox 19"/>
+          <p:cNvPr id="19" name="TextBox 18"/>
           <p:cNvSpPr txBox="1"/>
           <p:nvPr/>
         </p:nvSpPr>
@@ -11747,7 +11846,7 @@
       </p:sp>
       <p:sp>
         <p:nvSpPr>
-          <p:cNvPr id="21" name="Rounded Rectangle 20"/>
+          <p:cNvPr id="20" name="Rounded Rectangle 19"/>
           <p:cNvSpPr/>
           <p:nvPr/>
         </p:nvSpPr>
@@ -11793,7 +11892,7 @@
       </p:sp>
       <p:sp>
         <p:nvSpPr>
-          <p:cNvPr id="22" name="Rectangle 21"/>
+          <p:cNvPr id="21" name="Rectangle 20"/>
           <p:cNvSpPr/>
           <p:nvPr/>
         </p:nvSpPr>
@@ -11837,7 +11936,7 @@
       </p:sp>
       <p:sp>
         <p:nvSpPr>
-          <p:cNvPr id="23" name="TextBox 22"/>
+          <p:cNvPr id="22" name="TextBox 21"/>
           <p:cNvSpPr txBox="1"/>
           <p:nvPr/>
         </p:nvSpPr>
@@ -11884,7 +11983,7 @@
       </p:sp>
       <p:sp>
         <p:nvSpPr>
-          <p:cNvPr id="24" name="TextBox 23"/>
+          <p:cNvPr id="23" name="TextBox 22"/>
           <p:cNvSpPr txBox="1"/>
           <p:nvPr/>
         </p:nvSpPr>
@@ -11931,7 +12030,7 @@
       </p:sp>
       <p:sp>
         <p:nvSpPr>
-          <p:cNvPr id="25" name="TextBox 24"/>
+          <p:cNvPr id="24" name="TextBox 23"/>
           <p:cNvSpPr txBox="1"/>
           <p:nvPr/>
         </p:nvSpPr>
@@ -11978,7 +12077,7 @@
       </p:sp>
       <p:sp>
         <p:nvSpPr>
-          <p:cNvPr id="26" name="TextBox 25"/>
+          <p:cNvPr id="25" name="TextBox 24"/>
           <p:cNvSpPr txBox="1"/>
           <p:nvPr/>
         </p:nvSpPr>
@@ -12025,7 +12124,7 @@
       </p:sp>
       <p:sp>
         <p:nvSpPr>
-          <p:cNvPr id="27" name="Rounded Rectangle 26"/>
+          <p:cNvPr id="26" name="Rounded Rectangle 25"/>
           <p:cNvSpPr/>
           <p:nvPr/>
         </p:nvSpPr>
@@ -12071,7 +12170,7 @@
       </p:sp>
       <p:sp>
         <p:nvSpPr>
-          <p:cNvPr id="28" name="Rectangle 27"/>
+          <p:cNvPr id="27" name="Rectangle 26"/>
           <p:cNvSpPr/>
           <p:nvPr/>
         </p:nvSpPr>
@@ -12115,7 +12214,7 @@
       </p:sp>
       <p:sp>
         <p:nvSpPr>
-          <p:cNvPr id="29" name="TextBox 28"/>
+          <p:cNvPr id="28" name="TextBox 27"/>
           <p:cNvSpPr txBox="1"/>
           <p:nvPr/>
         </p:nvSpPr>
@@ -12162,7 +12261,7 @@
       </p:sp>
       <p:sp>
         <p:nvSpPr>
-          <p:cNvPr id="30" name="TextBox 29"/>
+          <p:cNvPr id="29" name="TextBox 28"/>
           <p:cNvSpPr txBox="1"/>
           <p:nvPr/>
         </p:nvSpPr>
@@ -12209,7 +12308,7 @@
       </p:sp>
       <p:sp>
         <p:nvSpPr>
-          <p:cNvPr id="31" name="TextBox 30"/>
+          <p:cNvPr id="30" name="TextBox 29"/>
           <p:cNvSpPr txBox="1"/>
           <p:nvPr/>
         </p:nvSpPr>
@@ -12256,7 +12355,7 @@
       </p:sp>
       <p:sp>
         <p:nvSpPr>
-          <p:cNvPr id="32" name="Rounded Rectangle 31"/>
+          <p:cNvPr id="31" name="Rounded Rectangle 30"/>
           <p:cNvSpPr/>
           <p:nvPr/>
         </p:nvSpPr>
@@ -12302,7 +12401,7 @@
       </p:sp>
       <p:sp>
         <p:nvSpPr>
-          <p:cNvPr id="33" name="TextBox 32"/>
+          <p:cNvPr id="32" name="TextBox 31"/>
           <p:cNvSpPr txBox="1"/>
           <p:nvPr/>
         </p:nvSpPr>
@@ -12354,6 +12453,64 @@
                 <a:cs typeface="NanumGothic"/>
               </a:rPr>
               <a:t>큰 한 번보다, 작은 단위로 반복하는 것이 핵심 — 이제 각 단계를 하나씩</a:t>
+            </a:r>
+          </a:p>
+        </p:txBody>
+      </p:sp>
+      <p:sp>
+        <p:nvSpPr>
+          <p:cNvPr id="33" name="TextBox 32"/>
+          <p:cNvSpPr txBox="1"/>
+          <p:nvPr/>
+        </p:nvSpPr>
+        <p:spPr>
+          <a:xfrm>
+            <a:off x="8988552" y="6419088"/>
+            <a:ext cx="2697480" cy="365760"/>
+          </a:xfrm>
+          <a:prstGeom prst="rect">
+            <a:avLst/>
+          </a:prstGeom>
+          <a:noFill/>
+        </p:spPr>
+        <p:txBody>
+          <a:bodyPr wrap="square" anchor="ctr" lIns="0" rIns="0" tIns="0" bIns="0">
+            <a:spAutoFit/>
+          </a:bodyPr>
+          <a:lstStyle/>
+          <a:p>
+            <a:pPr algn="r">
+              <a:lnSpc>
+                <a:spcPct val="100000"/>
+              </a:lnSpc>
+              <a:spcBef>
+                <a:spcPts val="0"/>
+              </a:spcBef>
+              <a:spcAft>
+                <a:spcPts val="600"/>
+              </a:spcAft>
+            </a:pPr>
+            <a:r>
+              <a:rPr sz="900" b="1">
+                <a:solidFill>
+                  <a:srgbClr val="0EA5E9"/>
+                </a:solidFill>
+                <a:latin typeface="NanumGothic"/>
+                <a:ea typeface="NanumGothic"/>
+                <a:cs typeface="NanumGothic"/>
+              </a:rPr>
+              <a:t>Day 2 · 화</a:t>
+            </a:r>
+            <a:r>
+              <a:rPr sz="900" b="1">
+                <a:solidFill>
+                  <a:srgbClr val="64748B"/>
+                </a:solidFill>
+                <a:latin typeface="NanumGothic"/>
+                <a:ea typeface="NanumGothic"/>
+                <a:cs typeface="NanumGothic"/>
+              </a:rPr>
+              <a:t>   ·   18 / 43</a:t>
             </a:r>
           </a:p>
         </p:txBody>
@@ -12651,54 +12808,7 @@
       </p:sp>
       <p:sp>
         <p:nvSpPr>
-          <p:cNvPr id="8" name="TextBox 7"/>
-          <p:cNvSpPr txBox="1"/>
-          <p:nvPr/>
-        </p:nvSpPr>
-        <p:spPr>
-          <a:xfrm>
-            <a:off x="10241280" y="6419088"/>
-            <a:ext cx="1463040" cy="365760"/>
-          </a:xfrm>
-          <a:prstGeom prst="rect">
-            <a:avLst/>
-          </a:prstGeom>
-          <a:noFill/>
-        </p:spPr>
-        <p:txBody>
-          <a:bodyPr wrap="square" anchor="ctr" lIns="0" rIns="0" tIns="0" bIns="0">
-            <a:spAutoFit/>
-          </a:bodyPr>
-          <a:lstStyle/>
-          <a:p>
-            <a:pPr algn="r">
-              <a:lnSpc>
-                <a:spcPct val="100000"/>
-              </a:lnSpc>
-              <a:spcBef>
-                <a:spcPts val="0"/>
-              </a:spcBef>
-              <a:spcAft>
-                <a:spcPts val="600"/>
-              </a:spcAft>
-            </a:pPr>
-            <a:r>
-              <a:rPr sz="900" b="1">
-                <a:solidFill>
-                  <a:srgbClr val="0EA5E9"/>
-                </a:solidFill>
-                <a:latin typeface="NanumGothic"/>
-                <a:ea typeface="NanumGothic"/>
-                <a:cs typeface="NanumGothic"/>
-              </a:rPr>
-              <a:t>Day 2 · 화</a:t>
-            </a:r>
-          </a:p>
-        </p:txBody>
-      </p:sp>
-      <p:sp>
-        <p:nvSpPr>
-          <p:cNvPr id="9" name="Oval 8"/>
+          <p:cNvPr id="8" name="Oval 7"/>
           <p:cNvSpPr/>
           <p:nvPr/>
         </p:nvSpPr>
@@ -12742,7 +12852,7 @@
       </p:sp>
       <p:sp>
         <p:nvSpPr>
-          <p:cNvPr id="10" name="TextBox 9"/>
+          <p:cNvPr id="9" name="TextBox 8"/>
           <p:cNvSpPr txBox="1"/>
           <p:nvPr/>
         </p:nvSpPr>
@@ -12789,7 +12899,7 @@
       </p:sp>
       <p:sp>
         <p:nvSpPr>
-          <p:cNvPr id="11" name="TextBox 10"/>
+          <p:cNvPr id="10" name="TextBox 9"/>
           <p:cNvSpPr txBox="1"/>
           <p:nvPr/>
         </p:nvSpPr>
@@ -12836,7 +12946,7 @@
       </p:sp>
       <p:sp>
         <p:nvSpPr>
-          <p:cNvPr id="12" name="Oval 11"/>
+          <p:cNvPr id="11" name="Oval 10"/>
           <p:cNvSpPr/>
           <p:nvPr/>
         </p:nvSpPr>
@@ -12880,7 +12990,7 @@
       </p:sp>
       <p:sp>
         <p:nvSpPr>
-          <p:cNvPr id="13" name="TextBox 12"/>
+          <p:cNvPr id="12" name="TextBox 11"/>
           <p:cNvSpPr txBox="1"/>
           <p:nvPr/>
         </p:nvSpPr>
@@ -12927,7 +13037,7 @@
       </p:sp>
       <p:sp>
         <p:nvSpPr>
-          <p:cNvPr id="14" name="TextBox 13"/>
+          <p:cNvPr id="13" name="TextBox 12"/>
           <p:cNvSpPr txBox="1"/>
           <p:nvPr/>
         </p:nvSpPr>
@@ -12974,7 +13084,7 @@
       </p:sp>
       <p:sp>
         <p:nvSpPr>
-          <p:cNvPr id="15" name="Oval 14"/>
+          <p:cNvPr id="14" name="Oval 13"/>
           <p:cNvSpPr/>
           <p:nvPr/>
         </p:nvSpPr>
@@ -13018,7 +13128,7 @@
       </p:sp>
       <p:sp>
         <p:nvSpPr>
-          <p:cNvPr id="16" name="TextBox 15"/>
+          <p:cNvPr id="15" name="TextBox 14"/>
           <p:cNvSpPr txBox="1"/>
           <p:nvPr/>
         </p:nvSpPr>
@@ -13065,7 +13175,7 @@
       </p:sp>
       <p:sp>
         <p:nvSpPr>
-          <p:cNvPr id="17" name="TextBox 16"/>
+          <p:cNvPr id="16" name="TextBox 15"/>
           <p:cNvSpPr txBox="1"/>
           <p:nvPr/>
         </p:nvSpPr>
@@ -13106,6 +13216,64 @@
                 <a:cs typeface="NanumGothic"/>
               </a:rPr>
               <a:t>목표·입력·출력·제약을 분명히</a:t>
+            </a:r>
+          </a:p>
+        </p:txBody>
+      </p:sp>
+      <p:sp>
+        <p:nvSpPr>
+          <p:cNvPr id="17" name="TextBox 16"/>
+          <p:cNvSpPr txBox="1"/>
+          <p:nvPr/>
+        </p:nvSpPr>
+        <p:spPr>
+          <a:xfrm>
+            <a:off x="8988552" y="6419088"/>
+            <a:ext cx="2697480" cy="365760"/>
+          </a:xfrm>
+          <a:prstGeom prst="rect">
+            <a:avLst/>
+          </a:prstGeom>
+          <a:noFill/>
+        </p:spPr>
+        <p:txBody>
+          <a:bodyPr wrap="square" anchor="ctr" lIns="0" rIns="0" tIns="0" bIns="0">
+            <a:spAutoFit/>
+          </a:bodyPr>
+          <a:lstStyle/>
+          <a:p>
+            <a:pPr algn="r">
+              <a:lnSpc>
+                <a:spcPct val="100000"/>
+              </a:lnSpc>
+              <a:spcBef>
+                <a:spcPts val="0"/>
+              </a:spcBef>
+              <a:spcAft>
+                <a:spcPts val="600"/>
+              </a:spcAft>
+            </a:pPr>
+            <a:r>
+              <a:rPr sz="900" b="1">
+                <a:solidFill>
+                  <a:srgbClr val="0EA5E9"/>
+                </a:solidFill>
+                <a:latin typeface="NanumGothic"/>
+                <a:ea typeface="NanumGothic"/>
+                <a:cs typeface="NanumGothic"/>
+              </a:rPr>
+              <a:t>Day 2 · 화</a:t>
+            </a:r>
+            <a:r>
+              <a:rPr sz="900" b="1">
+                <a:solidFill>
+                  <a:srgbClr val="64748B"/>
+                </a:solidFill>
+                <a:latin typeface="NanumGothic"/>
+                <a:ea typeface="NanumGothic"/>
+                <a:cs typeface="NanumGothic"/>
+              </a:rPr>
+              <a:t>   ·   19 / 43</a:t>
             </a:r>
           </a:p>
         </p:txBody>
@@ -13403,54 +13571,7 @@
       </p:sp>
       <p:sp>
         <p:nvSpPr>
-          <p:cNvPr id="8" name="TextBox 7"/>
-          <p:cNvSpPr txBox="1"/>
-          <p:nvPr/>
-        </p:nvSpPr>
-        <p:spPr>
-          <a:xfrm>
-            <a:off x="10241280" y="6419088"/>
-            <a:ext cx="1463040" cy="365760"/>
-          </a:xfrm>
-          <a:prstGeom prst="rect">
-            <a:avLst/>
-          </a:prstGeom>
-          <a:noFill/>
-        </p:spPr>
-        <p:txBody>
-          <a:bodyPr wrap="square" anchor="ctr" lIns="0" rIns="0" tIns="0" bIns="0">
-            <a:spAutoFit/>
-          </a:bodyPr>
-          <a:lstStyle/>
-          <a:p>
-            <a:pPr algn="r">
-              <a:lnSpc>
-                <a:spcPct val="100000"/>
-              </a:lnSpc>
-              <a:spcBef>
-                <a:spcPts val="0"/>
-              </a:spcBef>
-              <a:spcAft>
-                <a:spcPts val="600"/>
-              </a:spcAft>
-            </a:pPr>
-            <a:r>
-              <a:rPr sz="900" b="1">
-                <a:solidFill>
-                  <a:srgbClr val="0EA5E9"/>
-                </a:solidFill>
-                <a:latin typeface="NanumGothic"/>
-                <a:ea typeface="NanumGothic"/>
-                <a:cs typeface="NanumGothic"/>
-              </a:rPr>
-              <a:t>Day 2 · 화</a:t>
-            </a:r>
-          </a:p>
-        </p:txBody>
-      </p:sp>
-      <p:sp>
-        <p:nvSpPr>
-          <p:cNvPr id="9" name="Rounded Rectangle 8"/>
+          <p:cNvPr id="8" name="Rounded Rectangle 7"/>
           <p:cNvSpPr/>
           <p:nvPr/>
         </p:nvSpPr>
@@ -13496,7 +13617,7 @@
       </p:sp>
       <p:sp>
         <p:nvSpPr>
-          <p:cNvPr id="10" name="TextBox 9"/>
+          <p:cNvPr id="9" name="TextBox 8"/>
           <p:cNvSpPr txBox="1"/>
           <p:nvPr/>
         </p:nvSpPr>
@@ -13567,7 +13688,7 @@
       </p:sp>
       <p:sp>
         <p:nvSpPr>
-          <p:cNvPr id="11" name="TextBox 10"/>
+          <p:cNvPr id="10" name="TextBox 9"/>
           <p:cNvSpPr txBox="1"/>
           <p:nvPr/>
         </p:nvSpPr>
@@ -13614,7 +13735,7 @@
       </p:sp>
       <p:sp>
         <p:nvSpPr>
-          <p:cNvPr id="12" name="Rounded Rectangle 11"/>
+          <p:cNvPr id="11" name="Rounded Rectangle 10"/>
           <p:cNvSpPr/>
           <p:nvPr/>
         </p:nvSpPr>
@@ -13658,7 +13779,7 @@
       </p:sp>
       <p:sp>
         <p:nvSpPr>
-          <p:cNvPr id="13" name="TextBox 12"/>
+          <p:cNvPr id="12" name="TextBox 11"/>
           <p:cNvSpPr txBox="1"/>
           <p:nvPr/>
         </p:nvSpPr>
@@ -13729,7 +13850,7 @@
       </p:sp>
       <p:sp>
         <p:nvSpPr>
-          <p:cNvPr id="14" name="TextBox 13"/>
+          <p:cNvPr id="13" name="TextBox 12"/>
           <p:cNvSpPr txBox="1"/>
           <p:nvPr/>
         </p:nvSpPr>
@@ -13776,7 +13897,7 @@
       </p:sp>
       <p:sp>
         <p:nvSpPr>
-          <p:cNvPr id="15" name="TextBox 14"/>
+          <p:cNvPr id="14" name="TextBox 13"/>
           <p:cNvSpPr txBox="1"/>
           <p:nvPr/>
         </p:nvSpPr>
@@ -13823,7 +13944,7 @@
       </p:sp>
       <p:sp>
         <p:nvSpPr>
-          <p:cNvPr id="16" name="Rounded Rectangle 15"/>
+          <p:cNvPr id="15" name="Rounded Rectangle 14"/>
           <p:cNvSpPr/>
           <p:nvPr/>
         </p:nvSpPr>
@@ -13869,7 +13990,7 @@
       </p:sp>
       <p:sp>
         <p:nvSpPr>
-          <p:cNvPr id="17" name="TextBox 16"/>
+          <p:cNvPr id="16" name="TextBox 15"/>
           <p:cNvSpPr txBox="1"/>
           <p:nvPr/>
         </p:nvSpPr>
@@ -13940,7 +14061,7 @@
       </p:sp>
       <p:sp>
         <p:nvSpPr>
-          <p:cNvPr id="18" name="TextBox 17"/>
+          <p:cNvPr id="17" name="TextBox 16"/>
           <p:cNvSpPr txBox="1"/>
           <p:nvPr/>
         </p:nvSpPr>
@@ -13987,7 +14108,7 @@
       </p:sp>
       <p:sp>
         <p:nvSpPr>
-          <p:cNvPr id="19" name="Rounded Rectangle 18"/>
+          <p:cNvPr id="18" name="Rounded Rectangle 17"/>
           <p:cNvSpPr/>
           <p:nvPr/>
         </p:nvSpPr>
@@ -14033,7 +14154,7 @@
       </p:sp>
       <p:sp>
         <p:nvSpPr>
-          <p:cNvPr id="20" name="TextBox 19"/>
+          <p:cNvPr id="19" name="TextBox 18"/>
           <p:cNvSpPr txBox="1"/>
           <p:nvPr/>
         </p:nvSpPr>
@@ -14104,7 +14225,7 @@
       </p:sp>
       <p:sp>
         <p:nvSpPr>
-          <p:cNvPr id="21" name="TextBox 20"/>
+          <p:cNvPr id="20" name="TextBox 19"/>
           <p:cNvSpPr txBox="1"/>
           <p:nvPr/>
         </p:nvSpPr>
@@ -14151,7 +14272,7 @@
       </p:sp>
       <p:sp>
         <p:nvSpPr>
-          <p:cNvPr id="22" name="Rounded Rectangle 21"/>
+          <p:cNvPr id="21" name="Rounded Rectangle 20"/>
           <p:cNvSpPr/>
           <p:nvPr/>
         </p:nvSpPr>
@@ -14197,7 +14318,7 @@
       </p:sp>
       <p:sp>
         <p:nvSpPr>
-          <p:cNvPr id="23" name="TextBox 22"/>
+          <p:cNvPr id="22" name="TextBox 21"/>
           <p:cNvSpPr txBox="1"/>
           <p:nvPr/>
         </p:nvSpPr>
@@ -14268,7 +14389,7 @@
       </p:sp>
       <p:sp>
         <p:nvSpPr>
-          <p:cNvPr id="24" name="TextBox 23"/>
+          <p:cNvPr id="23" name="TextBox 22"/>
           <p:cNvSpPr txBox="1"/>
           <p:nvPr/>
         </p:nvSpPr>
@@ -14315,7 +14436,7 @@
       </p:sp>
       <p:sp>
         <p:nvSpPr>
-          <p:cNvPr id="25" name="TextBox 24"/>
+          <p:cNvPr id="24" name="TextBox 23"/>
           <p:cNvSpPr txBox="1"/>
           <p:nvPr/>
         </p:nvSpPr>
@@ -14367,6 +14488,64 @@
                 <a:cs typeface="NanumGothic"/>
               </a:rPr>
               <a:t>이론 → 도구 → 실전 → 결과 → 발표</a:t>
+            </a:r>
+          </a:p>
+        </p:txBody>
+      </p:sp>
+      <p:sp>
+        <p:nvSpPr>
+          <p:cNvPr id="25" name="TextBox 24"/>
+          <p:cNvSpPr txBox="1"/>
+          <p:nvPr/>
+        </p:nvSpPr>
+        <p:spPr>
+          <a:xfrm>
+            <a:off x="8988552" y="6419088"/>
+            <a:ext cx="2697480" cy="365760"/>
+          </a:xfrm>
+          <a:prstGeom prst="rect">
+            <a:avLst/>
+          </a:prstGeom>
+          <a:noFill/>
+        </p:spPr>
+        <p:txBody>
+          <a:bodyPr wrap="square" anchor="ctr" lIns="0" rIns="0" tIns="0" bIns="0">
+            <a:spAutoFit/>
+          </a:bodyPr>
+          <a:lstStyle/>
+          <a:p>
+            <a:pPr algn="r">
+              <a:lnSpc>
+                <a:spcPct val="100000"/>
+              </a:lnSpc>
+              <a:spcBef>
+                <a:spcPts val="0"/>
+              </a:spcBef>
+              <a:spcAft>
+                <a:spcPts val="600"/>
+              </a:spcAft>
+            </a:pPr>
+            <a:r>
+              <a:rPr sz="900" b="1">
+                <a:solidFill>
+                  <a:srgbClr val="0EA5E9"/>
+                </a:solidFill>
+                <a:latin typeface="NanumGothic"/>
+                <a:ea typeface="NanumGothic"/>
+                <a:cs typeface="NanumGothic"/>
+              </a:rPr>
+              <a:t>Day 2 · 화</a:t>
+            </a:r>
+            <a:r>
+              <a:rPr sz="900" b="1">
+                <a:solidFill>
+                  <a:srgbClr val="64748B"/>
+                </a:solidFill>
+                <a:latin typeface="NanumGothic"/>
+                <a:ea typeface="NanumGothic"/>
+                <a:cs typeface="NanumGothic"/>
+              </a:rPr>
+              <a:t>   ·   2 / 43</a:t>
             </a:r>
           </a:p>
         </p:txBody>
@@ -14664,54 +14843,7 @@
       </p:sp>
       <p:sp>
         <p:nvSpPr>
-          <p:cNvPr id="8" name="TextBox 7"/>
-          <p:cNvSpPr txBox="1"/>
-          <p:nvPr/>
-        </p:nvSpPr>
-        <p:spPr>
-          <a:xfrm>
-            <a:off x="10241280" y="6419088"/>
-            <a:ext cx="1463040" cy="365760"/>
-          </a:xfrm>
-          <a:prstGeom prst="rect">
-            <a:avLst/>
-          </a:prstGeom>
-          <a:noFill/>
-        </p:spPr>
-        <p:txBody>
-          <a:bodyPr wrap="square" anchor="ctr" lIns="0" rIns="0" tIns="0" bIns="0">
-            <a:spAutoFit/>
-          </a:bodyPr>
-          <a:lstStyle/>
-          <a:p>
-            <a:pPr algn="r">
-              <a:lnSpc>
-                <a:spcPct val="100000"/>
-              </a:lnSpc>
-              <a:spcBef>
-                <a:spcPts val="0"/>
-              </a:spcBef>
-              <a:spcAft>
-                <a:spcPts val="600"/>
-              </a:spcAft>
-            </a:pPr>
-            <a:r>
-              <a:rPr sz="900" b="1">
-                <a:solidFill>
-                  <a:srgbClr val="0EA5E9"/>
-                </a:solidFill>
-                <a:latin typeface="NanumGothic"/>
-                <a:ea typeface="NanumGothic"/>
-                <a:cs typeface="NanumGothic"/>
-              </a:rPr>
-              <a:t>Day 2 · 화</a:t>
-            </a:r>
-          </a:p>
-        </p:txBody>
-      </p:sp>
-      <p:sp>
-        <p:nvSpPr>
-          <p:cNvPr id="9" name="Oval 8"/>
+          <p:cNvPr id="8" name="Oval 7"/>
           <p:cNvSpPr/>
           <p:nvPr/>
         </p:nvSpPr>
@@ -14755,7 +14887,7 @@
       </p:sp>
       <p:sp>
         <p:nvSpPr>
-          <p:cNvPr id="10" name="TextBox 9"/>
+          <p:cNvPr id="9" name="TextBox 8"/>
           <p:cNvSpPr txBox="1"/>
           <p:nvPr/>
         </p:nvSpPr>
@@ -14802,7 +14934,7 @@
       </p:sp>
       <p:sp>
         <p:nvSpPr>
-          <p:cNvPr id="11" name="TextBox 10"/>
+          <p:cNvPr id="10" name="TextBox 9"/>
           <p:cNvSpPr txBox="1"/>
           <p:nvPr/>
         </p:nvSpPr>
@@ -14849,7 +14981,7 @@
       </p:sp>
       <p:sp>
         <p:nvSpPr>
-          <p:cNvPr id="12" name="Oval 11"/>
+          <p:cNvPr id="11" name="Oval 10"/>
           <p:cNvSpPr/>
           <p:nvPr/>
         </p:nvSpPr>
@@ -14893,7 +15025,7 @@
       </p:sp>
       <p:sp>
         <p:nvSpPr>
-          <p:cNvPr id="13" name="TextBox 12"/>
+          <p:cNvPr id="12" name="TextBox 11"/>
           <p:cNvSpPr txBox="1"/>
           <p:nvPr/>
         </p:nvSpPr>
@@ -14940,7 +15072,7 @@
       </p:sp>
       <p:sp>
         <p:nvSpPr>
-          <p:cNvPr id="14" name="TextBox 13"/>
+          <p:cNvPr id="13" name="TextBox 12"/>
           <p:cNvSpPr txBox="1"/>
           <p:nvPr/>
         </p:nvSpPr>
@@ -14987,7 +15119,7 @@
       </p:sp>
       <p:sp>
         <p:nvSpPr>
-          <p:cNvPr id="15" name="Oval 14"/>
+          <p:cNvPr id="14" name="Oval 13"/>
           <p:cNvSpPr/>
           <p:nvPr/>
         </p:nvSpPr>
@@ -15031,7 +15163,7 @@
       </p:sp>
       <p:sp>
         <p:nvSpPr>
-          <p:cNvPr id="16" name="TextBox 15"/>
+          <p:cNvPr id="15" name="TextBox 14"/>
           <p:cNvSpPr txBox="1"/>
           <p:nvPr/>
         </p:nvSpPr>
@@ -15078,7 +15210,7 @@
       </p:sp>
       <p:sp>
         <p:nvSpPr>
-          <p:cNvPr id="17" name="TextBox 16"/>
+          <p:cNvPr id="16" name="TextBox 15"/>
           <p:cNvSpPr txBox="1"/>
           <p:nvPr/>
         </p:nvSpPr>
@@ -15119,6 +15251,64 @@
                 <a:cs typeface="NanumGothic"/>
               </a:rPr>
               <a:t>한 번에 큰 덩어리보다 작은 기능 단위로</a:t>
+            </a:r>
+          </a:p>
+        </p:txBody>
+      </p:sp>
+      <p:sp>
+        <p:nvSpPr>
+          <p:cNvPr id="17" name="TextBox 16"/>
+          <p:cNvSpPr txBox="1"/>
+          <p:nvPr/>
+        </p:nvSpPr>
+        <p:spPr>
+          <a:xfrm>
+            <a:off x="8988552" y="6419088"/>
+            <a:ext cx="2697480" cy="365760"/>
+          </a:xfrm>
+          <a:prstGeom prst="rect">
+            <a:avLst/>
+          </a:prstGeom>
+          <a:noFill/>
+        </p:spPr>
+        <p:txBody>
+          <a:bodyPr wrap="square" anchor="ctr" lIns="0" rIns="0" tIns="0" bIns="0">
+            <a:spAutoFit/>
+          </a:bodyPr>
+          <a:lstStyle/>
+          <a:p>
+            <a:pPr algn="r">
+              <a:lnSpc>
+                <a:spcPct val="100000"/>
+              </a:lnSpc>
+              <a:spcBef>
+                <a:spcPts val="0"/>
+              </a:spcBef>
+              <a:spcAft>
+                <a:spcPts val="600"/>
+              </a:spcAft>
+            </a:pPr>
+            <a:r>
+              <a:rPr sz="900" b="1">
+                <a:solidFill>
+                  <a:srgbClr val="0EA5E9"/>
+                </a:solidFill>
+                <a:latin typeface="NanumGothic"/>
+                <a:ea typeface="NanumGothic"/>
+                <a:cs typeface="NanumGothic"/>
+              </a:rPr>
+              <a:t>Day 2 · 화</a:t>
+            </a:r>
+            <a:r>
+              <a:rPr sz="900" b="1">
+                <a:solidFill>
+                  <a:srgbClr val="64748B"/>
+                </a:solidFill>
+                <a:latin typeface="NanumGothic"/>
+                <a:ea typeface="NanumGothic"/>
+                <a:cs typeface="NanumGothic"/>
+              </a:rPr>
+              <a:t>   ·   20 / 43</a:t>
             </a:r>
           </a:p>
         </p:txBody>
@@ -15416,54 +15606,7 @@
       </p:sp>
       <p:sp>
         <p:nvSpPr>
-          <p:cNvPr id="8" name="TextBox 7"/>
-          <p:cNvSpPr txBox="1"/>
-          <p:nvPr/>
-        </p:nvSpPr>
-        <p:spPr>
-          <a:xfrm>
-            <a:off x="10241280" y="6419088"/>
-            <a:ext cx="1463040" cy="365760"/>
-          </a:xfrm>
-          <a:prstGeom prst="rect">
-            <a:avLst/>
-          </a:prstGeom>
-          <a:noFill/>
-        </p:spPr>
-        <p:txBody>
-          <a:bodyPr wrap="square" anchor="ctr" lIns="0" rIns="0" tIns="0" bIns="0">
-            <a:spAutoFit/>
-          </a:bodyPr>
-          <a:lstStyle/>
-          <a:p>
-            <a:pPr algn="r">
-              <a:lnSpc>
-                <a:spcPct val="100000"/>
-              </a:lnSpc>
-              <a:spcBef>
-                <a:spcPts val="0"/>
-              </a:spcBef>
-              <a:spcAft>
-                <a:spcPts val="600"/>
-              </a:spcAft>
-            </a:pPr>
-            <a:r>
-              <a:rPr sz="900" b="1">
-                <a:solidFill>
-                  <a:srgbClr val="0EA5E9"/>
-                </a:solidFill>
-                <a:latin typeface="NanumGothic"/>
-                <a:ea typeface="NanumGothic"/>
-                <a:cs typeface="NanumGothic"/>
-              </a:rPr>
-              <a:t>Day 2 · 화</a:t>
-            </a:r>
-          </a:p>
-        </p:txBody>
-      </p:sp>
-      <p:sp>
-        <p:nvSpPr>
-          <p:cNvPr id="9" name="Oval 8"/>
+          <p:cNvPr id="8" name="Oval 7"/>
           <p:cNvSpPr/>
           <p:nvPr/>
         </p:nvSpPr>
@@ -15507,7 +15650,7 @@
       </p:sp>
       <p:sp>
         <p:nvSpPr>
-          <p:cNvPr id="10" name="TextBox 9"/>
+          <p:cNvPr id="9" name="TextBox 8"/>
           <p:cNvSpPr txBox="1"/>
           <p:nvPr/>
         </p:nvSpPr>
@@ -15554,7 +15697,7 @@
       </p:sp>
       <p:sp>
         <p:nvSpPr>
-          <p:cNvPr id="11" name="TextBox 10"/>
+          <p:cNvPr id="10" name="TextBox 9"/>
           <p:cNvSpPr txBox="1"/>
           <p:nvPr/>
         </p:nvSpPr>
@@ -15601,7 +15744,7 @@
       </p:sp>
       <p:sp>
         <p:nvSpPr>
-          <p:cNvPr id="12" name="Oval 11"/>
+          <p:cNvPr id="11" name="Oval 10"/>
           <p:cNvSpPr/>
           <p:nvPr/>
         </p:nvSpPr>
@@ -15645,7 +15788,7 @@
       </p:sp>
       <p:sp>
         <p:nvSpPr>
-          <p:cNvPr id="13" name="TextBox 12"/>
+          <p:cNvPr id="12" name="TextBox 11"/>
           <p:cNvSpPr txBox="1"/>
           <p:nvPr/>
         </p:nvSpPr>
@@ -15692,7 +15835,7 @@
       </p:sp>
       <p:sp>
         <p:nvSpPr>
-          <p:cNvPr id="14" name="TextBox 13"/>
+          <p:cNvPr id="13" name="TextBox 12"/>
           <p:cNvSpPr txBox="1"/>
           <p:nvPr/>
         </p:nvSpPr>
@@ -15739,7 +15882,7 @@
       </p:sp>
       <p:sp>
         <p:nvSpPr>
-          <p:cNvPr id="15" name="Oval 14"/>
+          <p:cNvPr id="14" name="Oval 13"/>
           <p:cNvSpPr/>
           <p:nvPr/>
         </p:nvSpPr>
@@ -15783,7 +15926,7 @@
       </p:sp>
       <p:sp>
         <p:nvSpPr>
-          <p:cNvPr id="16" name="TextBox 15"/>
+          <p:cNvPr id="15" name="TextBox 14"/>
           <p:cNvSpPr txBox="1"/>
           <p:nvPr/>
         </p:nvSpPr>
@@ -15830,7 +15973,7 @@
       </p:sp>
       <p:sp>
         <p:nvSpPr>
-          <p:cNvPr id="17" name="TextBox 16"/>
+          <p:cNvPr id="16" name="TextBox 15"/>
           <p:cNvSpPr txBox="1"/>
           <p:nvPr/>
         </p:nvSpPr>
@@ -15871,6 +16014,64 @@
                 <a:cs typeface="NanumGothic"/>
               </a:rPr>
               <a:t>'된다고 말함'이 아니라 '되는 것을 봄'</a:t>
+            </a:r>
+          </a:p>
+        </p:txBody>
+      </p:sp>
+      <p:sp>
+        <p:nvSpPr>
+          <p:cNvPr id="17" name="TextBox 16"/>
+          <p:cNvSpPr txBox="1"/>
+          <p:nvPr/>
+        </p:nvSpPr>
+        <p:spPr>
+          <a:xfrm>
+            <a:off x="8988552" y="6419088"/>
+            <a:ext cx="2697480" cy="365760"/>
+          </a:xfrm>
+          <a:prstGeom prst="rect">
+            <a:avLst/>
+          </a:prstGeom>
+          <a:noFill/>
+        </p:spPr>
+        <p:txBody>
+          <a:bodyPr wrap="square" anchor="ctr" lIns="0" rIns="0" tIns="0" bIns="0">
+            <a:spAutoFit/>
+          </a:bodyPr>
+          <a:lstStyle/>
+          <a:p>
+            <a:pPr algn="r">
+              <a:lnSpc>
+                <a:spcPct val="100000"/>
+              </a:lnSpc>
+              <a:spcBef>
+                <a:spcPts val="0"/>
+              </a:spcBef>
+              <a:spcAft>
+                <a:spcPts val="600"/>
+              </a:spcAft>
+            </a:pPr>
+            <a:r>
+              <a:rPr sz="900" b="1">
+                <a:solidFill>
+                  <a:srgbClr val="0EA5E9"/>
+                </a:solidFill>
+                <a:latin typeface="NanumGothic"/>
+                <a:ea typeface="NanumGothic"/>
+                <a:cs typeface="NanumGothic"/>
+              </a:rPr>
+              <a:t>Day 2 · 화</a:t>
+            </a:r>
+            <a:r>
+              <a:rPr sz="900" b="1">
+                <a:solidFill>
+                  <a:srgbClr val="64748B"/>
+                </a:solidFill>
+                <a:latin typeface="NanumGothic"/>
+                <a:ea typeface="NanumGothic"/>
+                <a:cs typeface="NanumGothic"/>
+              </a:rPr>
+              <a:t>   ·   21 / 43</a:t>
             </a:r>
           </a:p>
         </p:txBody>
@@ -16168,54 +16369,7 @@
       </p:sp>
       <p:sp>
         <p:nvSpPr>
-          <p:cNvPr id="8" name="TextBox 7"/>
-          <p:cNvSpPr txBox="1"/>
-          <p:nvPr/>
-        </p:nvSpPr>
-        <p:spPr>
-          <a:xfrm>
-            <a:off x="10241280" y="6419088"/>
-            <a:ext cx="1463040" cy="365760"/>
-          </a:xfrm>
-          <a:prstGeom prst="rect">
-            <a:avLst/>
-          </a:prstGeom>
-          <a:noFill/>
-        </p:spPr>
-        <p:txBody>
-          <a:bodyPr wrap="square" anchor="ctr" lIns="0" rIns="0" tIns="0" bIns="0">
-            <a:spAutoFit/>
-          </a:bodyPr>
-          <a:lstStyle/>
-          <a:p>
-            <a:pPr algn="r">
-              <a:lnSpc>
-                <a:spcPct val="100000"/>
-              </a:lnSpc>
-              <a:spcBef>
-                <a:spcPts val="0"/>
-              </a:spcBef>
-              <a:spcAft>
-                <a:spcPts val="600"/>
-              </a:spcAft>
-            </a:pPr>
-            <a:r>
-              <a:rPr sz="900" b="1">
-                <a:solidFill>
-                  <a:srgbClr val="0EA5E9"/>
-                </a:solidFill>
-                <a:latin typeface="NanumGothic"/>
-                <a:ea typeface="NanumGothic"/>
-                <a:cs typeface="NanumGothic"/>
-              </a:rPr>
-              <a:t>Day 2 · 화</a:t>
-            </a:r>
-          </a:p>
-        </p:txBody>
-      </p:sp>
-      <p:sp>
-        <p:nvSpPr>
-          <p:cNvPr id="9" name="Oval 8"/>
+          <p:cNvPr id="8" name="Oval 7"/>
           <p:cNvSpPr/>
           <p:nvPr/>
         </p:nvSpPr>
@@ -16259,7 +16413,7 @@
       </p:sp>
       <p:sp>
         <p:nvSpPr>
-          <p:cNvPr id="10" name="TextBox 9"/>
+          <p:cNvPr id="9" name="TextBox 8"/>
           <p:cNvSpPr txBox="1"/>
           <p:nvPr/>
         </p:nvSpPr>
@@ -16306,7 +16460,7 @@
       </p:sp>
       <p:sp>
         <p:nvSpPr>
-          <p:cNvPr id="11" name="TextBox 10"/>
+          <p:cNvPr id="10" name="TextBox 9"/>
           <p:cNvSpPr txBox="1"/>
           <p:nvPr/>
         </p:nvSpPr>
@@ -16353,7 +16507,7 @@
       </p:sp>
       <p:sp>
         <p:nvSpPr>
-          <p:cNvPr id="12" name="Oval 11"/>
+          <p:cNvPr id="11" name="Oval 10"/>
           <p:cNvSpPr/>
           <p:nvPr/>
         </p:nvSpPr>
@@ -16397,7 +16551,7 @@
       </p:sp>
       <p:sp>
         <p:nvSpPr>
-          <p:cNvPr id="13" name="TextBox 12"/>
+          <p:cNvPr id="12" name="TextBox 11"/>
           <p:cNvSpPr txBox="1"/>
           <p:nvPr/>
         </p:nvSpPr>
@@ -16444,7 +16598,7 @@
       </p:sp>
       <p:sp>
         <p:nvSpPr>
-          <p:cNvPr id="14" name="TextBox 13"/>
+          <p:cNvPr id="13" name="TextBox 12"/>
           <p:cNvSpPr txBox="1"/>
           <p:nvPr/>
         </p:nvSpPr>
@@ -16491,7 +16645,7 @@
       </p:sp>
       <p:sp>
         <p:nvSpPr>
-          <p:cNvPr id="15" name="Oval 14"/>
+          <p:cNvPr id="14" name="Oval 13"/>
           <p:cNvSpPr/>
           <p:nvPr/>
         </p:nvSpPr>
@@ -16535,7 +16689,7 @@
       </p:sp>
       <p:sp>
         <p:nvSpPr>
-          <p:cNvPr id="16" name="TextBox 15"/>
+          <p:cNvPr id="15" name="TextBox 14"/>
           <p:cNvSpPr txBox="1"/>
           <p:nvPr/>
         </p:nvSpPr>
@@ -16582,7 +16736,7 @@
       </p:sp>
       <p:sp>
         <p:nvSpPr>
-          <p:cNvPr id="17" name="TextBox 16"/>
+          <p:cNvPr id="16" name="TextBox 15"/>
           <p:cNvSpPr txBox="1"/>
           <p:nvPr/>
         </p:nvSpPr>
@@ -16629,7 +16783,7 @@
       </p:sp>
       <p:sp>
         <p:nvSpPr>
-          <p:cNvPr id="18" name="Rounded Rectangle 17"/>
+          <p:cNvPr id="17" name="Rounded Rectangle 16"/>
           <p:cNvSpPr/>
           <p:nvPr/>
         </p:nvSpPr>
@@ -16675,7 +16829,7 @@
       </p:sp>
       <p:sp>
         <p:nvSpPr>
-          <p:cNvPr id="19" name="TextBox 18"/>
+          <p:cNvPr id="18" name="TextBox 17"/>
           <p:cNvSpPr txBox="1"/>
           <p:nvPr/>
         </p:nvSpPr>
@@ -16727,6 +16881,64 @@
                 <a:cs typeface="NanumGothic"/>
               </a:rPr>
               <a:t>검증 없는 반복은 위험 — 사람이 매번 결과를 확인</a:t>
+            </a:r>
+          </a:p>
+        </p:txBody>
+      </p:sp>
+      <p:sp>
+        <p:nvSpPr>
+          <p:cNvPr id="19" name="TextBox 18"/>
+          <p:cNvSpPr txBox="1"/>
+          <p:nvPr/>
+        </p:nvSpPr>
+        <p:spPr>
+          <a:xfrm>
+            <a:off x="8988552" y="6419088"/>
+            <a:ext cx="2697480" cy="365760"/>
+          </a:xfrm>
+          <a:prstGeom prst="rect">
+            <a:avLst/>
+          </a:prstGeom>
+          <a:noFill/>
+        </p:spPr>
+        <p:txBody>
+          <a:bodyPr wrap="square" anchor="ctr" lIns="0" rIns="0" tIns="0" bIns="0">
+            <a:spAutoFit/>
+          </a:bodyPr>
+          <a:lstStyle/>
+          <a:p>
+            <a:pPr algn="r">
+              <a:lnSpc>
+                <a:spcPct val="100000"/>
+              </a:lnSpc>
+              <a:spcBef>
+                <a:spcPts val="0"/>
+              </a:spcBef>
+              <a:spcAft>
+                <a:spcPts val="600"/>
+              </a:spcAft>
+            </a:pPr>
+            <a:r>
+              <a:rPr sz="900" b="1">
+                <a:solidFill>
+                  <a:srgbClr val="0EA5E9"/>
+                </a:solidFill>
+                <a:latin typeface="NanumGothic"/>
+                <a:ea typeface="NanumGothic"/>
+                <a:cs typeface="NanumGothic"/>
+              </a:rPr>
+              <a:t>Day 2 · 화</a:t>
+            </a:r>
+            <a:r>
+              <a:rPr sz="900" b="1">
+                <a:solidFill>
+                  <a:srgbClr val="64748B"/>
+                </a:solidFill>
+                <a:latin typeface="NanumGothic"/>
+                <a:ea typeface="NanumGothic"/>
+                <a:cs typeface="NanumGothic"/>
+              </a:rPr>
+              <a:t>   ·   22 / 43</a:t>
             </a:r>
           </a:p>
         </p:txBody>
@@ -17024,54 +17236,7 @@
       </p:sp>
       <p:sp>
         <p:nvSpPr>
-          <p:cNvPr id="8" name="TextBox 7"/>
-          <p:cNvSpPr txBox="1"/>
-          <p:nvPr/>
-        </p:nvSpPr>
-        <p:spPr>
-          <a:xfrm>
-            <a:off x="10241280" y="6419088"/>
-            <a:ext cx="1463040" cy="365760"/>
-          </a:xfrm>
-          <a:prstGeom prst="rect">
-            <a:avLst/>
-          </a:prstGeom>
-          <a:noFill/>
-        </p:spPr>
-        <p:txBody>
-          <a:bodyPr wrap="square" anchor="ctr" lIns="0" rIns="0" tIns="0" bIns="0">
-            <a:spAutoFit/>
-          </a:bodyPr>
-          <a:lstStyle/>
-          <a:p>
-            <a:pPr algn="r">
-              <a:lnSpc>
-                <a:spcPct val="100000"/>
-              </a:lnSpc>
-              <a:spcBef>
-                <a:spcPts val="0"/>
-              </a:spcBef>
-              <a:spcAft>
-                <a:spcPts val="600"/>
-              </a:spcAft>
-            </a:pPr>
-            <a:r>
-              <a:rPr sz="900" b="1">
-                <a:solidFill>
-                  <a:srgbClr val="0EA5E9"/>
-                </a:solidFill>
-                <a:latin typeface="NanumGothic"/>
-                <a:ea typeface="NanumGothic"/>
-                <a:cs typeface="NanumGothic"/>
-              </a:rPr>
-              <a:t>Day 2 · 화</a:t>
-            </a:r>
-          </a:p>
-        </p:txBody>
-      </p:sp>
-      <p:sp>
-        <p:nvSpPr>
-          <p:cNvPr id="9" name="Oval 8"/>
+          <p:cNvPr id="8" name="Oval 7"/>
           <p:cNvSpPr/>
           <p:nvPr/>
         </p:nvSpPr>
@@ -17115,7 +17280,7 @@
       </p:sp>
       <p:sp>
         <p:nvSpPr>
-          <p:cNvPr id="10" name="TextBox 9"/>
+          <p:cNvPr id="9" name="TextBox 8"/>
           <p:cNvSpPr txBox="1"/>
           <p:nvPr/>
         </p:nvSpPr>
@@ -17162,7 +17327,7 @@
       </p:sp>
       <p:sp>
         <p:nvSpPr>
-          <p:cNvPr id="11" name="TextBox 10"/>
+          <p:cNvPr id="10" name="TextBox 9"/>
           <p:cNvSpPr txBox="1"/>
           <p:nvPr/>
         </p:nvSpPr>
@@ -17209,7 +17374,7 @@
       </p:sp>
       <p:sp>
         <p:nvSpPr>
-          <p:cNvPr id="12" name="Oval 11"/>
+          <p:cNvPr id="11" name="Oval 10"/>
           <p:cNvSpPr/>
           <p:nvPr/>
         </p:nvSpPr>
@@ -17253,7 +17418,7 @@
       </p:sp>
       <p:sp>
         <p:nvSpPr>
-          <p:cNvPr id="13" name="TextBox 12"/>
+          <p:cNvPr id="12" name="TextBox 11"/>
           <p:cNvSpPr txBox="1"/>
           <p:nvPr/>
         </p:nvSpPr>
@@ -17300,7 +17465,7 @@
       </p:sp>
       <p:sp>
         <p:nvSpPr>
-          <p:cNvPr id="14" name="TextBox 13"/>
+          <p:cNvPr id="13" name="TextBox 12"/>
           <p:cNvSpPr txBox="1"/>
           <p:nvPr/>
         </p:nvSpPr>
@@ -17347,7 +17512,7 @@
       </p:sp>
       <p:sp>
         <p:nvSpPr>
-          <p:cNvPr id="15" name="Oval 14"/>
+          <p:cNvPr id="14" name="Oval 13"/>
           <p:cNvSpPr/>
           <p:nvPr/>
         </p:nvSpPr>
@@ -17391,7 +17556,7 @@
       </p:sp>
       <p:sp>
         <p:nvSpPr>
-          <p:cNvPr id="16" name="TextBox 15"/>
+          <p:cNvPr id="15" name="TextBox 14"/>
           <p:cNvSpPr txBox="1"/>
           <p:nvPr/>
         </p:nvSpPr>
@@ -17438,7 +17603,7 @@
       </p:sp>
       <p:sp>
         <p:nvSpPr>
-          <p:cNvPr id="17" name="TextBox 16"/>
+          <p:cNvPr id="16" name="TextBox 15"/>
           <p:cNvSpPr txBox="1"/>
           <p:nvPr/>
         </p:nvSpPr>
@@ -17485,7 +17650,7 @@
       </p:sp>
       <p:sp>
         <p:nvSpPr>
-          <p:cNvPr id="18" name="Oval 17"/>
+          <p:cNvPr id="17" name="Oval 16"/>
           <p:cNvSpPr/>
           <p:nvPr/>
         </p:nvSpPr>
@@ -17529,7 +17694,7 @@
       </p:sp>
       <p:sp>
         <p:nvSpPr>
-          <p:cNvPr id="19" name="TextBox 18"/>
+          <p:cNvPr id="18" name="TextBox 17"/>
           <p:cNvSpPr txBox="1"/>
           <p:nvPr/>
         </p:nvSpPr>
@@ -17576,7 +17741,7 @@
       </p:sp>
       <p:sp>
         <p:nvSpPr>
-          <p:cNvPr id="20" name="TextBox 19"/>
+          <p:cNvPr id="19" name="TextBox 18"/>
           <p:cNvSpPr txBox="1"/>
           <p:nvPr/>
         </p:nvSpPr>
@@ -17623,7 +17788,7 @@
       </p:sp>
       <p:sp>
         <p:nvSpPr>
-          <p:cNvPr id="21" name="Rounded Rectangle 20"/>
+          <p:cNvPr id="20" name="Rounded Rectangle 19"/>
           <p:cNvSpPr/>
           <p:nvPr/>
         </p:nvSpPr>
@@ -17669,7 +17834,7 @@
       </p:sp>
       <p:sp>
         <p:nvSpPr>
-          <p:cNvPr id="22" name="TextBox 21"/>
+          <p:cNvPr id="21" name="TextBox 20"/>
           <p:cNvSpPr txBox="1"/>
           <p:nvPr/>
         </p:nvSpPr>
@@ -17721,6 +17886,64 @@
                 <a:cs typeface="NanumGothic"/>
               </a:rPr>
               <a:t>자율성↑=위험↑ — 사람 승인·백업·검증 필수</a:t>
+            </a:r>
+          </a:p>
+        </p:txBody>
+      </p:sp>
+      <p:sp>
+        <p:nvSpPr>
+          <p:cNvPr id="22" name="TextBox 21"/>
+          <p:cNvSpPr txBox="1"/>
+          <p:nvPr/>
+        </p:nvSpPr>
+        <p:spPr>
+          <a:xfrm>
+            <a:off x="8988552" y="6419088"/>
+            <a:ext cx="2697480" cy="365760"/>
+          </a:xfrm>
+          <a:prstGeom prst="rect">
+            <a:avLst/>
+          </a:prstGeom>
+          <a:noFill/>
+        </p:spPr>
+        <p:txBody>
+          <a:bodyPr wrap="square" anchor="ctr" lIns="0" rIns="0" tIns="0" bIns="0">
+            <a:spAutoFit/>
+          </a:bodyPr>
+          <a:lstStyle/>
+          <a:p>
+            <a:pPr algn="r">
+              <a:lnSpc>
+                <a:spcPct val="100000"/>
+              </a:lnSpc>
+              <a:spcBef>
+                <a:spcPts val="0"/>
+              </a:spcBef>
+              <a:spcAft>
+                <a:spcPts val="600"/>
+              </a:spcAft>
+            </a:pPr>
+            <a:r>
+              <a:rPr sz="900" b="1">
+                <a:solidFill>
+                  <a:srgbClr val="0EA5E9"/>
+                </a:solidFill>
+                <a:latin typeface="NanumGothic"/>
+                <a:ea typeface="NanumGothic"/>
+                <a:cs typeface="NanumGothic"/>
+              </a:rPr>
+              <a:t>Day 2 · 화</a:t>
+            </a:r>
+            <a:r>
+              <a:rPr sz="900" b="1">
+                <a:solidFill>
+                  <a:srgbClr val="64748B"/>
+                </a:solidFill>
+                <a:latin typeface="NanumGothic"/>
+                <a:ea typeface="NanumGothic"/>
+                <a:cs typeface="NanumGothic"/>
+              </a:rPr>
+              <a:t>   ·   23 / 43</a:t>
             </a:r>
           </a:p>
         </p:txBody>
@@ -18018,54 +18241,7 @@
       </p:sp>
       <p:sp>
         <p:nvSpPr>
-          <p:cNvPr id="8" name="TextBox 7"/>
-          <p:cNvSpPr txBox="1"/>
-          <p:nvPr/>
-        </p:nvSpPr>
-        <p:spPr>
-          <a:xfrm>
-            <a:off x="10241280" y="6419088"/>
-            <a:ext cx="1463040" cy="365760"/>
-          </a:xfrm>
-          <a:prstGeom prst="rect">
-            <a:avLst/>
-          </a:prstGeom>
-          <a:noFill/>
-        </p:spPr>
-        <p:txBody>
-          <a:bodyPr wrap="square" anchor="ctr" lIns="0" rIns="0" tIns="0" bIns="0">
-            <a:spAutoFit/>
-          </a:bodyPr>
-          <a:lstStyle/>
-          <a:p>
-            <a:pPr algn="r">
-              <a:lnSpc>
-                <a:spcPct val="100000"/>
-              </a:lnSpc>
-              <a:spcBef>
-                <a:spcPts val="0"/>
-              </a:spcBef>
-              <a:spcAft>
-                <a:spcPts val="600"/>
-              </a:spcAft>
-            </a:pPr>
-            <a:r>
-              <a:rPr sz="900" b="1">
-                <a:solidFill>
-                  <a:srgbClr val="0EA5E9"/>
-                </a:solidFill>
-                <a:latin typeface="NanumGothic"/>
-                <a:ea typeface="NanumGothic"/>
-                <a:cs typeface="NanumGothic"/>
-              </a:rPr>
-              <a:t>Day 2 · 화</a:t>
-            </a:r>
-          </a:p>
-        </p:txBody>
-      </p:sp>
-      <p:sp>
-        <p:nvSpPr>
-          <p:cNvPr id="9" name="Rounded Rectangle 8"/>
+          <p:cNvPr id="8" name="Rounded Rectangle 7"/>
           <p:cNvSpPr/>
           <p:nvPr/>
         </p:nvSpPr>
@@ -18111,7 +18287,7 @@
       </p:sp>
       <p:sp>
         <p:nvSpPr>
-          <p:cNvPr id="10" name="Rectangle 9"/>
+          <p:cNvPr id="9" name="Rectangle 8"/>
           <p:cNvSpPr/>
           <p:nvPr/>
         </p:nvSpPr>
@@ -18155,7 +18331,7 @@
       </p:sp>
       <p:sp>
         <p:nvSpPr>
-          <p:cNvPr id="11" name="TextBox 10"/>
+          <p:cNvPr id="10" name="TextBox 9"/>
           <p:cNvSpPr txBox="1"/>
           <p:nvPr/>
         </p:nvSpPr>
@@ -18202,7 +18378,7 @@
       </p:sp>
       <p:sp>
         <p:nvSpPr>
-          <p:cNvPr id="12" name="TextBox 11"/>
+          <p:cNvPr id="11" name="TextBox 10"/>
           <p:cNvSpPr txBox="1"/>
           <p:nvPr/>
         </p:nvSpPr>
@@ -18249,7 +18425,7 @@
       </p:sp>
       <p:sp>
         <p:nvSpPr>
-          <p:cNvPr id="13" name="TextBox 12"/>
+          <p:cNvPr id="12" name="TextBox 11"/>
           <p:cNvSpPr txBox="1"/>
           <p:nvPr/>
         </p:nvSpPr>
@@ -18296,7 +18472,7 @@
       </p:sp>
       <p:sp>
         <p:nvSpPr>
-          <p:cNvPr id="14" name="TextBox 13"/>
+          <p:cNvPr id="13" name="TextBox 12"/>
           <p:cNvSpPr txBox="1"/>
           <p:nvPr/>
         </p:nvSpPr>
@@ -18343,7 +18519,7 @@
       </p:sp>
       <p:sp>
         <p:nvSpPr>
-          <p:cNvPr id="15" name="Rounded Rectangle 14"/>
+          <p:cNvPr id="14" name="Rounded Rectangle 13"/>
           <p:cNvSpPr/>
           <p:nvPr/>
         </p:nvSpPr>
@@ -18389,7 +18565,7 @@
       </p:sp>
       <p:sp>
         <p:nvSpPr>
-          <p:cNvPr id="16" name="Rectangle 15"/>
+          <p:cNvPr id="15" name="Rectangle 14"/>
           <p:cNvSpPr/>
           <p:nvPr/>
         </p:nvSpPr>
@@ -18433,7 +18609,7 @@
       </p:sp>
       <p:sp>
         <p:nvSpPr>
-          <p:cNvPr id="17" name="TextBox 16"/>
+          <p:cNvPr id="16" name="TextBox 15"/>
           <p:cNvSpPr txBox="1"/>
           <p:nvPr/>
         </p:nvSpPr>
@@ -18480,7 +18656,7 @@
       </p:sp>
       <p:sp>
         <p:nvSpPr>
-          <p:cNvPr id="18" name="TextBox 17"/>
+          <p:cNvPr id="17" name="TextBox 16"/>
           <p:cNvSpPr txBox="1"/>
           <p:nvPr/>
         </p:nvSpPr>
@@ -18527,7 +18703,7 @@
       </p:sp>
       <p:sp>
         <p:nvSpPr>
-          <p:cNvPr id="19" name="TextBox 18"/>
+          <p:cNvPr id="18" name="TextBox 17"/>
           <p:cNvSpPr txBox="1"/>
           <p:nvPr/>
         </p:nvSpPr>
@@ -18574,7 +18750,7 @@
       </p:sp>
       <p:sp>
         <p:nvSpPr>
-          <p:cNvPr id="20" name="TextBox 19"/>
+          <p:cNvPr id="19" name="TextBox 18"/>
           <p:cNvSpPr txBox="1"/>
           <p:nvPr/>
         </p:nvSpPr>
@@ -18621,7 +18797,7 @@
       </p:sp>
       <p:sp>
         <p:nvSpPr>
-          <p:cNvPr id="21" name="Rounded Rectangle 20"/>
+          <p:cNvPr id="20" name="Rounded Rectangle 19"/>
           <p:cNvSpPr/>
           <p:nvPr/>
         </p:nvSpPr>
@@ -18667,7 +18843,7 @@
       </p:sp>
       <p:sp>
         <p:nvSpPr>
-          <p:cNvPr id="22" name="Rectangle 21"/>
+          <p:cNvPr id="21" name="Rectangle 20"/>
           <p:cNvSpPr/>
           <p:nvPr/>
         </p:nvSpPr>
@@ -18711,7 +18887,7 @@
       </p:sp>
       <p:sp>
         <p:nvSpPr>
-          <p:cNvPr id="23" name="TextBox 22"/>
+          <p:cNvPr id="22" name="TextBox 21"/>
           <p:cNvSpPr txBox="1"/>
           <p:nvPr/>
         </p:nvSpPr>
@@ -18758,7 +18934,7 @@
       </p:sp>
       <p:sp>
         <p:nvSpPr>
-          <p:cNvPr id="24" name="TextBox 23"/>
+          <p:cNvPr id="23" name="TextBox 22"/>
           <p:cNvSpPr txBox="1"/>
           <p:nvPr/>
         </p:nvSpPr>
@@ -18805,7 +18981,7 @@
       </p:sp>
       <p:sp>
         <p:nvSpPr>
-          <p:cNvPr id="25" name="TextBox 24"/>
+          <p:cNvPr id="24" name="TextBox 23"/>
           <p:cNvSpPr txBox="1"/>
           <p:nvPr/>
         </p:nvSpPr>
@@ -18852,7 +19028,7 @@
       </p:sp>
       <p:sp>
         <p:nvSpPr>
-          <p:cNvPr id="26" name="TextBox 25"/>
+          <p:cNvPr id="25" name="TextBox 24"/>
           <p:cNvSpPr txBox="1"/>
           <p:nvPr/>
         </p:nvSpPr>
@@ -18899,7 +19075,7 @@
       </p:sp>
       <p:sp>
         <p:nvSpPr>
-          <p:cNvPr id="27" name="Rounded Rectangle 26"/>
+          <p:cNvPr id="26" name="Rounded Rectangle 25"/>
           <p:cNvSpPr/>
           <p:nvPr/>
         </p:nvSpPr>
@@ -18945,7 +19121,7 @@
       </p:sp>
       <p:sp>
         <p:nvSpPr>
-          <p:cNvPr id="28" name="Rectangle 27"/>
+          <p:cNvPr id="27" name="Rectangle 26"/>
           <p:cNvSpPr/>
           <p:nvPr/>
         </p:nvSpPr>
@@ -18989,7 +19165,7 @@
       </p:sp>
       <p:sp>
         <p:nvSpPr>
-          <p:cNvPr id="29" name="TextBox 28"/>
+          <p:cNvPr id="28" name="TextBox 27"/>
           <p:cNvSpPr txBox="1"/>
           <p:nvPr/>
         </p:nvSpPr>
@@ -19036,7 +19212,7 @@
       </p:sp>
       <p:sp>
         <p:nvSpPr>
-          <p:cNvPr id="30" name="TextBox 29"/>
+          <p:cNvPr id="29" name="TextBox 28"/>
           <p:cNvSpPr txBox="1"/>
           <p:nvPr/>
         </p:nvSpPr>
@@ -19083,7 +19259,7 @@
       </p:sp>
       <p:sp>
         <p:nvSpPr>
-          <p:cNvPr id="31" name="TextBox 30"/>
+          <p:cNvPr id="30" name="TextBox 29"/>
           <p:cNvSpPr txBox="1"/>
           <p:nvPr/>
         </p:nvSpPr>
@@ -19130,7 +19306,7 @@
       </p:sp>
       <p:sp>
         <p:nvSpPr>
-          <p:cNvPr id="32" name="TextBox 31"/>
+          <p:cNvPr id="31" name="TextBox 30"/>
           <p:cNvSpPr txBox="1"/>
           <p:nvPr/>
         </p:nvSpPr>
@@ -19177,7 +19353,7 @@
       </p:sp>
       <p:sp>
         <p:nvSpPr>
-          <p:cNvPr id="33" name="Rounded Rectangle 32"/>
+          <p:cNvPr id="32" name="Rounded Rectangle 31"/>
           <p:cNvSpPr/>
           <p:nvPr/>
         </p:nvSpPr>
@@ -19223,7 +19399,7 @@
       </p:sp>
       <p:sp>
         <p:nvSpPr>
-          <p:cNvPr id="34" name="Rectangle 33"/>
+          <p:cNvPr id="33" name="Rectangle 32"/>
           <p:cNvSpPr/>
           <p:nvPr/>
         </p:nvSpPr>
@@ -19267,7 +19443,7 @@
       </p:sp>
       <p:sp>
         <p:nvSpPr>
-          <p:cNvPr id="35" name="TextBox 34"/>
+          <p:cNvPr id="34" name="TextBox 33"/>
           <p:cNvSpPr txBox="1"/>
           <p:nvPr/>
         </p:nvSpPr>
@@ -19314,7 +19490,7 @@
       </p:sp>
       <p:sp>
         <p:nvSpPr>
-          <p:cNvPr id="36" name="TextBox 35"/>
+          <p:cNvPr id="35" name="TextBox 34"/>
           <p:cNvSpPr txBox="1"/>
           <p:nvPr/>
         </p:nvSpPr>
@@ -19361,7 +19537,7 @@
       </p:sp>
       <p:sp>
         <p:nvSpPr>
-          <p:cNvPr id="37" name="TextBox 36"/>
+          <p:cNvPr id="36" name="TextBox 35"/>
           <p:cNvSpPr txBox="1"/>
           <p:nvPr/>
         </p:nvSpPr>
@@ -19408,7 +19584,7 @@
       </p:sp>
       <p:sp>
         <p:nvSpPr>
-          <p:cNvPr id="38" name="Rounded Rectangle 37"/>
+          <p:cNvPr id="37" name="Rounded Rectangle 36"/>
           <p:cNvSpPr/>
           <p:nvPr/>
         </p:nvSpPr>
@@ -19454,7 +19630,7 @@
       </p:sp>
       <p:sp>
         <p:nvSpPr>
-          <p:cNvPr id="39" name="TextBox 38"/>
+          <p:cNvPr id="38" name="TextBox 37"/>
           <p:cNvSpPr txBox="1"/>
           <p:nvPr/>
         </p:nvSpPr>
@@ -19506,6 +19682,64 @@
                 <a:cs typeface="NanumGothic"/>
               </a:rPr>
               <a:t>자세한 이론·구현은 Day 3~4 — 오늘은 큰 틀만</a:t>
+            </a:r>
+          </a:p>
+        </p:txBody>
+      </p:sp>
+      <p:sp>
+        <p:nvSpPr>
+          <p:cNvPr id="39" name="TextBox 38"/>
+          <p:cNvSpPr txBox="1"/>
+          <p:nvPr/>
+        </p:nvSpPr>
+        <p:spPr>
+          <a:xfrm>
+            <a:off x="8988552" y="6419088"/>
+            <a:ext cx="2697480" cy="365760"/>
+          </a:xfrm>
+          <a:prstGeom prst="rect">
+            <a:avLst/>
+          </a:prstGeom>
+          <a:noFill/>
+        </p:spPr>
+        <p:txBody>
+          <a:bodyPr wrap="square" anchor="ctr" lIns="0" rIns="0" tIns="0" bIns="0">
+            <a:spAutoFit/>
+          </a:bodyPr>
+          <a:lstStyle/>
+          <a:p>
+            <a:pPr algn="r">
+              <a:lnSpc>
+                <a:spcPct val="100000"/>
+              </a:lnSpc>
+              <a:spcBef>
+                <a:spcPts val="0"/>
+              </a:spcBef>
+              <a:spcAft>
+                <a:spcPts val="600"/>
+              </a:spcAft>
+            </a:pPr>
+            <a:r>
+              <a:rPr sz="900" b="1">
+                <a:solidFill>
+                  <a:srgbClr val="0EA5E9"/>
+                </a:solidFill>
+                <a:latin typeface="NanumGothic"/>
+                <a:ea typeface="NanumGothic"/>
+                <a:cs typeface="NanumGothic"/>
+              </a:rPr>
+              <a:t>Day 2 · 화</a:t>
+            </a:r>
+            <a:r>
+              <a:rPr sz="900" b="1">
+                <a:solidFill>
+                  <a:srgbClr val="64748B"/>
+                </a:solidFill>
+                <a:latin typeface="NanumGothic"/>
+                <a:ea typeface="NanumGothic"/>
+                <a:cs typeface="NanumGothic"/>
+              </a:rPr>
+              <a:t>   ·   24 / 43</a:t>
             </a:r>
           </a:p>
         </p:txBody>
@@ -19803,54 +20037,7 @@
       </p:sp>
       <p:sp>
         <p:nvSpPr>
-          <p:cNvPr id="8" name="TextBox 7"/>
-          <p:cNvSpPr txBox="1"/>
-          <p:nvPr/>
-        </p:nvSpPr>
-        <p:spPr>
-          <a:xfrm>
-            <a:off x="10241280" y="6419088"/>
-            <a:ext cx="1463040" cy="365760"/>
-          </a:xfrm>
-          <a:prstGeom prst="rect">
-            <a:avLst/>
-          </a:prstGeom>
-          <a:noFill/>
-        </p:spPr>
-        <p:txBody>
-          <a:bodyPr wrap="square" anchor="ctr" lIns="0" rIns="0" tIns="0" bIns="0">
-            <a:spAutoFit/>
-          </a:bodyPr>
-          <a:lstStyle/>
-          <a:p>
-            <a:pPr algn="r">
-              <a:lnSpc>
-                <a:spcPct val="100000"/>
-              </a:lnSpc>
-              <a:spcBef>
-                <a:spcPts val="0"/>
-              </a:spcBef>
-              <a:spcAft>
-                <a:spcPts val="600"/>
-              </a:spcAft>
-            </a:pPr>
-            <a:r>
-              <a:rPr sz="900" b="1">
-                <a:solidFill>
-                  <a:srgbClr val="0EA5E9"/>
-                </a:solidFill>
-                <a:latin typeface="NanumGothic"/>
-                <a:ea typeface="NanumGothic"/>
-                <a:cs typeface="NanumGothic"/>
-              </a:rPr>
-              <a:t>Day 2 · 화</a:t>
-            </a:r>
-          </a:p>
-        </p:txBody>
-      </p:sp>
-      <p:sp>
-        <p:nvSpPr>
-          <p:cNvPr id="9" name="Oval 8"/>
+          <p:cNvPr id="8" name="Oval 7"/>
           <p:cNvSpPr/>
           <p:nvPr/>
         </p:nvSpPr>
@@ -19894,7 +20081,7 @@
       </p:sp>
       <p:sp>
         <p:nvSpPr>
-          <p:cNvPr id="10" name="TextBox 9"/>
+          <p:cNvPr id="9" name="TextBox 8"/>
           <p:cNvSpPr txBox="1"/>
           <p:nvPr/>
         </p:nvSpPr>
@@ -19941,7 +20128,7 @@
       </p:sp>
       <p:sp>
         <p:nvSpPr>
-          <p:cNvPr id="11" name="TextBox 10"/>
+          <p:cNvPr id="10" name="TextBox 9"/>
           <p:cNvSpPr txBox="1"/>
           <p:nvPr/>
         </p:nvSpPr>
@@ -19988,7 +20175,7 @@
       </p:sp>
       <p:sp>
         <p:nvSpPr>
-          <p:cNvPr id="12" name="Oval 11"/>
+          <p:cNvPr id="11" name="Oval 10"/>
           <p:cNvSpPr/>
           <p:nvPr/>
         </p:nvSpPr>
@@ -20032,7 +20219,7 @@
       </p:sp>
       <p:sp>
         <p:nvSpPr>
-          <p:cNvPr id="13" name="TextBox 12"/>
+          <p:cNvPr id="12" name="TextBox 11"/>
           <p:cNvSpPr txBox="1"/>
           <p:nvPr/>
         </p:nvSpPr>
@@ -20079,7 +20266,7 @@
       </p:sp>
       <p:sp>
         <p:nvSpPr>
-          <p:cNvPr id="14" name="TextBox 13"/>
+          <p:cNvPr id="13" name="TextBox 12"/>
           <p:cNvSpPr txBox="1"/>
           <p:nvPr/>
         </p:nvSpPr>
@@ -20126,7 +20313,7 @@
       </p:sp>
       <p:sp>
         <p:nvSpPr>
-          <p:cNvPr id="15" name="Oval 14"/>
+          <p:cNvPr id="14" name="Oval 13"/>
           <p:cNvSpPr/>
           <p:nvPr/>
         </p:nvSpPr>
@@ -20170,7 +20357,7 @@
       </p:sp>
       <p:sp>
         <p:nvSpPr>
-          <p:cNvPr id="16" name="TextBox 15"/>
+          <p:cNvPr id="15" name="TextBox 14"/>
           <p:cNvSpPr txBox="1"/>
           <p:nvPr/>
         </p:nvSpPr>
@@ -20217,7 +20404,7 @@
       </p:sp>
       <p:sp>
         <p:nvSpPr>
-          <p:cNvPr id="17" name="TextBox 16"/>
+          <p:cNvPr id="16" name="TextBox 15"/>
           <p:cNvSpPr txBox="1"/>
           <p:nvPr/>
         </p:nvSpPr>
@@ -20264,7 +20451,7 @@
       </p:sp>
       <p:sp>
         <p:nvSpPr>
-          <p:cNvPr id="18" name="Oval 17"/>
+          <p:cNvPr id="17" name="Oval 16"/>
           <p:cNvSpPr/>
           <p:nvPr/>
         </p:nvSpPr>
@@ -20308,7 +20495,7 @@
       </p:sp>
       <p:sp>
         <p:nvSpPr>
-          <p:cNvPr id="19" name="TextBox 18"/>
+          <p:cNvPr id="18" name="TextBox 17"/>
           <p:cNvSpPr txBox="1"/>
           <p:nvPr/>
         </p:nvSpPr>
@@ -20355,7 +20542,7 @@
       </p:sp>
       <p:sp>
         <p:nvSpPr>
-          <p:cNvPr id="20" name="TextBox 19"/>
+          <p:cNvPr id="19" name="TextBox 18"/>
           <p:cNvSpPr txBox="1"/>
           <p:nvPr/>
         </p:nvSpPr>
@@ -20402,7 +20589,7 @@
       </p:sp>
       <p:sp>
         <p:nvSpPr>
-          <p:cNvPr id="21" name="Rounded Rectangle 20"/>
+          <p:cNvPr id="20" name="Rounded Rectangle 19"/>
           <p:cNvSpPr/>
           <p:nvPr/>
         </p:nvSpPr>
@@ -20448,7 +20635,7 @@
       </p:sp>
       <p:sp>
         <p:nvSpPr>
-          <p:cNvPr id="22" name="TextBox 21"/>
+          <p:cNvPr id="21" name="TextBox 20"/>
           <p:cNvSpPr txBox="1"/>
           <p:nvPr/>
         </p:nvSpPr>
@@ -20500,6 +20687,64 @@
                 <a:cs typeface="NanumGothic"/>
               </a:rPr>
               <a:t>기회(신약·문헌고찰)와 과장(co-scientist)을 함께 — AI 출력은 반드시 사람이 검증</a:t>
+            </a:r>
+          </a:p>
+        </p:txBody>
+      </p:sp>
+      <p:sp>
+        <p:nvSpPr>
+          <p:cNvPr id="22" name="TextBox 21"/>
+          <p:cNvSpPr txBox="1"/>
+          <p:nvPr/>
+        </p:nvSpPr>
+        <p:spPr>
+          <a:xfrm>
+            <a:off x="8988552" y="6419088"/>
+            <a:ext cx="2697480" cy="365760"/>
+          </a:xfrm>
+          <a:prstGeom prst="rect">
+            <a:avLst/>
+          </a:prstGeom>
+          <a:noFill/>
+        </p:spPr>
+        <p:txBody>
+          <a:bodyPr wrap="square" anchor="ctr" lIns="0" rIns="0" tIns="0" bIns="0">
+            <a:spAutoFit/>
+          </a:bodyPr>
+          <a:lstStyle/>
+          <a:p>
+            <a:pPr algn="r">
+              <a:lnSpc>
+                <a:spcPct val="100000"/>
+              </a:lnSpc>
+              <a:spcBef>
+                <a:spcPts val="0"/>
+              </a:spcBef>
+              <a:spcAft>
+                <a:spcPts val="600"/>
+              </a:spcAft>
+            </a:pPr>
+            <a:r>
+              <a:rPr sz="900" b="1">
+                <a:solidFill>
+                  <a:srgbClr val="0EA5E9"/>
+                </a:solidFill>
+                <a:latin typeface="NanumGothic"/>
+                <a:ea typeface="NanumGothic"/>
+                <a:cs typeface="NanumGothic"/>
+              </a:rPr>
+              <a:t>Day 2 · 화</a:t>
+            </a:r>
+            <a:r>
+              <a:rPr sz="900" b="1">
+                <a:solidFill>
+                  <a:srgbClr val="64748B"/>
+                </a:solidFill>
+                <a:latin typeface="NanumGothic"/>
+                <a:ea typeface="NanumGothic"/>
+                <a:cs typeface="NanumGothic"/>
+              </a:rPr>
+              <a:t>   ·   25 / 43</a:t>
             </a:r>
           </a:p>
         </p:txBody>
@@ -20806,6 +21051,64 @@
           </a:p>
         </p:txBody>
       </p:sp>
+      <p:sp>
+        <p:nvSpPr>
+          <p:cNvPr id="8" name="TextBox 7"/>
+          <p:cNvSpPr txBox="1"/>
+          <p:nvPr/>
+        </p:nvSpPr>
+        <p:spPr>
+          <a:xfrm>
+            <a:off x="8988552" y="6419088"/>
+            <a:ext cx="2697480" cy="365760"/>
+          </a:xfrm>
+          <a:prstGeom prst="rect">
+            <a:avLst/>
+          </a:prstGeom>
+          <a:noFill/>
+        </p:spPr>
+        <p:txBody>
+          <a:bodyPr wrap="square" anchor="ctr" lIns="0" rIns="0" tIns="0" bIns="0">
+            <a:spAutoFit/>
+          </a:bodyPr>
+          <a:lstStyle/>
+          <a:p>
+            <a:pPr algn="r">
+              <a:lnSpc>
+                <a:spcPct val="100000"/>
+              </a:lnSpc>
+              <a:spcBef>
+                <a:spcPts val="0"/>
+              </a:spcBef>
+              <a:spcAft>
+                <a:spcPts val="600"/>
+              </a:spcAft>
+            </a:pPr>
+            <a:r>
+              <a:rPr sz="900" b="1">
+                <a:solidFill>
+                  <a:srgbClr val="0EA5E9"/>
+                </a:solidFill>
+                <a:latin typeface="NanumGothic"/>
+                <a:ea typeface="NanumGothic"/>
+                <a:cs typeface="NanumGothic"/>
+              </a:rPr>
+              <a:t>Day 2 · 화</a:t>
+            </a:r>
+            <a:r>
+              <a:rPr sz="900" b="1">
+                <a:solidFill>
+                  <a:srgbClr val="CBD5E1"/>
+                </a:solidFill>
+                <a:latin typeface="NanumGothic"/>
+                <a:ea typeface="NanumGothic"/>
+                <a:cs typeface="NanumGothic"/>
+              </a:rPr>
+              <a:t>   ·   26 / 43</a:t>
+            </a:r>
+          </a:p>
+        </p:txBody>
+      </p:sp>
     </p:spTree>
   </p:cSld>
   <p:clrMapOvr>
@@ -21099,54 +21402,7 @@
       </p:sp>
       <p:sp>
         <p:nvSpPr>
-          <p:cNvPr id="8" name="TextBox 7"/>
-          <p:cNvSpPr txBox="1"/>
-          <p:nvPr/>
-        </p:nvSpPr>
-        <p:spPr>
-          <a:xfrm>
-            <a:off x="10241280" y="6419088"/>
-            <a:ext cx="1463040" cy="365760"/>
-          </a:xfrm>
-          <a:prstGeom prst="rect">
-            <a:avLst/>
-          </a:prstGeom>
-          <a:noFill/>
-        </p:spPr>
-        <p:txBody>
-          <a:bodyPr wrap="square" anchor="ctr" lIns="0" rIns="0" tIns="0" bIns="0">
-            <a:spAutoFit/>
-          </a:bodyPr>
-          <a:lstStyle/>
-          <a:p>
-            <a:pPr algn="r">
-              <a:lnSpc>
-                <a:spcPct val="100000"/>
-              </a:lnSpc>
-              <a:spcBef>
-                <a:spcPts val="0"/>
-              </a:spcBef>
-              <a:spcAft>
-                <a:spcPts val="600"/>
-              </a:spcAft>
-            </a:pPr>
-            <a:r>
-              <a:rPr sz="900" b="1">
-                <a:solidFill>
-                  <a:srgbClr val="0EA5E9"/>
-                </a:solidFill>
-                <a:latin typeface="NanumGothic"/>
-                <a:ea typeface="NanumGothic"/>
-                <a:cs typeface="NanumGothic"/>
-              </a:rPr>
-              <a:t>Day 2 · 화</a:t>
-            </a:r>
-          </a:p>
-        </p:txBody>
-      </p:sp>
-      <p:sp>
-        <p:nvSpPr>
-          <p:cNvPr id="9" name="Rounded Rectangle 8"/>
+          <p:cNvPr id="8" name="Rounded Rectangle 7"/>
           <p:cNvSpPr/>
           <p:nvPr/>
         </p:nvSpPr>
@@ -21192,7 +21448,7 @@
       </p:sp>
       <p:sp>
         <p:nvSpPr>
-          <p:cNvPr id="10" name="TextBox 9"/>
+          <p:cNvPr id="9" name="TextBox 8"/>
           <p:cNvSpPr txBox="1"/>
           <p:nvPr/>
         </p:nvSpPr>
@@ -21239,7 +21495,7 @@
       </p:sp>
       <p:sp>
         <p:nvSpPr>
-          <p:cNvPr id="11" name="TextBox 10"/>
+          <p:cNvPr id="10" name="TextBox 9"/>
           <p:cNvSpPr txBox="1"/>
           <p:nvPr/>
         </p:nvSpPr>
@@ -21286,7 +21542,7 @@
       </p:sp>
       <p:sp>
         <p:nvSpPr>
-          <p:cNvPr id="12" name="Rounded Rectangle 11"/>
+          <p:cNvPr id="11" name="Rounded Rectangle 10"/>
           <p:cNvSpPr/>
           <p:nvPr/>
         </p:nvSpPr>
@@ -21332,7 +21588,7 @@
       </p:sp>
       <p:sp>
         <p:nvSpPr>
-          <p:cNvPr id="13" name="Oval 12"/>
+          <p:cNvPr id="12" name="Oval 11"/>
           <p:cNvSpPr/>
           <p:nvPr/>
         </p:nvSpPr>
@@ -21376,7 +21632,7 @@
       </p:sp>
       <p:sp>
         <p:nvSpPr>
-          <p:cNvPr id="14" name="TextBox 13"/>
+          <p:cNvPr id="13" name="TextBox 12"/>
           <p:cNvSpPr txBox="1"/>
           <p:nvPr/>
         </p:nvSpPr>
@@ -21423,7 +21679,7 @@
       </p:sp>
       <p:sp>
         <p:nvSpPr>
-          <p:cNvPr id="15" name="TextBox 14"/>
+          <p:cNvPr id="14" name="TextBox 13"/>
           <p:cNvSpPr txBox="1"/>
           <p:nvPr/>
         </p:nvSpPr>
@@ -21470,7 +21726,7 @@
       </p:sp>
       <p:sp>
         <p:nvSpPr>
-          <p:cNvPr id="16" name="Rounded Rectangle 15"/>
+          <p:cNvPr id="15" name="Rounded Rectangle 14"/>
           <p:cNvSpPr/>
           <p:nvPr/>
         </p:nvSpPr>
@@ -21516,7 +21772,7 @@
       </p:sp>
       <p:sp>
         <p:nvSpPr>
-          <p:cNvPr id="17" name="Oval 16"/>
+          <p:cNvPr id="16" name="Oval 15"/>
           <p:cNvSpPr/>
           <p:nvPr/>
         </p:nvSpPr>
@@ -21560,7 +21816,7 @@
       </p:sp>
       <p:sp>
         <p:nvSpPr>
-          <p:cNvPr id="18" name="TextBox 17"/>
+          <p:cNvPr id="17" name="TextBox 16"/>
           <p:cNvSpPr txBox="1"/>
           <p:nvPr/>
         </p:nvSpPr>
@@ -21607,7 +21863,7 @@
       </p:sp>
       <p:sp>
         <p:nvSpPr>
-          <p:cNvPr id="19" name="TextBox 18"/>
+          <p:cNvPr id="18" name="TextBox 17"/>
           <p:cNvSpPr txBox="1"/>
           <p:nvPr/>
         </p:nvSpPr>
@@ -21654,7 +21910,7 @@
       </p:sp>
       <p:sp>
         <p:nvSpPr>
-          <p:cNvPr id="20" name="Rounded Rectangle 19"/>
+          <p:cNvPr id="19" name="Rounded Rectangle 18"/>
           <p:cNvSpPr/>
           <p:nvPr/>
         </p:nvSpPr>
@@ -21700,7 +21956,7 @@
       </p:sp>
       <p:sp>
         <p:nvSpPr>
-          <p:cNvPr id="21" name="Oval 20"/>
+          <p:cNvPr id="20" name="Oval 19"/>
           <p:cNvSpPr/>
           <p:nvPr/>
         </p:nvSpPr>
@@ -21744,7 +22000,7 @@
       </p:sp>
       <p:sp>
         <p:nvSpPr>
-          <p:cNvPr id="22" name="TextBox 21"/>
+          <p:cNvPr id="21" name="TextBox 20"/>
           <p:cNvSpPr txBox="1"/>
           <p:nvPr/>
         </p:nvSpPr>
@@ -21791,7 +22047,7 @@
       </p:sp>
       <p:sp>
         <p:nvSpPr>
-          <p:cNvPr id="23" name="TextBox 22"/>
+          <p:cNvPr id="22" name="TextBox 21"/>
           <p:cNvSpPr txBox="1"/>
           <p:nvPr/>
         </p:nvSpPr>
@@ -21838,7 +22094,7 @@
       </p:sp>
       <p:sp>
         <p:nvSpPr>
-          <p:cNvPr id="24" name="Rounded Rectangle 23"/>
+          <p:cNvPr id="23" name="Rounded Rectangle 22"/>
           <p:cNvSpPr/>
           <p:nvPr/>
         </p:nvSpPr>
@@ -21884,7 +22140,7 @@
       </p:sp>
       <p:sp>
         <p:nvSpPr>
-          <p:cNvPr id="25" name="Oval 24"/>
+          <p:cNvPr id="24" name="Oval 23"/>
           <p:cNvSpPr/>
           <p:nvPr/>
         </p:nvSpPr>
@@ -21928,7 +22184,7 @@
       </p:sp>
       <p:sp>
         <p:nvSpPr>
-          <p:cNvPr id="26" name="TextBox 25"/>
+          <p:cNvPr id="25" name="TextBox 24"/>
           <p:cNvSpPr txBox="1"/>
           <p:nvPr/>
         </p:nvSpPr>
@@ -21975,7 +22231,7 @@
       </p:sp>
       <p:sp>
         <p:nvSpPr>
-          <p:cNvPr id="27" name="TextBox 26"/>
+          <p:cNvPr id="26" name="TextBox 25"/>
           <p:cNvSpPr txBox="1"/>
           <p:nvPr/>
         </p:nvSpPr>
@@ -22022,7 +22278,7 @@
       </p:sp>
       <p:sp>
         <p:nvSpPr>
-          <p:cNvPr id="28" name="Rounded Rectangle 27"/>
+          <p:cNvPr id="27" name="Rounded Rectangle 26"/>
           <p:cNvSpPr/>
           <p:nvPr/>
         </p:nvSpPr>
@@ -22068,7 +22324,7 @@
       </p:sp>
       <p:sp>
         <p:nvSpPr>
-          <p:cNvPr id="29" name="Oval 28"/>
+          <p:cNvPr id="28" name="Oval 27"/>
           <p:cNvSpPr/>
           <p:nvPr/>
         </p:nvSpPr>
@@ -22112,7 +22368,7 @@
       </p:sp>
       <p:sp>
         <p:nvSpPr>
-          <p:cNvPr id="30" name="TextBox 29"/>
+          <p:cNvPr id="29" name="TextBox 28"/>
           <p:cNvSpPr txBox="1"/>
           <p:nvPr/>
         </p:nvSpPr>
@@ -22159,7 +22415,7 @@
       </p:sp>
       <p:sp>
         <p:nvSpPr>
-          <p:cNvPr id="31" name="TextBox 30"/>
+          <p:cNvPr id="30" name="TextBox 29"/>
           <p:cNvSpPr txBox="1"/>
           <p:nvPr/>
         </p:nvSpPr>
@@ -22206,7 +22462,7 @@
       </p:sp>
       <p:sp>
         <p:nvSpPr>
-          <p:cNvPr id="32" name="Rounded Rectangle 31"/>
+          <p:cNvPr id="31" name="Rounded Rectangle 30"/>
           <p:cNvSpPr/>
           <p:nvPr/>
         </p:nvSpPr>
@@ -22252,7 +22508,7 @@
       </p:sp>
       <p:sp>
         <p:nvSpPr>
-          <p:cNvPr id="33" name="Oval 32"/>
+          <p:cNvPr id="32" name="Oval 31"/>
           <p:cNvSpPr/>
           <p:nvPr/>
         </p:nvSpPr>
@@ -22296,7 +22552,7 @@
       </p:sp>
       <p:sp>
         <p:nvSpPr>
-          <p:cNvPr id="34" name="TextBox 33"/>
+          <p:cNvPr id="33" name="TextBox 32"/>
           <p:cNvSpPr txBox="1"/>
           <p:nvPr/>
         </p:nvSpPr>
@@ -22343,7 +22599,7 @@
       </p:sp>
       <p:sp>
         <p:nvSpPr>
-          <p:cNvPr id="35" name="TextBox 34"/>
+          <p:cNvPr id="34" name="TextBox 33"/>
           <p:cNvSpPr txBox="1"/>
           <p:nvPr/>
         </p:nvSpPr>
@@ -22384,6 +22640,64 @@
                 <a:cs typeface="NanumGothic"/>
               </a:rPr>
               <a:t>설치 실습</a:t>
+            </a:r>
+          </a:p>
+        </p:txBody>
+      </p:sp>
+      <p:sp>
+        <p:nvSpPr>
+          <p:cNvPr id="35" name="TextBox 34"/>
+          <p:cNvSpPr txBox="1"/>
+          <p:nvPr/>
+        </p:nvSpPr>
+        <p:spPr>
+          <a:xfrm>
+            <a:off x="8988552" y="6419088"/>
+            <a:ext cx="2697480" cy="365760"/>
+          </a:xfrm>
+          <a:prstGeom prst="rect">
+            <a:avLst/>
+          </a:prstGeom>
+          <a:noFill/>
+        </p:spPr>
+        <p:txBody>
+          <a:bodyPr wrap="square" anchor="ctr" lIns="0" rIns="0" tIns="0" bIns="0">
+            <a:spAutoFit/>
+          </a:bodyPr>
+          <a:lstStyle/>
+          <a:p>
+            <a:pPr algn="r">
+              <a:lnSpc>
+                <a:spcPct val="100000"/>
+              </a:lnSpc>
+              <a:spcBef>
+                <a:spcPts val="0"/>
+              </a:spcBef>
+              <a:spcAft>
+                <a:spcPts val="600"/>
+              </a:spcAft>
+            </a:pPr>
+            <a:r>
+              <a:rPr sz="900" b="1">
+                <a:solidFill>
+                  <a:srgbClr val="0EA5E9"/>
+                </a:solidFill>
+                <a:latin typeface="NanumGothic"/>
+                <a:ea typeface="NanumGothic"/>
+                <a:cs typeface="NanumGothic"/>
+              </a:rPr>
+              <a:t>Day 2 · 화</a:t>
+            </a:r>
+            <a:r>
+              <a:rPr sz="900" b="1">
+                <a:solidFill>
+                  <a:srgbClr val="64748B"/>
+                </a:solidFill>
+                <a:latin typeface="NanumGothic"/>
+                <a:ea typeface="NanumGothic"/>
+                <a:cs typeface="NanumGothic"/>
+              </a:rPr>
+              <a:t>   ·   27 / 43</a:t>
             </a:r>
           </a:p>
         </p:txBody>
@@ -22681,54 +22995,7 @@
       </p:sp>
       <p:sp>
         <p:nvSpPr>
-          <p:cNvPr id="8" name="TextBox 7"/>
-          <p:cNvSpPr txBox="1"/>
-          <p:nvPr/>
-        </p:nvSpPr>
-        <p:spPr>
-          <a:xfrm>
-            <a:off x="10241280" y="6419088"/>
-            <a:ext cx="1463040" cy="365760"/>
-          </a:xfrm>
-          <a:prstGeom prst="rect">
-            <a:avLst/>
-          </a:prstGeom>
-          <a:noFill/>
-        </p:spPr>
-        <p:txBody>
-          <a:bodyPr wrap="square" anchor="ctr" lIns="0" rIns="0" tIns="0" bIns="0">
-            <a:spAutoFit/>
-          </a:bodyPr>
-          <a:lstStyle/>
-          <a:p>
-            <a:pPr algn="r">
-              <a:lnSpc>
-                <a:spcPct val="100000"/>
-              </a:lnSpc>
-              <a:spcBef>
-                <a:spcPts val="0"/>
-              </a:spcBef>
-              <a:spcAft>
-                <a:spcPts val="600"/>
-              </a:spcAft>
-            </a:pPr>
-            <a:r>
-              <a:rPr sz="900" b="1">
-                <a:solidFill>
-                  <a:srgbClr val="0EA5E9"/>
-                </a:solidFill>
-                <a:latin typeface="NanumGothic"/>
-                <a:ea typeface="NanumGothic"/>
-                <a:cs typeface="NanumGothic"/>
-              </a:rPr>
-              <a:t>Day 2 · 화</a:t>
-            </a:r>
-          </a:p>
-        </p:txBody>
-      </p:sp>
-      <p:sp>
-        <p:nvSpPr>
-          <p:cNvPr id="9" name="Oval 8"/>
+          <p:cNvPr id="8" name="Oval 7"/>
           <p:cNvSpPr/>
           <p:nvPr/>
         </p:nvSpPr>
@@ -22772,7 +23039,7 @@
       </p:sp>
       <p:sp>
         <p:nvSpPr>
-          <p:cNvPr id="10" name="TextBox 9"/>
+          <p:cNvPr id="9" name="TextBox 8"/>
           <p:cNvSpPr txBox="1"/>
           <p:nvPr/>
         </p:nvSpPr>
@@ -22819,7 +23086,7 @@
       </p:sp>
       <p:sp>
         <p:nvSpPr>
-          <p:cNvPr id="11" name="TextBox 10"/>
+          <p:cNvPr id="10" name="TextBox 9"/>
           <p:cNvSpPr txBox="1"/>
           <p:nvPr/>
         </p:nvSpPr>
@@ -22866,7 +23133,7 @@
       </p:sp>
       <p:sp>
         <p:nvSpPr>
-          <p:cNvPr id="12" name="Oval 11"/>
+          <p:cNvPr id="11" name="Oval 10"/>
           <p:cNvSpPr/>
           <p:nvPr/>
         </p:nvSpPr>
@@ -22910,7 +23177,7 @@
       </p:sp>
       <p:sp>
         <p:nvSpPr>
-          <p:cNvPr id="13" name="TextBox 12"/>
+          <p:cNvPr id="12" name="TextBox 11"/>
           <p:cNvSpPr txBox="1"/>
           <p:nvPr/>
         </p:nvSpPr>
@@ -22957,7 +23224,7 @@
       </p:sp>
       <p:sp>
         <p:nvSpPr>
-          <p:cNvPr id="14" name="TextBox 13"/>
+          <p:cNvPr id="13" name="TextBox 12"/>
           <p:cNvSpPr txBox="1"/>
           <p:nvPr/>
         </p:nvSpPr>
@@ -23004,7 +23271,7 @@
       </p:sp>
       <p:sp>
         <p:nvSpPr>
-          <p:cNvPr id="15" name="Oval 14"/>
+          <p:cNvPr id="14" name="Oval 13"/>
           <p:cNvSpPr/>
           <p:nvPr/>
         </p:nvSpPr>
@@ -23048,7 +23315,7 @@
       </p:sp>
       <p:sp>
         <p:nvSpPr>
-          <p:cNvPr id="16" name="TextBox 15"/>
+          <p:cNvPr id="15" name="TextBox 14"/>
           <p:cNvSpPr txBox="1"/>
           <p:nvPr/>
         </p:nvSpPr>
@@ -23095,7 +23362,7 @@
       </p:sp>
       <p:sp>
         <p:nvSpPr>
-          <p:cNvPr id="17" name="TextBox 16"/>
+          <p:cNvPr id="16" name="TextBox 15"/>
           <p:cNvSpPr txBox="1"/>
           <p:nvPr/>
         </p:nvSpPr>
@@ -23136,6 +23403,64 @@
                 <a:cs typeface="NanumGothic"/>
               </a:rPr>
               <a:t>Claude 구독(Pro/Max) 또는 Anthropic Console 계정</a:t>
+            </a:r>
+          </a:p>
+        </p:txBody>
+      </p:sp>
+      <p:sp>
+        <p:nvSpPr>
+          <p:cNvPr id="17" name="TextBox 16"/>
+          <p:cNvSpPr txBox="1"/>
+          <p:nvPr/>
+        </p:nvSpPr>
+        <p:spPr>
+          <a:xfrm>
+            <a:off x="8988552" y="6419088"/>
+            <a:ext cx="2697480" cy="365760"/>
+          </a:xfrm>
+          <a:prstGeom prst="rect">
+            <a:avLst/>
+          </a:prstGeom>
+          <a:noFill/>
+        </p:spPr>
+        <p:txBody>
+          <a:bodyPr wrap="square" anchor="ctr" lIns="0" rIns="0" tIns="0" bIns="0">
+            <a:spAutoFit/>
+          </a:bodyPr>
+          <a:lstStyle/>
+          <a:p>
+            <a:pPr algn="r">
+              <a:lnSpc>
+                <a:spcPct val="100000"/>
+              </a:lnSpc>
+              <a:spcBef>
+                <a:spcPts val="0"/>
+              </a:spcBef>
+              <a:spcAft>
+                <a:spcPts val="600"/>
+              </a:spcAft>
+            </a:pPr>
+            <a:r>
+              <a:rPr sz="900" b="1">
+                <a:solidFill>
+                  <a:srgbClr val="0EA5E9"/>
+                </a:solidFill>
+                <a:latin typeface="NanumGothic"/>
+                <a:ea typeface="NanumGothic"/>
+                <a:cs typeface="NanumGothic"/>
+              </a:rPr>
+              <a:t>Day 2 · 화</a:t>
+            </a:r>
+            <a:r>
+              <a:rPr sz="900" b="1">
+                <a:solidFill>
+                  <a:srgbClr val="64748B"/>
+                </a:solidFill>
+                <a:latin typeface="NanumGothic"/>
+                <a:ea typeface="NanumGothic"/>
+                <a:cs typeface="NanumGothic"/>
+              </a:rPr>
+              <a:t>   ·   28 / 43</a:t>
             </a:r>
           </a:p>
         </p:txBody>
@@ -23433,54 +23758,7 @@
       </p:sp>
       <p:sp>
         <p:nvSpPr>
-          <p:cNvPr id="8" name="TextBox 7"/>
-          <p:cNvSpPr txBox="1"/>
-          <p:nvPr/>
-        </p:nvSpPr>
-        <p:spPr>
-          <a:xfrm>
-            <a:off x="10241280" y="6419088"/>
-            <a:ext cx="1463040" cy="365760"/>
-          </a:xfrm>
-          <a:prstGeom prst="rect">
-            <a:avLst/>
-          </a:prstGeom>
-          <a:noFill/>
-        </p:spPr>
-        <p:txBody>
-          <a:bodyPr wrap="square" anchor="ctr" lIns="0" rIns="0" tIns="0" bIns="0">
-            <a:spAutoFit/>
-          </a:bodyPr>
-          <a:lstStyle/>
-          <a:p>
-            <a:pPr algn="r">
-              <a:lnSpc>
-                <a:spcPct val="100000"/>
-              </a:lnSpc>
-              <a:spcBef>
-                <a:spcPts val="0"/>
-              </a:spcBef>
-              <a:spcAft>
-                <a:spcPts val="600"/>
-              </a:spcAft>
-            </a:pPr>
-            <a:r>
-              <a:rPr sz="900" b="1">
-                <a:solidFill>
-                  <a:srgbClr val="0EA5E9"/>
-                </a:solidFill>
-                <a:latin typeface="NanumGothic"/>
-                <a:ea typeface="NanumGothic"/>
-                <a:cs typeface="NanumGothic"/>
-              </a:rPr>
-              <a:t>Day 2 · 화</a:t>
-            </a:r>
-          </a:p>
-        </p:txBody>
-      </p:sp>
-      <p:sp>
-        <p:nvSpPr>
-          <p:cNvPr id="9" name="Rounded Rectangle 8"/>
+          <p:cNvPr id="8" name="Rounded Rectangle 7"/>
           <p:cNvSpPr/>
           <p:nvPr/>
         </p:nvSpPr>
@@ -23526,7 +23804,7 @@
       </p:sp>
       <p:sp>
         <p:nvSpPr>
-          <p:cNvPr id="10" name="Rounded Rectangle 9"/>
+          <p:cNvPr id="9" name="Rounded Rectangle 8"/>
           <p:cNvSpPr/>
           <p:nvPr/>
         </p:nvSpPr>
@@ -23570,7 +23848,7 @@
       </p:sp>
       <p:sp>
         <p:nvSpPr>
-          <p:cNvPr id="11" name="TextBox 10"/>
+          <p:cNvPr id="10" name="TextBox 9"/>
           <p:cNvSpPr txBox="1"/>
           <p:nvPr/>
         </p:nvSpPr>
@@ -23617,7 +23895,7 @@
       </p:sp>
       <p:sp>
         <p:nvSpPr>
-          <p:cNvPr id="12" name="TextBox 11"/>
+          <p:cNvPr id="11" name="TextBox 10"/>
           <p:cNvSpPr txBox="1"/>
           <p:nvPr/>
         </p:nvSpPr>
@@ -23675,7 +23953,7 @@
       </p:sp>
       <p:sp>
         <p:nvSpPr>
-          <p:cNvPr id="13" name="TextBox 12"/>
+          <p:cNvPr id="12" name="TextBox 11"/>
           <p:cNvSpPr txBox="1"/>
           <p:nvPr/>
         </p:nvSpPr>
@@ -23733,7 +24011,7 @@
       </p:sp>
       <p:sp>
         <p:nvSpPr>
-          <p:cNvPr id="14" name="TextBox 13"/>
+          <p:cNvPr id="13" name="TextBox 12"/>
           <p:cNvSpPr txBox="1"/>
           <p:nvPr/>
         </p:nvSpPr>
@@ -23791,7 +24069,7 @@
       </p:sp>
       <p:sp>
         <p:nvSpPr>
-          <p:cNvPr id="15" name="TextBox 14"/>
+          <p:cNvPr id="14" name="TextBox 13"/>
           <p:cNvSpPr txBox="1"/>
           <p:nvPr/>
         </p:nvSpPr>
@@ -23849,7 +24127,7 @@
       </p:sp>
       <p:sp>
         <p:nvSpPr>
-          <p:cNvPr id="16" name="Rounded Rectangle 15"/>
+          <p:cNvPr id="15" name="Rounded Rectangle 14"/>
           <p:cNvSpPr/>
           <p:nvPr/>
         </p:nvSpPr>
@@ -23895,7 +24173,7 @@
       </p:sp>
       <p:sp>
         <p:nvSpPr>
-          <p:cNvPr id="17" name="Rounded Rectangle 16"/>
+          <p:cNvPr id="16" name="Rounded Rectangle 15"/>
           <p:cNvSpPr/>
           <p:nvPr/>
         </p:nvSpPr>
@@ -23939,7 +24217,7 @@
       </p:sp>
       <p:sp>
         <p:nvSpPr>
-          <p:cNvPr id="18" name="TextBox 17"/>
+          <p:cNvPr id="17" name="TextBox 16"/>
           <p:cNvSpPr txBox="1"/>
           <p:nvPr/>
         </p:nvSpPr>
@@ -23986,7 +24264,7 @@
       </p:sp>
       <p:sp>
         <p:nvSpPr>
-          <p:cNvPr id="19" name="TextBox 18"/>
+          <p:cNvPr id="18" name="TextBox 17"/>
           <p:cNvSpPr txBox="1"/>
           <p:nvPr/>
         </p:nvSpPr>
@@ -24044,7 +24322,7 @@
       </p:sp>
       <p:sp>
         <p:nvSpPr>
-          <p:cNvPr id="20" name="TextBox 19"/>
+          <p:cNvPr id="19" name="TextBox 18"/>
           <p:cNvSpPr txBox="1"/>
           <p:nvPr/>
         </p:nvSpPr>
@@ -24102,7 +24380,7 @@
       </p:sp>
       <p:sp>
         <p:nvSpPr>
-          <p:cNvPr id="21" name="TextBox 20"/>
+          <p:cNvPr id="20" name="TextBox 19"/>
           <p:cNvSpPr txBox="1"/>
           <p:nvPr/>
         </p:nvSpPr>
@@ -24160,7 +24438,7 @@
       </p:sp>
       <p:sp>
         <p:nvSpPr>
-          <p:cNvPr id="22" name="TextBox 21"/>
+          <p:cNvPr id="21" name="TextBox 20"/>
           <p:cNvSpPr txBox="1"/>
           <p:nvPr/>
         </p:nvSpPr>
@@ -24212,6 +24490,64 @@
                 <a:cs typeface="NanumGothic"/>
               </a:rPr>
               <a:t>터미널: Terminal(zsh)</a:t>
+            </a:r>
+          </a:p>
+        </p:txBody>
+      </p:sp>
+      <p:sp>
+        <p:nvSpPr>
+          <p:cNvPr id="22" name="TextBox 21"/>
+          <p:cNvSpPr txBox="1"/>
+          <p:nvPr/>
+        </p:nvSpPr>
+        <p:spPr>
+          <a:xfrm>
+            <a:off x="8988552" y="6419088"/>
+            <a:ext cx="2697480" cy="365760"/>
+          </a:xfrm>
+          <a:prstGeom prst="rect">
+            <a:avLst/>
+          </a:prstGeom>
+          <a:noFill/>
+        </p:spPr>
+        <p:txBody>
+          <a:bodyPr wrap="square" anchor="ctr" lIns="0" rIns="0" tIns="0" bIns="0">
+            <a:spAutoFit/>
+          </a:bodyPr>
+          <a:lstStyle/>
+          <a:p>
+            <a:pPr algn="r">
+              <a:lnSpc>
+                <a:spcPct val="100000"/>
+              </a:lnSpc>
+              <a:spcBef>
+                <a:spcPts val="0"/>
+              </a:spcBef>
+              <a:spcAft>
+                <a:spcPts val="600"/>
+              </a:spcAft>
+            </a:pPr>
+            <a:r>
+              <a:rPr sz="900" b="1">
+                <a:solidFill>
+                  <a:srgbClr val="0EA5E9"/>
+                </a:solidFill>
+                <a:latin typeface="NanumGothic"/>
+                <a:ea typeface="NanumGothic"/>
+                <a:cs typeface="NanumGothic"/>
+              </a:rPr>
+              <a:t>Day 2 · 화</a:t>
+            </a:r>
+            <a:r>
+              <a:rPr sz="900" b="1">
+                <a:solidFill>
+                  <a:srgbClr val="64748B"/>
+                </a:solidFill>
+                <a:latin typeface="NanumGothic"/>
+                <a:ea typeface="NanumGothic"/>
+                <a:cs typeface="NanumGothic"/>
+              </a:rPr>
+              <a:t>   ·   29 / 43</a:t>
             </a:r>
           </a:p>
         </p:txBody>
@@ -24509,54 +24845,7 @@
       </p:sp>
       <p:sp>
         <p:nvSpPr>
-          <p:cNvPr id="8" name="TextBox 7"/>
-          <p:cNvSpPr txBox="1"/>
-          <p:nvPr/>
-        </p:nvSpPr>
-        <p:spPr>
-          <a:xfrm>
-            <a:off x="10241280" y="6419088"/>
-            <a:ext cx="1463040" cy="365760"/>
-          </a:xfrm>
-          <a:prstGeom prst="rect">
-            <a:avLst/>
-          </a:prstGeom>
-          <a:noFill/>
-        </p:spPr>
-        <p:txBody>
-          <a:bodyPr wrap="square" anchor="ctr" lIns="0" rIns="0" tIns="0" bIns="0">
-            <a:spAutoFit/>
-          </a:bodyPr>
-          <a:lstStyle/>
-          <a:p>
-            <a:pPr algn="r">
-              <a:lnSpc>
-                <a:spcPct val="100000"/>
-              </a:lnSpc>
-              <a:spcBef>
-                <a:spcPts val="0"/>
-              </a:spcBef>
-              <a:spcAft>
-                <a:spcPts val="600"/>
-              </a:spcAft>
-            </a:pPr>
-            <a:r>
-              <a:rPr sz="900" b="1">
-                <a:solidFill>
-                  <a:srgbClr val="0EA5E9"/>
-                </a:solidFill>
-                <a:latin typeface="NanumGothic"/>
-                <a:ea typeface="NanumGothic"/>
-                <a:cs typeface="NanumGothic"/>
-              </a:rPr>
-              <a:t>Day 2 · 화</a:t>
-            </a:r>
-          </a:p>
-        </p:txBody>
-      </p:sp>
-      <p:sp>
-        <p:nvSpPr>
-          <p:cNvPr id="9" name="Rounded Rectangle 8"/>
+          <p:cNvPr id="8" name="Rounded Rectangle 7"/>
           <p:cNvSpPr/>
           <p:nvPr/>
         </p:nvSpPr>
@@ -24602,7 +24891,7 @@
       </p:sp>
       <p:sp>
         <p:nvSpPr>
-          <p:cNvPr id="10" name="Rectangle 9"/>
+          <p:cNvPr id="9" name="Rectangle 8"/>
           <p:cNvSpPr/>
           <p:nvPr/>
         </p:nvSpPr>
@@ -24646,7 +24935,7 @@
       </p:sp>
       <p:sp>
         <p:nvSpPr>
-          <p:cNvPr id="11" name="Oval 10"/>
+          <p:cNvPr id="10" name="Oval 9"/>
           <p:cNvSpPr/>
           <p:nvPr/>
         </p:nvSpPr>
@@ -24690,7 +24979,7 @@
       </p:sp>
       <p:sp>
         <p:nvSpPr>
-          <p:cNvPr id="12" name="TextBox 11"/>
+          <p:cNvPr id="11" name="TextBox 10"/>
           <p:cNvSpPr txBox="1"/>
           <p:nvPr/>
         </p:nvSpPr>
@@ -24737,7 +25026,7 @@
       </p:sp>
       <p:sp>
         <p:nvSpPr>
-          <p:cNvPr id="13" name="TextBox 12"/>
+          <p:cNvPr id="12" name="TextBox 11"/>
           <p:cNvSpPr txBox="1"/>
           <p:nvPr/>
         </p:nvSpPr>
@@ -24784,7 +25073,7 @@
       </p:sp>
       <p:sp>
         <p:nvSpPr>
-          <p:cNvPr id="14" name="TextBox 13"/>
+          <p:cNvPr id="13" name="TextBox 12"/>
           <p:cNvSpPr txBox="1"/>
           <p:nvPr/>
         </p:nvSpPr>
@@ -24842,7 +25131,7 @@
       </p:sp>
       <p:sp>
         <p:nvSpPr>
-          <p:cNvPr id="15" name="TextBox 14"/>
+          <p:cNvPr id="14" name="TextBox 13"/>
           <p:cNvSpPr txBox="1"/>
           <p:nvPr/>
         </p:nvSpPr>
@@ -24889,7 +25178,7 @@
       </p:sp>
       <p:sp>
         <p:nvSpPr>
-          <p:cNvPr id="16" name="TextBox 15"/>
+          <p:cNvPr id="15" name="TextBox 14"/>
           <p:cNvSpPr txBox="1"/>
           <p:nvPr/>
         </p:nvSpPr>
@@ -24936,7 +25225,7 @@
       </p:sp>
       <p:sp>
         <p:nvSpPr>
-          <p:cNvPr id="17" name="Rounded Rectangle 16"/>
+          <p:cNvPr id="16" name="Rounded Rectangle 15"/>
           <p:cNvSpPr/>
           <p:nvPr/>
         </p:nvSpPr>
@@ -24982,7 +25271,7 @@
       </p:sp>
       <p:sp>
         <p:nvSpPr>
-          <p:cNvPr id="18" name="Rectangle 17"/>
+          <p:cNvPr id="17" name="Rectangle 16"/>
           <p:cNvSpPr/>
           <p:nvPr/>
         </p:nvSpPr>
@@ -25026,7 +25315,7 @@
       </p:sp>
       <p:sp>
         <p:nvSpPr>
-          <p:cNvPr id="19" name="Oval 18"/>
+          <p:cNvPr id="18" name="Oval 17"/>
           <p:cNvSpPr/>
           <p:nvPr/>
         </p:nvSpPr>
@@ -25070,7 +25359,7 @@
       </p:sp>
       <p:sp>
         <p:nvSpPr>
-          <p:cNvPr id="20" name="TextBox 19"/>
+          <p:cNvPr id="19" name="TextBox 18"/>
           <p:cNvSpPr txBox="1"/>
           <p:nvPr/>
         </p:nvSpPr>
@@ -25117,7 +25406,7 @@
       </p:sp>
       <p:sp>
         <p:nvSpPr>
-          <p:cNvPr id="21" name="TextBox 20"/>
+          <p:cNvPr id="20" name="TextBox 19"/>
           <p:cNvSpPr txBox="1"/>
           <p:nvPr/>
         </p:nvSpPr>
@@ -25164,7 +25453,7 @@
       </p:sp>
       <p:sp>
         <p:nvSpPr>
-          <p:cNvPr id="22" name="TextBox 21"/>
+          <p:cNvPr id="21" name="TextBox 20"/>
           <p:cNvSpPr txBox="1"/>
           <p:nvPr/>
         </p:nvSpPr>
@@ -25222,7 +25511,7 @@
       </p:sp>
       <p:sp>
         <p:nvSpPr>
-          <p:cNvPr id="23" name="TextBox 22"/>
+          <p:cNvPr id="22" name="TextBox 21"/>
           <p:cNvSpPr txBox="1"/>
           <p:nvPr/>
         </p:nvSpPr>
@@ -25269,7 +25558,7 @@
       </p:sp>
       <p:sp>
         <p:nvSpPr>
-          <p:cNvPr id="24" name="TextBox 23"/>
+          <p:cNvPr id="23" name="TextBox 22"/>
           <p:cNvSpPr txBox="1"/>
           <p:nvPr/>
         </p:nvSpPr>
@@ -25316,7 +25605,7 @@
       </p:sp>
       <p:sp>
         <p:nvSpPr>
-          <p:cNvPr id="25" name="Rounded Rectangle 24"/>
+          <p:cNvPr id="24" name="Rounded Rectangle 23"/>
           <p:cNvSpPr/>
           <p:nvPr/>
         </p:nvSpPr>
@@ -25362,7 +25651,7 @@
       </p:sp>
       <p:sp>
         <p:nvSpPr>
-          <p:cNvPr id="26" name="Rectangle 25"/>
+          <p:cNvPr id="25" name="Rectangle 24"/>
           <p:cNvSpPr/>
           <p:nvPr/>
         </p:nvSpPr>
@@ -25406,7 +25695,7 @@
       </p:sp>
       <p:sp>
         <p:nvSpPr>
-          <p:cNvPr id="27" name="Oval 26"/>
+          <p:cNvPr id="26" name="Oval 25"/>
           <p:cNvSpPr/>
           <p:nvPr/>
         </p:nvSpPr>
@@ -25450,7 +25739,7 @@
       </p:sp>
       <p:sp>
         <p:nvSpPr>
-          <p:cNvPr id="28" name="TextBox 27"/>
+          <p:cNvPr id="27" name="TextBox 26"/>
           <p:cNvSpPr txBox="1"/>
           <p:nvPr/>
         </p:nvSpPr>
@@ -25497,7 +25786,7 @@
       </p:sp>
       <p:sp>
         <p:nvSpPr>
-          <p:cNvPr id="29" name="TextBox 28"/>
+          <p:cNvPr id="28" name="TextBox 27"/>
           <p:cNvSpPr txBox="1"/>
           <p:nvPr/>
         </p:nvSpPr>
@@ -25544,7 +25833,7 @@
       </p:sp>
       <p:sp>
         <p:nvSpPr>
-          <p:cNvPr id="30" name="TextBox 29"/>
+          <p:cNvPr id="29" name="TextBox 28"/>
           <p:cNvSpPr txBox="1"/>
           <p:nvPr/>
         </p:nvSpPr>
@@ -25602,7 +25891,7 @@
       </p:sp>
       <p:sp>
         <p:nvSpPr>
-          <p:cNvPr id="31" name="TextBox 30"/>
+          <p:cNvPr id="30" name="TextBox 29"/>
           <p:cNvSpPr txBox="1"/>
           <p:nvPr/>
         </p:nvSpPr>
@@ -25649,7 +25938,7 @@
       </p:sp>
       <p:sp>
         <p:nvSpPr>
-          <p:cNvPr id="32" name="TextBox 31"/>
+          <p:cNvPr id="31" name="TextBox 30"/>
           <p:cNvSpPr txBox="1"/>
           <p:nvPr/>
         </p:nvSpPr>
@@ -25690,6 +25979,64 @@
                 <a:cs typeface="NanumGothic"/>
               </a:rPr>
               <a:t>90분</a:t>
+            </a:r>
+          </a:p>
+        </p:txBody>
+      </p:sp>
+      <p:sp>
+        <p:nvSpPr>
+          <p:cNvPr id="32" name="TextBox 31"/>
+          <p:cNvSpPr txBox="1"/>
+          <p:nvPr/>
+        </p:nvSpPr>
+        <p:spPr>
+          <a:xfrm>
+            <a:off x="8988552" y="6419088"/>
+            <a:ext cx="2697480" cy="365760"/>
+          </a:xfrm>
+          <a:prstGeom prst="rect">
+            <a:avLst/>
+          </a:prstGeom>
+          <a:noFill/>
+        </p:spPr>
+        <p:txBody>
+          <a:bodyPr wrap="square" anchor="ctr" lIns="0" rIns="0" tIns="0" bIns="0">
+            <a:spAutoFit/>
+          </a:bodyPr>
+          <a:lstStyle/>
+          <a:p>
+            <a:pPr algn="r">
+              <a:lnSpc>
+                <a:spcPct val="100000"/>
+              </a:lnSpc>
+              <a:spcBef>
+                <a:spcPts val="0"/>
+              </a:spcBef>
+              <a:spcAft>
+                <a:spcPts val="600"/>
+              </a:spcAft>
+            </a:pPr>
+            <a:r>
+              <a:rPr sz="900" b="1">
+                <a:solidFill>
+                  <a:srgbClr val="0EA5E9"/>
+                </a:solidFill>
+                <a:latin typeface="NanumGothic"/>
+                <a:ea typeface="NanumGothic"/>
+                <a:cs typeface="NanumGothic"/>
+              </a:rPr>
+              <a:t>Day 2 · 화</a:t>
+            </a:r>
+            <a:r>
+              <a:rPr sz="900" b="1">
+                <a:solidFill>
+                  <a:srgbClr val="64748B"/>
+                </a:solidFill>
+                <a:latin typeface="NanumGothic"/>
+                <a:ea typeface="NanumGothic"/>
+                <a:cs typeface="NanumGothic"/>
+              </a:rPr>
+              <a:t>   ·   3 / 43</a:t>
             </a:r>
           </a:p>
         </p:txBody>
@@ -25987,54 +26334,7 @@
       </p:sp>
       <p:sp>
         <p:nvSpPr>
-          <p:cNvPr id="8" name="TextBox 7"/>
-          <p:cNvSpPr txBox="1"/>
-          <p:nvPr/>
-        </p:nvSpPr>
-        <p:spPr>
-          <a:xfrm>
-            <a:off x="10241280" y="6419088"/>
-            <a:ext cx="1463040" cy="365760"/>
-          </a:xfrm>
-          <a:prstGeom prst="rect">
-            <a:avLst/>
-          </a:prstGeom>
-          <a:noFill/>
-        </p:spPr>
-        <p:txBody>
-          <a:bodyPr wrap="square" anchor="ctr" lIns="0" rIns="0" tIns="0" bIns="0">
-            <a:spAutoFit/>
-          </a:bodyPr>
-          <a:lstStyle/>
-          <a:p>
-            <a:pPr algn="r">
-              <a:lnSpc>
-                <a:spcPct val="100000"/>
-              </a:lnSpc>
-              <a:spcBef>
-                <a:spcPts val="0"/>
-              </a:spcBef>
-              <a:spcAft>
-                <a:spcPts val="600"/>
-              </a:spcAft>
-            </a:pPr>
-            <a:r>
-              <a:rPr sz="900" b="1">
-                <a:solidFill>
-                  <a:srgbClr val="0EA5E9"/>
-                </a:solidFill>
-                <a:latin typeface="NanumGothic"/>
-                <a:ea typeface="NanumGothic"/>
-                <a:cs typeface="NanumGothic"/>
-              </a:rPr>
-              <a:t>Day 2 · 화</a:t>
-            </a:r>
-          </a:p>
-        </p:txBody>
-      </p:sp>
-      <p:sp>
-        <p:nvSpPr>
-          <p:cNvPr id="9" name="Oval 8"/>
+          <p:cNvPr id="8" name="Oval 7"/>
           <p:cNvSpPr/>
           <p:nvPr/>
         </p:nvSpPr>
@@ -26078,7 +26378,7 @@
       </p:sp>
       <p:sp>
         <p:nvSpPr>
-          <p:cNvPr id="10" name="TextBox 9"/>
+          <p:cNvPr id="9" name="TextBox 8"/>
           <p:cNvSpPr txBox="1"/>
           <p:nvPr/>
         </p:nvSpPr>
@@ -26125,7 +26425,7 @@
       </p:sp>
       <p:sp>
         <p:nvSpPr>
-          <p:cNvPr id="11" name="TextBox 10"/>
+          <p:cNvPr id="10" name="TextBox 9"/>
           <p:cNvSpPr txBox="1"/>
           <p:nvPr/>
         </p:nvSpPr>
@@ -26172,7 +26472,7 @@
       </p:sp>
       <p:sp>
         <p:nvSpPr>
-          <p:cNvPr id="12" name="Oval 11"/>
+          <p:cNvPr id="11" name="Oval 10"/>
           <p:cNvSpPr/>
           <p:nvPr/>
         </p:nvSpPr>
@@ -26216,7 +26516,7 @@
       </p:sp>
       <p:sp>
         <p:nvSpPr>
-          <p:cNvPr id="13" name="TextBox 12"/>
+          <p:cNvPr id="12" name="TextBox 11"/>
           <p:cNvSpPr txBox="1"/>
           <p:nvPr/>
         </p:nvSpPr>
@@ -26263,7 +26563,7 @@
       </p:sp>
       <p:sp>
         <p:nvSpPr>
-          <p:cNvPr id="14" name="TextBox 13"/>
+          <p:cNvPr id="13" name="TextBox 12"/>
           <p:cNvSpPr txBox="1"/>
           <p:nvPr/>
         </p:nvSpPr>
@@ -26310,7 +26610,7 @@
       </p:sp>
       <p:sp>
         <p:nvSpPr>
-          <p:cNvPr id="15" name="Oval 14"/>
+          <p:cNvPr id="14" name="Oval 13"/>
           <p:cNvSpPr/>
           <p:nvPr/>
         </p:nvSpPr>
@@ -26354,7 +26654,7 @@
       </p:sp>
       <p:sp>
         <p:nvSpPr>
-          <p:cNvPr id="16" name="TextBox 15"/>
+          <p:cNvPr id="15" name="TextBox 14"/>
           <p:cNvSpPr txBox="1"/>
           <p:nvPr/>
         </p:nvSpPr>
@@ -26401,7 +26701,7 @@
       </p:sp>
       <p:sp>
         <p:nvSpPr>
-          <p:cNvPr id="17" name="TextBox 16"/>
+          <p:cNvPr id="16" name="TextBox 15"/>
           <p:cNvSpPr txBox="1"/>
           <p:nvPr/>
         </p:nvSpPr>
@@ -26448,7 +26748,7 @@
       </p:sp>
       <p:sp>
         <p:nvSpPr>
-          <p:cNvPr id="18" name="Rounded Rectangle 17"/>
+          <p:cNvPr id="17" name="Rounded Rectangle 16"/>
           <p:cNvSpPr/>
           <p:nvPr/>
         </p:nvSpPr>
@@ -26494,7 +26794,7 @@
       </p:sp>
       <p:sp>
         <p:nvSpPr>
-          <p:cNvPr id="19" name="TextBox 18"/>
+          <p:cNvPr id="18" name="TextBox 17"/>
           <p:cNvSpPr txBox="1"/>
           <p:nvPr/>
         </p:nvSpPr>
@@ -26546,6 +26846,64 @@
                 <a:cs typeface="NanumGothic"/>
               </a:rPr>
               <a:t>대안(선택): uv — 빠른 모던 도구 · Anaconda — 데이터 패키지 일괄</a:t>
+            </a:r>
+          </a:p>
+        </p:txBody>
+      </p:sp>
+      <p:sp>
+        <p:nvSpPr>
+          <p:cNvPr id="19" name="TextBox 18"/>
+          <p:cNvSpPr txBox="1"/>
+          <p:nvPr/>
+        </p:nvSpPr>
+        <p:spPr>
+          <a:xfrm>
+            <a:off x="8988552" y="6419088"/>
+            <a:ext cx="2697480" cy="365760"/>
+          </a:xfrm>
+          <a:prstGeom prst="rect">
+            <a:avLst/>
+          </a:prstGeom>
+          <a:noFill/>
+        </p:spPr>
+        <p:txBody>
+          <a:bodyPr wrap="square" anchor="ctr" lIns="0" rIns="0" tIns="0" bIns="0">
+            <a:spAutoFit/>
+          </a:bodyPr>
+          <a:lstStyle/>
+          <a:p>
+            <a:pPr algn="r">
+              <a:lnSpc>
+                <a:spcPct val="100000"/>
+              </a:lnSpc>
+              <a:spcBef>
+                <a:spcPts val="0"/>
+              </a:spcBef>
+              <a:spcAft>
+                <a:spcPts val="600"/>
+              </a:spcAft>
+            </a:pPr>
+            <a:r>
+              <a:rPr sz="900" b="1">
+                <a:solidFill>
+                  <a:srgbClr val="0EA5E9"/>
+                </a:solidFill>
+                <a:latin typeface="NanumGothic"/>
+                <a:ea typeface="NanumGothic"/>
+                <a:cs typeface="NanumGothic"/>
+              </a:rPr>
+              <a:t>Day 2 · 화</a:t>
+            </a:r>
+            <a:r>
+              <a:rPr sz="900" b="1">
+                <a:solidFill>
+                  <a:srgbClr val="64748B"/>
+                </a:solidFill>
+                <a:latin typeface="NanumGothic"/>
+                <a:ea typeface="NanumGothic"/>
+                <a:cs typeface="NanumGothic"/>
+              </a:rPr>
+              <a:t>   ·   30 / 43</a:t>
             </a:r>
           </a:p>
         </p:txBody>
@@ -26843,54 +27201,7 @@
       </p:sp>
       <p:sp>
         <p:nvSpPr>
-          <p:cNvPr id="8" name="TextBox 7"/>
-          <p:cNvSpPr txBox="1"/>
-          <p:nvPr/>
-        </p:nvSpPr>
-        <p:spPr>
-          <a:xfrm>
-            <a:off x="10241280" y="6419088"/>
-            <a:ext cx="1463040" cy="365760"/>
-          </a:xfrm>
-          <a:prstGeom prst="rect">
-            <a:avLst/>
-          </a:prstGeom>
-          <a:noFill/>
-        </p:spPr>
-        <p:txBody>
-          <a:bodyPr wrap="square" anchor="ctr" lIns="0" rIns="0" tIns="0" bIns="0">
-            <a:spAutoFit/>
-          </a:bodyPr>
-          <a:lstStyle/>
-          <a:p>
-            <a:pPr algn="r">
-              <a:lnSpc>
-                <a:spcPct val="100000"/>
-              </a:lnSpc>
-              <a:spcBef>
-                <a:spcPts val="0"/>
-              </a:spcBef>
-              <a:spcAft>
-                <a:spcPts val="600"/>
-              </a:spcAft>
-            </a:pPr>
-            <a:r>
-              <a:rPr sz="900" b="1">
-                <a:solidFill>
-                  <a:srgbClr val="0EA5E9"/>
-                </a:solidFill>
-                <a:latin typeface="NanumGothic"/>
-                <a:ea typeface="NanumGothic"/>
-                <a:cs typeface="NanumGothic"/>
-              </a:rPr>
-              <a:t>Day 2 · 화</a:t>
-            </a:r>
-          </a:p>
-        </p:txBody>
-      </p:sp>
-      <p:sp>
-        <p:nvSpPr>
-          <p:cNvPr id="9" name="Rounded Rectangle 8"/>
+          <p:cNvPr id="8" name="Rounded Rectangle 7"/>
           <p:cNvSpPr/>
           <p:nvPr/>
         </p:nvSpPr>
@@ -26936,7 +27247,7 @@
       </p:sp>
       <p:sp>
         <p:nvSpPr>
-          <p:cNvPr id="10" name="Rounded Rectangle 9"/>
+          <p:cNvPr id="9" name="Rounded Rectangle 8"/>
           <p:cNvSpPr/>
           <p:nvPr/>
         </p:nvSpPr>
@@ -26980,7 +27291,7 @@
       </p:sp>
       <p:sp>
         <p:nvSpPr>
-          <p:cNvPr id="11" name="TextBox 10"/>
+          <p:cNvPr id="10" name="TextBox 9"/>
           <p:cNvSpPr txBox="1"/>
           <p:nvPr/>
         </p:nvSpPr>
@@ -27027,7 +27338,7 @@
       </p:sp>
       <p:sp>
         <p:nvSpPr>
-          <p:cNvPr id="12" name="TextBox 11"/>
+          <p:cNvPr id="11" name="TextBox 10"/>
           <p:cNvSpPr txBox="1"/>
           <p:nvPr/>
         </p:nvSpPr>
@@ -27085,7 +27396,7 @@
       </p:sp>
       <p:sp>
         <p:nvSpPr>
-          <p:cNvPr id="13" name="TextBox 12"/>
+          <p:cNvPr id="12" name="TextBox 11"/>
           <p:cNvSpPr txBox="1"/>
           <p:nvPr/>
         </p:nvSpPr>
@@ -27143,7 +27454,7 @@
       </p:sp>
       <p:sp>
         <p:nvSpPr>
-          <p:cNvPr id="14" name="TextBox 13"/>
+          <p:cNvPr id="13" name="TextBox 12"/>
           <p:cNvSpPr txBox="1"/>
           <p:nvPr/>
         </p:nvSpPr>
@@ -27201,7 +27512,7 @@
       </p:sp>
       <p:sp>
         <p:nvSpPr>
-          <p:cNvPr id="15" name="TextBox 14"/>
+          <p:cNvPr id="14" name="TextBox 13"/>
           <p:cNvSpPr txBox="1"/>
           <p:nvPr/>
         </p:nvSpPr>
@@ -27259,7 +27570,7 @@
       </p:sp>
       <p:sp>
         <p:nvSpPr>
-          <p:cNvPr id="16" name="Rounded Rectangle 15"/>
+          <p:cNvPr id="15" name="Rounded Rectangle 14"/>
           <p:cNvSpPr/>
           <p:nvPr/>
         </p:nvSpPr>
@@ -27305,7 +27616,7 @@
       </p:sp>
       <p:sp>
         <p:nvSpPr>
-          <p:cNvPr id="17" name="Rounded Rectangle 16"/>
+          <p:cNvPr id="16" name="Rounded Rectangle 15"/>
           <p:cNvSpPr/>
           <p:nvPr/>
         </p:nvSpPr>
@@ -27349,7 +27660,7 @@
       </p:sp>
       <p:sp>
         <p:nvSpPr>
-          <p:cNvPr id="18" name="TextBox 17"/>
+          <p:cNvPr id="17" name="TextBox 16"/>
           <p:cNvSpPr txBox="1"/>
           <p:nvPr/>
         </p:nvSpPr>
@@ -27396,7 +27707,7 @@
       </p:sp>
       <p:sp>
         <p:nvSpPr>
-          <p:cNvPr id="19" name="TextBox 18"/>
+          <p:cNvPr id="18" name="TextBox 17"/>
           <p:cNvSpPr txBox="1"/>
           <p:nvPr/>
         </p:nvSpPr>
@@ -27454,7 +27765,7 @@
       </p:sp>
       <p:sp>
         <p:nvSpPr>
-          <p:cNvPr id="20" name="TextBox 19"/>
+          <p:cNvPr id="19" name="TextBox 18"/>
           <p:cNvSpPr txBox="1"/>
           <p:nvPr/>
         </p:nvSpPr>
@@ -27512,7 +27823,7 @@
       </p:sp>
       <p:sp>
         <p:nvSpPr>
-          <p:cNvPr id="21" name="TextBox 20"/>
+          <p:cNvPr id="20" name="TextBox 19"/>
           <p:cNvSpPr txBox="1"/>
           <p:nvPr/>
         </p:nvSpPr>
@@ -27570,7 +27881,7 @@
       </p:sp>
       <p:sp>
         <p:nvSpPr>
-          <p:cNvPr id="22" name="TextBox 21"/>
+          <p:cNvPr id="21" name="TextBox 20"/>
           <p:cNvSpPr txBox="1"/>
           <p:nvPr/>
         </p:nvSpPr>
@@ -27622,6 +27933,64 @@
                 <a:cs typeface="NanumGothic"/>
               </a:rPr>
               <a:t>확인: claude --version</a:t>
+            </a:r>
+          </a:p>
+        </p:txBody>
+      </p:sp>
+      <p:sp>
+        <p:nvSpPr>
+          <p:cNvPr id="22" name="TextBox 21"/>
+          <p:cNvSpPr txBox="1"/>
+          <p:nvPr/>
+        </p:nvSpPr>
+        <p:spPr>
+          <a:xfrm>
+            <a:off x="8988552" y="6419088"/>
+            <a:ext cx="2697480" cy="365760"/>
+          </a:xfrm>
+          <a:prstGeom prst="rect">
+            <a:avLst/>
+          </a:prstGeom>
+          <a:noFill/>
+        </p:spPr>
+        <p:txBody>
+          <a:bodyPr wrap="square" anchor="ctr" lIns="0" rIns="0" tIns="0" bIns="0">
+            <a:spAutoFit/>
+          </a:bodyPr>
+          <a:lstStyle/>
+          <a:p>
+            <a:pPr algn="r">
+              <a:lnSpc>
+                <a:spcPct val="100000"/>
+              </a:lnSpc>
+              <a:spcBef>
+                <a:spcPts val="0"/>
+              </a:spcBef>
+              <a:spcAft>
+                <a:spcPts val="600"/>
+              </a:spcAft>
+            </a:pPr>
+            <a:r>
+              <a:rPr sz="900" b="1">
+                <a:solidFill>
+                  <a:srgbClr val="0EA5E9"/>
+                </a:solidFill>
+                <a:latin typeface="NanumGothic"/>
+                <a:ea typeface="NanumGothic"/>
+                <a:cs typeface="NanumGothic"/>
+              </a:rPr>
+              <a:t>Day 2 · 화</a:t>
+            </a:r>
+            <a:r>
+              <a:rPr sz="900" b="1">
+                <a:solidFill>
+                  <a:srgbClr val="64748B"/>
+                </a:solidFill>
+                <a:latin typeface="NanumGothic"/>
+                <a:ea typeface="NanumGothic"/>
+                <a:cs typeface="NanumGothic"/>
+              </a:rPr>
+              <a:t>   ·   31 / 43</a:t>
             </a:r>
           </a:p>
         </p:txBody>
@@ -27919,54 +28288,7 @@
       </p:sp>
       <p:sp>
         <p:nvSpPr>
-          <p:cNvPr id="8" name="TextBox 7"/>
-          <p:cNvSpPr txBox="1"/>
-          <p:nvPr/>
-        </p:nvSpPr>
-        <p:spPr>
-          <a:xfrm>
-            <a:off x="10241280" y="6419088"/>
-            <a:ext cx="1463040" cy="365760"/>
-          </a:xfrm>
-          <a:prstGeom prst="rect">
-            <a:avLst/>
-          </a:prstGeom>
-          <a:noFill/>
-        </p:spPr>
-        <p:txBody>
-          <a:bodyPr wrap="square" anchor="ctr" lIns="0" rIns="0" tIns="0" bIns="0">
-            <a:spAutoFit/>
-          </a:bodyPr>
-          <a:lstStyle/>
-          <a:p>
-            <a:pPr algn="r">
-              <a:lnSpc>
-                <a:spcPct val="100000"/>
-              </a:lnSpc>
-              <a:spcBef>
-                <a:spcPts val="0"/>
-              </a:spcBef>
-              <a:spcAft>
-                <a:spcPts val="600"/>
-              </a:spcAft>
-            </a:pPr>
-            <a:r>
-              <a:rPr sz="900" b="1">
-                <a:solidFill>
-                  <a:srgbClr val="0EA5E9"/>
-                </a:solidFill>
-                <a:latin typeface="NanumGothic"/>
-                <a:ea typeface="NanumGothic"/>
-                <a:cs typeface="NanumGothic"/>
-              </a:rPr>
-              <a:t>Day 2 · 화</a:t>
-            </a:r>
-          </a:p>
-        </p:txBody>
-      </p:sp>
-      <p:sp>
-        <p:nvSpPr>
-          <p:cNvPr id="9" name="Oval 8"/>
+          <p:cNvPr id="8" name="Oval 7"/>
           <p:cNvSpPr/>
           <p:nvPr/>
         </p:nvSpPr>
@@ -28010,7 +28332,7 @@
       </p:sp>
       <p:sp>
         <p:nvSpPr>
-          <p:cNvPr id="10" name="TextBox 9"/>
+          <p:cNvPr id="9" name="TextBox 8"/>
           <p:cNvSpPr txBox="1"/>
           <p:nvPr/>
         </p:nvSpPr>
@@ -28057,7 +28379,7 @@
       </p:sp>
       <p:sp>
         <p:nvSpPr>
-          <p:cNvPr id="11" name="TextBox 10"/>
+          <p:cNvPr id="10" name="TextBox 9"/>
           <p:cNvSpPr txBox="1"/>
           <p:nvPr/>
         </p:nvSpPr>
@@ -28104,7 +28426,7 @@
       </p:sp>
       <p:sp>
         <p:nvSpPr>
-          <p:cNvPr id="12" name="Oval 11"/>
+          <p:cNvPr id="11" name="Oval 10"/>
           <p:cNvSpPr/>
           <p:nvPr/>
         </p:nvSpPr>
@@ -28148,7 +28470,7 @@
       </p:sp>
       <p:sp>
         <p:nvSpPr>
-          <p:cNvPr id="13" name="TextBox 12"/>
+          <p:cNvPr id="12" name="TextBox 11"/>
           <p:cNvSpPr txBox="1"/>
           <p:nvPr/>
         </p:nvSpPr>
@@ -28195,7 +28517,7 @@
       </p:sp>
       <p:sp>
         <p:nvSpPr>
-          <p:cNvPr id="14" name="TextBox 13"/>
+          <p:cNvPr id="13" name="TextBox 12"/>
           <p:cNvSpPr txBox="1"/>
           <p:nvPr/>
         </p:nvSpPr>
@@ -28242,7 +28564,7 @@
       </p:sp>
       <p:sp>
         <p:nvSpPr>
-          <p:cNvPr id="15" name="Oval 14"/>
+          <p:cNvPr id="14" name="Oval 13"/>
           <p:cNvSpPr/>
           <p:nvPr/>
         </p:nvSpPr>
@@ -28286,7 +28608,7 @@
       </p:sp>
       <p:sp>
         <p:nvSpPr>
-          <p:cNvPr id="16" name="TextBox 15"/>
+          <p:cNvPr id="15" name="TextBox 14"/>
           <p:cNvSpPr txBox="1"/>
           <p:nvPr/>
         </p:nvSpPr>
@@ -28333,7 +28655,7 @@
       </p:sp>
       <p:sp>
         <p:nvSpPr>
-          <p:cNvPr id="17" name="TextBox 16"/>
+          <p:cNvPr id="16" name="TextBox 15"/>
           <p:cNvSpPr txBox="1"/>
           <p:nvPr/>
         </p:nvSpPr>
@@ -28374,6 +28696,64 @@
                 <a:cs typeface="NanumGothic"/>
               </a:rPr>
               <a:t>터미널에서  c  눌러 URL 복사 → 직접 붙여넣기</a:t>
+            </a:r>
+          </a:p>
+        </p:txBody>
+      </p:sp>
+      <p:sp>
+        <p:nvSpPr>
+          <p:cNvPr id="17" name="TextBox 16"/>
+          <p:cNvSpPr txBox="1"/>
+          <p:nvPr/>
+        </p:nvSpPr>
+        <p:spPr>
+          <a:xfrm>
+            <a:off x="8988552" y="6419088"/>
+            <a:ext cx="2697480" cy="365760"/>
+          </a:xfrm>
+          <a:prstGeom prst="rect">
+            <a:avLst/>
+          </a:prstGeom>
+          <a:noFill/>
+        </p:spPr>
+        <p:txBody>
+          <a:bodyPr wrap="square" anchor="ctr" lIns="0" rIns="0" tIns="0" bIns="0">
+            <a:spAutoFit/>
+          </a:bodyPr>
+          <a:lstStyle/>
+          <a:p>
+            <a:pPr algn="r">
+              <a:lnSpc>
+                <a:spcPct val="100000"/>
+              </a:lnSpc>
+              <a:spcBef>
+                <a:spcPts val="0"/>
+              </a:spcBef>
+              <a:spcAft>
+                <a:spcPts val="600"/>
+              </a:spcAft>
+            </a:pPr>
+            <a:r>
+              <a:rPr sz="900" b="1">
+                <a:solidFill>
+                  <a:srgbClr val="0EA5E9"/>
+                </a:solidFill>
+                <a:latin typeface="NanumGothic"/>
+                <a:ea typeface="NanumGothic"/>
+                <a:cs typeface="NanumGothic"/>
+              </a:rPr>
+              <a:t>Day 2 · 화</a:t>
+            </a:r>
+            <a:r>
+              <a:rPr sz="900" b="1">
+                <a:solidFill>
+                  <a:srgbClr val="64748B"/>
+                </a:solidFill>
+                <a:latin typeface="NanumGothic"/>
+                <a:ea typeface="NanumGothic"/>
+                <a:cs typeface="NanumGothic"/>
+              </a:rPr>
+              <a:t>   ·   32 / 43</a:t>
             </a:r>
           </a:p>
         </p:txBody>
@@ -28671,54 +29051,7 @@
       </p:sp>
       <p:sp>
         <p:nvSpPr>
-          <p:cNvPr id="8" name="TextBox 7"/>
-          <p:cNvSpPr txBox="1"/>
-          <p:nvPr/>
-        </p:nvSpPr>
-        <p:spPr>
-          <a:xfrm>
-            <a:off x="10241280" y="6419088"/>
-            <a:ext cx="1463040" cy="365760"/>
-          </a:xfrm>
-          <a:prstGeom prst="rect">
-            <a:avLst/>
-          </a:prstGeom>
-          <a:noFill/>
-        </p:spPr>
-        <p:txBody>
-          <a:bodyPr wrap="square" anchor="ctr" lIns="0" rIns="0" tIns="0" bIns="0">
-            <a:spAutoFit/>
-          </a:bodyPr>
-          <a:lstStyle/>
-          <a:p>
-            <a:pPr algn="r">
-              <a:lnSpc>
-                <a:spcPct val="100000"/>
-              </a:lnSpc>
-              <a:spcBef>
-                <a:spcPts val="0"/>
-              </a:spcBef>
-              <a:spcAft>
-                <a:spcPts val="600"/>
-              </a:spcAft>
-            </a:pPr>
-            <a:r>
-              <a:rPr sz="900" b="1">
-                <a:solidFill>
-                  <a:srgbClr val="0EA5E9"/>
-                </a:solidFill>
-                <a:latin typeface="NanumGothic"/>
-                <a:ea typeface="NanumGothic"/>
-                <a:cs typeface="NanumGothic"/>
-              </a:rPr>
-              <a:t>Day 2 · 화</a:t>
-            </a:r>
-          </a:p>
-        </p:txBody>
-      </p:sp>
-      <p:sp>
-        <p:nvSpPr>
-          <p:cNvPr id="9" name="Rounded Rectangle 8"/>
+          <p:cNvPr id="8" name="Rounded Rectangle 7"/>
           <p:cNvSpPr/>
           <p:nvPr/>
         </p:nvSpPr>
@@ -28764,7 +29097,7 @@
       </p:sp>
       <p:sp>
         <p:nvSpPr>
-          <p:cNvPr id="10" name="TextBox 9"/>
+          <p:cNvPr id="9" name="TextBox 8"/>
           <p:cNvSpPr txBox="1"/>
           <p:nvPr/>
         </p:nvSpPr>
@@ -28811,7 +29144,7 @@
       </p:sp>
       <p:sp>
         <p:nvSpPr>
-          <p:cNvPr id="11" name="Oval 10"/>
+          <p:cNvPr id="10" name="Oval 9"/>
           <p:cNvSpPr/>
           <p:nvPr/>
         </p:nvSpPr>
@@ -28855,7 +29188,7 @@
       </p:sp>
       <p:sp>
         <p:nvSpPr>
-          <p:cNvPr id="12" name="TextBox 11"/>
+          <p:cNvPr id="11" name="TextBox 10"/>
           <p:cNvSpPr txBox="1"/>
           <p:nvPr/>
         </p:nvSpPr>
@@ -28902,7 +29235,7 @@
       </p:sp>
       <p:sp>
         <p:nvSpPr>
-          <p:cNvPr id="13" name="TextBox 12"/>
+          <p:cNvPr id="12" name="TextBox 11"/>
           <p:cNvSpPr txBox="1"/>
           <p:nvPr/>
         </p:nvSpPr>
@@ -28949,7 +29282,7 @@
       </p:sp>
       <p:sp>
         <p:nvSpPr>
-          <p:cNvPr id="14" name="Oval 13"/>
+          <p:cNvPr id="13" name="Oval 12"/>
           <p:cNvSpPr/>
           <p:nvPr/>
         </p:nvSpPr>
@@ -28993,7 +29326,7 @@
       </p:sp>
       <p:sp>
         <p:nvSpPr>
-          <p:cNvPr id="15" name="TextBox 14"/>
+          <p:cNvPr id="14" name="TextBox 13"/>
           <p:cNvSpPr txBox="1"/>
           <p:nvPr/>
         </p:nvSpPr>
@@ -29040,7 +29373,7 @@
       </p:sp>
       <p:sp>
         <p:nvSpPr>
-          <p:cNvPr id="16" name="TextBox 15"/>
+          <p:cNvPr id="15" name="TextBox 14"/>
           <p:cNvSpPr txBox="1"/>
           <p:nvPr/>
         </p:nvSpPr>
@@ -29087,7 +29420,7 @@
       </p:sp>
       <p:sp>
         <p:nvSpPr>
-          <p:cNvPr id="17" name="Oval 16"/>
+          <p:cNvPr id="16" name="Oval 15"/>
           <p:cNvSpPr/>
           <p:nvPr/>
         </p:nvSpPr>
@@ -29131,7 +29464,7 @@
       </p:sp>
       <p:sp>
         <p:nvSpPr>
-          <p:cNvPr id="18" name="TextBox 17"/>
+          <p:cNvPr id="17" name="TextBox 16"/>
           <p:cNvSpPr txBox="1"/>
           <p:nvPr/>
         </p:nvSpPr>
@@ -29178,7 +29511,7 @@
       </p:sp>
       <p:sp>
         <p:nvSpPr>
-          <p:cNvPr id="19" name="TextBox 18"/>
+          <p:cNvPr id="18" name="TextBox 17"/>
           <p:cNvSpPr txBox="1"/>
           <p:nvPr/>
         </p:nvSpPr>
@@ -29225,7 +29558,7 @@
       </p:sp>
       <p:sp>
         <p:nvSpPr>
-          <p:cNvPr id="20" name="Oval 19"/>
+          <p:cNvPr id="19" name="Oval 18"/>
           <p:cNvSpPr/>
           <p:nvPr/>
         </p:nvSpPr>
@@ -29269,7 +29602,7 @@
       </p:sp>
       <p:sp>
         <p:nvSpPr>
-          <p:cNvPr id="21" name="TextBox 20"/>
+          <p:cNvPr id="20" name="TextBox 19"/>
           <p:cNvSpPr txBox="1"/>
           <p:nvPr/>
         </p:nvSpPr>
@@ -29316,7 +29649,7 @@
       </p:sp>
       <p:sp>
         <p:nvSpPr>
-          <p:cNvPr id="22" name="TextBox 21"/>
+          <p:cNvPr id="21" name="TextBox 20"/>
           <p:cNvSpPr txBox="1"/>
           <p:nvPr/>
         </p:nvSpPr>
@@ -29363,7 +29696,7 @@
       </p:sp>
       <p:sp>
         <p:nvSpPr>
-          <p:cNvPr id="23" name="Rounded Rectangle 22"/>
+          <p:cNvPr id="22" name="Rounded Rectangle 21"/>
           <p:cNvSpPr/>
           <p:nvPr/>
         </p:nvSpPr>
@@ -29407,7 +29740,7 @@
       </p:sp>
       <p:sp>
         <p:nvSpPr>
-          <p:cNvPr id="24" name="TextBox 23"/>
+          <p:cNvPr id="23" name="TextBox 22"/>
           <p:cNvSpPr txBox="1"/>
           <p:nvPr/>
         </p:nvSpPr>
@@ -29454,7 +29787,7 @@
       </p:sp>
       <p:sp>
         <p:nvSpPr>
-          <p:cNvPr id="25" name="TextBox 24"/>
+          <p:cNvPr id="24" name="TextBox 23"/>
           <p:cNvSpPr txBox="1"/>
           <p:nvPr/>
         </p:nvSpPr>
@@ -29497,6 +29830,64 @@
               <a:t>Python + Claude Code 실행·로그인 완료
 문제 시 진단: claude doctor
 (설치 완료 화면 캡처 삽입)</a:t>
+            </a:r>
+          </a:p>
+        </p:txBody>
+      </p:sp>
+      <p:sp>
+        <p:nvSpPr>
+          <p:cNvPr id="25" name="TextBox 24"/>
+          <p:cNvSpPr txBox="1"/>
+          <p:nvPr/>
+        </p:nvSpPr>
+        <p:spPr>
+          <a:xfrm>
+            <a:off x="8988552" y="6419088"/>
+            <a:ext cx="2697480" cy="365760"/>
+          </a:xfrm>
+          <a:prstGeom prst="rect">
+            <a:avLst/>
+          </a:prstGeom>
+          <a:noFill/>
+        </p:spPr>
+        <p:txBody>
+          <a:bodyPr wrap="square" anchor="ctr" lIns="0" rIns="0" tIns="0" bIns="0">
+            <a:spAutoFit/>
+          </a:bodyPr>
+          <a:lstStyle/>
+          <a:p>
+            <a:pPr algn="r">
+              <a:lnSpc>
+                <a:spcPct val="100000"/>
+              </a:lnSpc>
+              <a:spcBef>
+                <a:spcPts val="0"/>
+              </a:spcBef>
+              <a:spcAft>
+                <a:spcPts val="600"/>
+              </a:spcAft>
+            </a:pPr>
+            <a:r>
+              <a:rPr sz="900" b="1">
+                <a:solidFill>
+                  <a:srgbClr val="0EA5E9"/>
+                </a:solidFill>
+                <a:latin typeface="NanumGothic"/>
+                <a:ea typeface="NanumGothic"/>
+                <a:cs typeface="NanumGothic"/>
+              </a:rPr>
+              <a:t>Day 2 · 화</a:t>
+            </a:r>
+            <a:r>
+              <a:rPr sz="900" b="1">
+                <a:solidFill>
+                  <a:srgbClr val="64748B"/>
+                </a:solidFill>
+                <a:latin typeface="NanumGothic"/>
+                <a:ea typeface="NanumGothic"/>
+                <a:cs typeface="NanumGothic"/>
+              </a:rPr>
+              <a:t>   ·   33 / 43</a:t>
             </a:r>
           </a:p>
         </p:txBody>
@@ -29803,6 +30194,64 @@
           </a:p>
         </p:txBody>
       </p:sp>
+      <p:sp>
+        <p:nvSpPr>
+          <p:cNvPr id="8" name="TextBox 7"/>
+          <p:cNvSpPr txBox="1"/>
+          <p:nvPr/>
+        </p:nvSpPr>
+        <p:spPr>
+          <a:xfrm>
+            <a:off x="8988552" y="6419088"/>
+            <a:ext cx="2697480" cy="365760"/>
+          </a:xfrm>
+          <a:prstGeom prst="rect">
+            <a:avLst/>
+          </a:prstGeom>
+          <a:noFill/>
+        </p:spPr>
+        <p:txBody>
+          <a:bodyPr wrap="square" anchor="ctr" lIns="0" rIns="0" tIns="0" bIns="0">
+            <a:spAutoFit/>
+          </a:bodyPr>
+          <a:lstStyle/>
+          <a:p>
+            <a:pPr algn="r">
+              <a:lnSpc>
+                <a:spcPct val="100000"/>
+              </a:lnSpc>
+              <a:spcBef>
+                <a:spcPts val="0"/>
+              </a:spcBef>
+              <a:spcAft>
+                <a:spcPts val="600"/>
+              </a:spcAft>
+            </a:pPr>
+            <a:r>
+              <a:rPr sz="900" b="1">
+                <a:solidFill>
+                  <a:srgbClr val="0EA5E9"/>
+                </a:solidFill>
+                <a:latin typeface="NanumGothic"/>
+                <a:ea typeface="NanumGothic"/>
+                <a:cs typeface="NanumGothic"/>
+              </a:rPr>
+              <a:t>Day 2 · 화</a:t>
+            </a:r>
+            <a:r>
+              <a:rPr sz="900" b="1">
+                <a:solidFill>
+                  <a:srgbClr val="CBD5E1"/>
+                </a:solidFill>
+                <a:latin typeface="NanumGothic"/>
+                <a:ea typeface="NanumGothic"/>
+                <a:cs typeface="NanumGothic"/>
+              </a:rPr>
+              <a:t>   ·   34 / 43</a:t>
+            </a:r>
+          </a:p>
+        </p:txBody>
+      </p:sp>
     </p:spTree>
   </p:cSld>
   <p:clrMapOvr>
@@ -30096,54 +30545,7 @@
       </p:sp>
       <p:sp>
         <p:nvSpPr>
-          <p:cNvPr id="8" name="TextBox 7"/>
-          <p:cNvSpPr txBox="1"/>
-          <p:nvPr/>
-        </p:nvSpPr>
-        <p:spPr>
-          <a:xfrm>
-            <a:off x="10241280" y="6419088"/>
-            <a:ext cx="1463040" cy="365760"/>
-          </a:xfrm>
-          <a:prstGeom prst="rect">
-            <a:avLst/>
-          </a:prstGeom>
-          <a:noFill/>
-        </p:spPr>
-        <p:txBody>
-          <a:bodyPr wrap="square" anchor="ctr" lIns="0" rIns="0" tIns="0" bIns="0">
-            <a:spAutoFit/>
-          </a:bodyPr>
-          <a:lstStyle/>
-          <a:p>
-            <a:pPr algn="r">
-              <a:lnSpc>
-                <a:spcPct val="100000"/>
-              </a:lnSpc>
-              <a:spcBef>
-                <a:spcPts val="0"/>
-              </a:spcBef>
-              <a:spcAft>
-                <a:spcPts val="600"/>
-              </a:spcAft>
-            </a:pPr>
-            <a:r>
-              <a:rPr sz="900" b="1">
-                <a:solidFill>
-                  <a:srgbClr val="0EA5E9"/>
-                </a:solidFill>
-                <a:latin typeface="NanumGothic"/>
-                <a:ea typeface="NanumGothic"/>
-                <a:cs typeface="NanumGothic"/>
-              </a:rPr>
-              <a:t>Day 2 · 화</a:t>
-            </a:r>
-          </a:p>
-        </p:txBody>
-      </p:sp>
-      <p:sp>
-        <p:nvSpPr>
-          <p:cNvPr id="9" name="Rounded Rectangle 8"/>
+          <p:cNvPr id="8" name="Rounded Rectangle 7"/>
           <p:cNvSpPr/>
           <p:nvPr/>
         </p:nvSpPr>
@@ -30189,7 +30591,7 @@
       </p:sp>
       <p:sp>
         <p:nvSpPr>
-          <p:cNvPr id="10" name="TextBox 9"/>
+          <p:cNvPr id="9" name="TextBox 8"/>
           <p:cNvSpPr txBox="1"/>
           <p:nvPr/>
         </p:nvSpPr>
@@ -30236,7 +30638,7 @@
       </p:sp>
       <p:sp>
         <p:nvSpPr>
-          <p:cNvPr id="11" name="TextBox 10"/>
+          <p:cNvPr id="10" name="TextBox 9"/>
           <p:cNvSpPr txBox="1"/>
           <p:nvPr/>
         </p:nvSpPr>
@@ -30283,7 +30685,7 @@
       </p:sp>
       <p:sp>
         <p:nvSpPr>
-          <p:cNvPr id="12" name="Rounded Rectangle 11"/>
+          <p:cNvPr id="11" name="Rounded Rectangle 10"/>
           <p:cNvSpPr/>
           <p:nvPr/>
         </p:nvSpPr>
@@ -30329,7 +30731,7 @@
       </p:sp>
       <p:sp>
         <p:nvSpPr>
-          <p:cNvPr id="13" name="Oval 12"/>
+          <p:cNvPr id="12" name="Oval 11"/>
           <p:cNvSpPr/>
           <p:nvPr/>
         </p:nvSpPr>
@@ -30373,7 +30775,7 @@
       </p:sp>
       <p:sp>
         <p:nvSpPr>
-          <p:cNvPr id="14" name="TextBox 13"/>
+          <p:cNvPr id="13" name="TextBox 12"/>
           <p:cNvSpPr txBox="1"/>
           <p:nvPr/>
         </p:nvSpPr>
@@ -30420,7 +30822,7 @@
       </p:sp>
       <p:sp>
         <p:nvSpPr>
-          <p:cNvPr id="15" name="TextBox 14"/>
+          <p:cNvPr id="14" name="TextBox 13"/>
           <p:cNvSpPr txBox="1"/>
           <p:nvPr/>
         </p:nvSpPr>
@@ -30467,7 +30869,7 @@
       </p:sp>
       <p:sp>
         <p:nvSpPr>
-          <p:cNvPr id="16" name="Rounded Rectangle 15"/>
+          <p:cNvPr id="15" name="Rounded Rectangle 14"/>
           <p:cNvSpPr/>
           <p:nvPr/>
         </p:nvSpPr>
@@ -30513,7 +30915,7 @@
       </p:sp>
       <p:sp>
         <p:nvSpPr>
-          <p:cNvPr id="17" name="Oval 16"/>
+          <p:cNvPr id="16" name="Oval 15"/>
           <p:cNvSpPr/>
           <p:nvPr/>
         </p:nvSpPr>
@@ -30557,7 +30959,7 @@
       </p:sp>
       <p:sp>
         <p:nvSpPr>
-          <p:cNvPr id="18" name="TextBox 17"/>
+          <p:cNvPr id="17" name="TextBox 16"/>
           <p:cNvSpPr txBox="1"/>
           <p:nvPr/>
         </p:nvSpPr>
@@ -30604,7 +31006,7 @@
       </p:sp>
       <p:sp>
         <p:nvSpPr>
-          <p:cNvPr id="19" name="TextBox 18"/>
+          <p:cNvPr id="18" name="TextBox 17"/>
           <p:cNvSpPr txBox="1"/>
           <p:nvPr/>
         </p:nvSpPr>
@@ -30651,7 +31053,7 @@
       </p:sp>
       <p:sp>
         <p:nvSpPr>
-          <p:cNvPr id="20" name="Rounded Rectangle 19"/>
+          <p:cNvPr id="19" name="Rounded Rectangle 18"/>
           <p:cNvSpPr/>
           <p:nvPr/>
         </p:nvSpPr>
@@ -30697,7 +31099,7 @@
       </p:sp>
       <p:sp>
         <p:nvSpPr>
-          <p:cNvPr id="21" name="Oval 20"/>
+          <p:cNvPr id="20" name="Oval 19"/>
           <p:cNvSpPr/>
           <p:nvPr/>
         </p:nvSpPr>
@@ -30741,7 +31143,7 @@
       </p:sp>
       <p:sp>
         <p:nvSpPr>
-          <p:cNvPr id="22" name="TextBox 21"/>
+          <p:cNvPr id="21" name="TextBox 20"/>
           <p:cNvSpPr txBox="1"/>
           <p:nvPr/>
         </p:nvSpPr>
@@ -30788,7 +31190,7 @@
       </p:sp>
       <p:sp>
         <p:nvSpPr>
-          <p:cNvPr id="23" name="TextBox 22"/>
+          <p:cNvPr id="22" name="TextBox 21"/>
           <p:cNvSpPr txBox="1"/>
           <p:nvPr/>
         </p:nvSpPr>
@@ -30835,7 +31237,7 @@
       </p:sp>
       <p:sp>
         <p:nvSpPr>
-          <p:cNvPr id="24" name="Rounded Rectangle 23"/>
+          <p:cNvPr id="23" name="Rounded Rectangle 22"/>
           <p:cNvSpPr/>
           <p:nvPr/>
         </p:nvSpPr>
@@ -30881,7 +31283,7 @@
       </p:sp>
       <p:sp>
         <p:nvSpPr>
-          <p:cNvPr id="25" name="Oval 24"/>
+          <p:cNvPr id="24" name="Oval 23"/>
           <p:cNvSpPr/>
           <p:nvPr/>
         </p:nvSpPr>
@@ -30925,7 +31327,7 @@
       </p:sp>
       <p:sp>
         <p:nvSpPr>
-          <p:cNvPr id="26" name="TextBox 25"/>
+          <p:cNvPr id="25" name="TextBox 24"/>
           <p:cNvSpPr txBox="1"/>
           <p:nvPr/>
         </p:nvSpPr>
@@ -30972,7 +31374,7 @@
       </p:sp>
       <p:sp>
         <p:nvSpPr>
-          <p:cNvPr id="27" name="TextBox 26"/>
+          <p:cNvPr id="26" name="TextBox 25"/>
           <p:cNvSpPr txBox="1"/>
           <p:nvPr/>
         </p:nvSpPr>
@@ -31019,7 +31421,7 @@
       </p:sp>
       <p:sp>
         <p:nvSpPr>
-          <p:cNvPr id="28" name="Rounded Rectangle 27"/>
+          <p:cNvPr id="27" name="Rounded Rectangle 26"/>
           <p:cNvSpPr/>
           <p:nvPr/>
         </p:nvSpPr>
@@ -31065,7 +31467,7 @@
       </p:sp>
       <p:sp>
         <p:nvSpPr>
-          <p:cNvPr id="29" name="Oval 28"/>
+          <p:cNvPr id="28" name="Oval 27"/>
           <p:cNvSpPr/>
           <p:nvPr/>
         </p:nvSpPr>
@@ -31109,7 +31511,7 @@
       </p:sp>
       <p:sp>
         <p:nvSpPr>
-          <p:cNvPr id="30" name="TextBox 29"/>
+          <p:cNvPr id="29" name="TextBox 28"/>
           <p:cNvSpPr txBox="1"/>
           <p:nvPr/>
         </p:nvSpPr>
@@ -31156,7 +31558,7 @@
       </p:sp>
       <p:sp>
         <p:nvSpPr>
-          <p:cNvPr id="31" name="TextBox 30"/>
+          <p:cNvPr id="30" name="TextBox 29"/>
           <p:cNvSpPr txBox="1"/>
           <p:nvPr/>
         </p:nvSpPr>
@@ -31203,7 +31605,7 @@
       </p:sp>
       <p:sp>
         <p:nvSpPr>
-          <p:cNvPr id="32" name="Rounded Rectangle 31"/>
+          <p:cNvPr id="31" name="Rounded Rectangle 30"/>
           <p:cNvSpPr/>
           <p:nvPr/>
         </p:nvSpPr>
@@ -31249,7 +31651,7 @@
       </p:sp>
       <p:sp>
         <p:nvSpPr>
-          <p:cNvPr id="33" name="Oval 32"/>
+          <p:cNvPr id="32" name="Oval 31"/>
           <p:cNvSpPr/>
           <p:nvPr/>
         </p:nvSpPr>
@@ -31293,7 +31695,7 @@
       </p:sp>
       <p:sp>
         <p:nvSpPr>
-          <p:cNvPr id="34" name="TextBox 33"/>
+          <p:cNvPr id="33" name="TextBox 32"/>
           <p:cNvSpPr txBox="1"/>
           <p:nvPr/>
         </p:nvSpPr>
@@ -31340,7 +31742,7 @@
       </p:sp>
       <p:sp>
         <p:nvSpPr>
-          <p:cNvPr id="35" name="TextBox 34"/>
+          <p:cNvPr id="34" name="TextBox 33"/>
           <p:cNvSpPr txBox="1"/>
           <p:nvPr/>
         </p:nvSpPr>
@@ -31381,6 +31783,64 @@
                 <a:cs typeface="NanumGothic"/>
               </a:rPr>
               <a:t>설치 &amp; 샘플 실습</a:t>
+            </a:r>
+          </a:p>
+        </p:txBody>
+      </p:sp>
+      <p:sp>
+        <p:nvSpPr>
+          <p:cNvPr id="35" name="TextBox 34"/>
+          <p:cNvSpPr txBox="1"/>
+          <p:nvPr/>
+        </p:nvSpPr>
+        <p:spPr>
+          <a:xfrm>
+            <a:off x="8988552" y="6419088"/>
+            <a:ext cx="2697480" cy="365760"/>
+          </a:xfrm>
+          <a:prstGeom prst="rect">
+            <a:avLst/>
+          </a:prstGeom>
+          <a:noFill/>
+        </p:spPr>
+        <p:txBody>
+          <a:bodyPr wrap="square" anchor="ctr" lIns="0" rIns="0" tIns="0" bIns="0">
+            <a:spAutoFit/>
+          </a:bodyPr>
+          <a:lstStyle/>
+          <a:p>
+            <a:pPr algn="r">
+              <a:lnSpc>
+                <a:spcPct val="100000"/>
+              </a:lnSpc>
+              <a:spcBef>
+                <a:spcPts val="0"/>
+              </a:spcBef>
+              <a:spcAft>
+                <a:spcPts val="600"/>
+              </a:spcAft>
+            </a:pPr>
+            <a:r>
+              <a:rPr sz="900" b="1">
+                <a:solidFill>
+                  <a:srgbClr val="0EA5E9"/>
+                </a:solidFill>
+                <a:latin typeface="NanumGothic"/>
+                <a:ea typeface="NanumGothic"/>
+                <a:cs typeface="NanumGothic"/>
+              </a:rPr>
+              <a:t>Day 2 · 화</a:t>
+            </a:r>
+            <a:r>
+              <a:rPr sz="900" b="1">
+                <a:solidFill>
+                  <a:srgbClr val="64748B"/>
+                </a:solidFill>
+                <a:latin typeface="NanumGothic"/>
+                <a:ea typeface="NanumGothic"/>
+                <a:cs typeface="NanumGothic"/>
+              </a:rPr>
+              <a:t>   ·   35 / 43</a:t>
             </a:r>
           </a:p>
         </p:txBody>
@@ -31678,54 +32138,7 @@
       </p:sp>
       <p:sp>
         <p:nvSpPr>
-          <p:cNvPr id="8" name="TextBox 7"/>
-          <p:cNvSpPr txBox="1"/>
-          <p:nvPr/>
-        </p:nvSpPr>
-        <p:spPr>
-          <a:xfrm>
-            <a:off x="10241280" y="6419088"/>
-            <a:ext cx="1463040" cy="365760"/>
-          </a:xfrm>
-          <a:prstGeom prst="rect">
-            <a:avLst/>
-          </a:prstGeom>
-          <a:noFill/>
-        </p:spPr>
-        <p:txBody>
-          <a:bodyPr wrap="square" anchor="ctr" lIns="0" rIns="0" tIns="0" bIns="0">
-            <a:spAutoFit/>
-          </a:bodyPr>
-          <a:lstStyle/>
-          <a:p>
-            <a:pPr algn="r">
-              <a:lnSpc>
-                <a:spcPct val="100000"/>
-              </a:lnSpc>
-              <a:spcBef>
-                <a:spcPts val="0"/>
-              </a:spcBef>
-              <a:spcAft>
-                <a:spcPts val="600"/>
-              </a:spcAft>
-            </a:pPr>
-            <a:r>
-              <a:rPr sz="900" b="1">
-                <a:solidFill>
-                  <a:srgbClr val="0EA5E9"/>
-                </a:solidFill>
-                <a:latin typeface="NanumGothic"/>
-                <a:ea typeface="NanumGothic"/>
-                <a:cs typeface="NanumGothic"/>
-              </a:rPr>
-              <a:t>Day 2 · 화</a:t>
-            </a:r>
-          </a:p>
-        </p:txBody>
-      </p:sp>
-      <p:sp>
-        <p:nvSpPr>
-          <p:cNvPr id="9" name="Rounded Rectangle 8"/>
+          <p:cNvPr id="8" name="Rounded Rectangle 7"/>
           <p:cNvSpPr/>
           <p:nvPr/>
         </p:nvSpPr>
@@ -31771,7 +32184,7 @@
       </p:sp>
       <p:sp>
         <p:nvSpPr>
-          <p:cNvPr id="10" name="Rounded Rectangle 9"/>
+          <p:cNvPr id="9" name="Rounded Rectangle 8"/>
           <p:cNvSpPr/>
           <p:nvPr/>
         </p:nvSpPr>
@@ -31815,7 +32228,7 @@
       </p:sp>
       <p:sp>
         <p:nvSpPr>
-          <p:cNvPr id="11" name="TextBox 10"/>
+          <p:cNvPr id="10" name="TextBox 9"/>
           <p:cNvSpPr txBox="1"/>
           <p:nvPr/>
         </p:nvSpPr>
@@ -31862,7 +32275,7 @@
       </p:sp>
       <p:sp>
         <p:nvSpPr>
-          <p:cNvPr id="12" name="TextBox 11"/>
+          <p:cNvPr id="11" name="TextBox 10"/>
           <p:cNvSpPr txBox="1"/>
           <p:nvPr/>
         </p:nvSpPr>
@@ -31920,7 +32333,7 @@
       </p:sp>
       <p:sp>
         <p:nvSpPr>
-          <p:cNvPr id="13" name="TextBox 12"/>
+          <p:cNvPr id="12" name="TextBox 11"/>
           <p:cNvSpPr txBox="1"/>
           <p:nvPr/>
         </p:nvSpPr>
@@ -31978,7 +32391,7 @@
       </p:sp>
       <p:sp>
         <p:nvSpPr>
-          <p:cNvPr id="14" name="TextBox 13"/>
+          <p:cNvPr id="13" name="TextBox 12"/>
           <p:cNvSpPr txBox="1"/>
           <p:nvPr/>
         </p:nvSpPr>
@@ -32036,7 +32449,7 @@
       </p:sp>
       <p:sp>
         <p:nvSpPr>
-          <p:cNvPr id="15" name="TextBox 14"/>
+          <p:cNvPr id="14" name="TextBox 13"/>
           <p:cNvSpPr txBox="1"/>
           <p:nvPr/>
         </p:nvSpPr>
@@ -32094,7 +32507,7 @@
       </p:sp>
       <p:sp>
         <p:nvSpPr>
-          <p:cNvPr id="16" name="Rounded Rectangle 15"/>
+          <p:cNvPr id="15" name="Rounded Rectangle 14"/>
           <p:cNvSpPr/>
           <p:nvPr/>
         </p:nvSpPr>
@@ -32140,7 +32553,7 @@
       </p:sp>
       <p:sp>
         <p:nvSpPr>
-          <p:cNvPr id="17" name="Rounded Rectangle 16"/>
+          <p:cNvPr id="16" name="Rounded Rectangle 15"/>
           <p:cNvSpPr/>
           <p:nvPr/>
         </p:nvSpPr>
@@ -32184,7 +32597,7 @@
       </p:sp>
       <p:sp>
         <p:nvSpPr>
-          <p:cNvPr id="18" name="TextBox 17"/>
+          <p:cNvPr id="17" name="TextBox 16"/>
           <p:cNvSpPr txBox="1"/>
           <p:nvPr/>
         </p:nvSpPr>
@@ -32231,7 +32644,7 @@
       </p:sp>
       <p:sp>
         <p:nvSpPr>
-          <p:cNvPr id="19" name="TextBox 18"/>
+          <p:cNvPr id="18" name="TextBox 17"/>
           <p:cNvSpPr txBox="1"/>
           <p:nvPr/>
         </p:nvSpPr>
@@ -32289,7 +32702,7 @@
       </p:sp>
       <p:sp>
         <p:nvSpPr>
-          <p:cNvPr id="20" name="TextBox 19"/>
+          <p:cNvPr id="19" name="TextBox 18"/>
           <p:cNvSpPr txBox="1"/>
           <p:nvPr/>
         </p:nvSpPr>
@@ -32347,7 +32760,7 @@
       </p:sp>
       <p:sp>
         <p:nvSpPr>
-          <p:cNvPr id="21" name="TextBox 20"/>
+          <p:cNvPr id="20" name="TextBox 19"/>
           <p:cNvSpPr txBox="1"/>
           <p:nvPr/>
         </p:nvSpPr>
@@ -32405,7 +32818,7 @@
       </p:sp>
       <p:sp>
         <p:nvSpPr>
-          <p:cNvPr id="22" name="TextBox 21"/>
+          <p:cNvPr id="21" name="TextBox 20"/>
           <p:cNvSpPr txBox="1"/>
           <p:nvPr/>
         </p:nvSpPr>
@@ -32457,6 +32870,64 @@
                 <a:cs typeface="NanumGothic"/>
               </a:rPr>
               <a:t>/autopilot · /team 등</a:t>
+            </a:r>
+          </a:p>
+        </p:txBody>
+      </p:sp>
+      <p:sp>
+        <p:nvSpPr>
+          <p:cNvPr id="22" name="TextBox 21"/>
+          <p:cNvSpPr txBox="1"/>
+          <p:nvPr/>
+        </p:nvSpPr>
+        <p:spPr>
+          <a:xfrm>
+            <a:off x="8988552" y="6419088"/>
+            <a:ext cx="2697480" cy="365760"/>
+          </a:xfrm>
+          <a:prstGeom prst="rect">
+            <a:avLst/>
+          </a:prstGeom>
+          <a:noFill/>
+        </p:spPr>
+        <p:txBody>
+          <a:bodyPr wrap="square" anchor="ctr" lIns="0" rIns="0" tIns="0" bIns="0">
+            <a:spAutoFit/>
+          </a:bodyPr>
+          <a:lstStyle/>
+          <a:p>
+            <a:pPr algn="r">
+              <a:lnSpc>
+                <a:spcPct val="100000"/>
+              </a:lnSpc>
+              <a:spcBef>
+                <a:spcPts val="0"/>
+              </a:spcBef>
+              <a:spcAft>
+                <a:spcPts val="600"/>
+              </a:spcAft>
+            </a:pPr>
+            <a:r>
+              <a:rPr sz="900" b="1">
+                <a:solidFill>
+                  <a:srgbClr val="0EA5E9"/>
+                </a:solidFill>
+                <a:latin typeface="NanumGothic"/>
+                <a:ea typeface="NanumGothic"/>
+                <a:cs typeface="NanumGothic"/>
+              </a:rPr>
+              <a:t>Day 2 · 화</a:t>
+            </a:r>
+            <a:r>
+              <a:rPr sz="900" b="1">
+                <a:solidFill>
+                  <a:srgbClr val="64748B"/>
+                </a:solidFill>
+                <a:latin typeface="NanumGothic"/>
+                <a:ea typeface="NanumGothic"/>
+                <a:cs typeface="NanumGothic"/>
+              </a:rPr>
+              <a:t>   ·   36 / 43</a:t>
             </a:r>
           </a:p>
         </p:txBody>
@@ -32754,54 +33225,7 @@
       </p:sp>
       <p:sp>
         <p:nvSpPr>
-          <p:cNvPr id="8" name="TextBox 7"/>
-          <p:cNvSpPr txBox="1"/>
-          <p:nvPr/>
-        </p:nvSpPr>
-        <p:spPr>
-          <a:xfrm>
-            <a:off x="10241280" y="6419088"/>
-            <a:ext cx="1463040" cy="365760"/>
-          </a:xfrm>
-          <a:prstGeom prst="rect">
-            <a:avLst/>
-          </a:prstGeom>
-          <a:noFill/>
-        </p:spPr>
-        <p:txBody>
-          <a:bodyPr wrap="square" anchor="ctr" lIns="0" rIns="0" tIns="0" bIns="0">
-            <a:spAutoFit/>
-          </a:bodyPr>
-          <a:lstStyle/>
-          <a:p>
-            <a:pPr algn="r">
-              <a:lnSpc>
-                <a:spcPct val="100000"/>
-              </a:lnSpc>
-              <a:spcBef>
-                <a:spcPts val="0"/>
-              </a:spcBef>
-              <a:spcAft>
-                <a:spcPts val="600"/>
-              </a:spcAft>
-            </a:pPr>
-            <a:r>
-              <a:rPr sz="900" b="1">
-                <a:solidFill>
-                  <a:srgbClr val="0EA5E9"/>
-                </a:solidFill>
-                <a:latin typeface="NanumGothic"/>
-                <a:ea typeface="NanumGothic"/>
-                <a:cs typeface="NanumGothic"/>
-              </a:rPr>
-              <a:t>Day 2 · 화</a:t>
-            </a:r>
-          </a:p>
-        </p:txBody>
-      </p:sp>
-      <p:sp>
-        <p:nvSpPr>
-          <p:cNvPr id="9" name="Oval 8"/>
+          <p:cNvPr id="8" name="Oval 7"/>
           <p:cNvSpPr/>
           <p:nvPr/>
         </p:nvSpPr>
@@ -32845,7 +33269,7 @@
       </p:sp>
       <p:sp>
         <p:nvSpPr>
-          <p:cNvPr id="10" name="TextBox 9"/>
+          <p:cNvPr id="9" name="TextBox 8"/>
           <p:cNvSpPr txBox="1"/>
           <p:nvPr/>
         </p:nvSpPr>
@@ -32892,7 +33316,7 @@
       </p:sp>
       <p:sp>
         <p:nvSpPr>
-          <p:cNvPr id="11" name="TextBox 10"/>
+          <p:cNvPr id="10" name="TextBox 9"/>
           <p:cNvSpPr txBox="1"/>
           <p:nvPr/>
         </p:nvSpPr>
@@ -32939,7 +33363,7 @@
       </p:sp>
       <p:sp>
         <p:nvSpPr>
-          <p:cNvPr id="12" name="Oval 11"/>
+          <p:cNvPr id="11" name="Oval 10"/>
           <p:cNvSpPr/>
           <p:nvPr/>
         </p:nvSpPr>
@@ -32983,7 +33407,7 @@
       </p:sp>
       <p:sp>
         <p:nvSpPr>
-          <p:cNvPr id="13" name="TextBox 12"/>
+          <p:cNvPr id="12" name="TextBox 11"/>
           <p:cNvSpPr txBox="1"/>
           <p:nvPr/>
         </p:nvSpPr>
@@ -33030,7 +33454,7 @@
       </p:sp>
       <p:sp>
         <p:nvSpPr>
-          <p:cNvPr id="14" name="TextBox 13"/>
+          <p:cNvPr id="13" name="TextBox 12"/>
           <p:cNvSpPr txBox="1"/>
           <p:nvPr/>
         </p:nvSpPr>
@@ -33077,7 +33501,7 @@
       </p:sp>
       <p:sp>
         <p:nvSpPr>
-          <p:cNvPr id="15" name="Oval 14"/>
+          <p:cNvPr id="14" name="Oval 13"/>
           <p:cNvSpPr/>
           <p:nvPr/>
         </p:nvSpPr>
@@ -33121,7 +33545,7 @@
       </p:sp>
       <p:sp>
         <p:nvSpPr>
-          <p:cNvPr id="16" name="TextBox 15"/>
+          <p:cNvPr id="15" name="TextBox 14"/>
           <p:cNvSpPr txBox="1"/>
           <p:nvPr/>
         </p:nvSpPr>
@@ -33168,7 +33592,7 @@
       </p:sp>
       <p:sp>
         <p:nvSpPr>
-          <p:cNvPr id="17" name="TextBox 16"/>
+          <p:cNvPr id="16" name="TextBox 15"/>
           <p:cNvSpPr txBox="1"/>
           <p:nvPr/>
         </p:nvSpPr>
@@ -33209,6 +33633,64 @@
                 <a:cs typeface="NanumGothic"/>
               </a:rPr>
               <a:t>/model 로 모델 변경 · /config · /help · /clear</a:t>
+            </a:r>
+          </a:p>
+        </p:txBody>
+      </p:sp>
+      <p:sp>
+        <p:nvSpPr>
+          <p:cNvPr id="17" name="TextBox 16"/>
+          <p:cNvSpPr txBox="1"/>
+          <p:nvPr/>
+        </p:nvSpPr>
+        <p:spPr>
+          <a:xfrm>
+            <a:off x="8988552" y="6419088"/>
+            <a:ext cx="2697480" cy="365760"/>
+          </a:xfrm>
+          <a:prstGeom prst="rect">
+            <a:avLst/>
+          </a:prstGeom>
+          <a:noFill/>
+        </p:spPr>
+        <p:txBody>
+          <a:bodyPr wrap="square" anchor="ctr" lIns="0" rIns="0" tIns="0" bIns="0">
+            <a:spAutoFit/>
+          </a:bodyPr>
+          <a:lstStyle/>
+          <a:p>
+            <a:pPr algn="r">
+              <a:lnSpc>
+                <a:spcPct val="100000"/>
+              </a:lnSpc>
+              <a:spcBef>
+                <a:spcPts val="0"/>
+              </a:spcBef>
+              <a:spcAft>
+                <a:spcPts val="600"/>
+              </a:spcAft>
+            </a:pPr>
+            <a:r>
+              <a:rPr sz="900" b="1">
+                <a:solidFill>
+                  <a:srgbClr val="0EA5E9"/>
+                </a:solidFill>
+                <a:latin typeface="NanumGothic"/>
+                <a:ea typeface="NanumGothic"/>
+                <a:cs typeface="NanumGothic"/>
+              </a:rPr>
+              <a:t>Day 2 · 화</a:t>
+            </a:r>
+            <a:r>
+              <a:rPr sz="900" b="1">
+                <a:solidFill>
+                  <a:srgbClr val="64748B"/>
+                </a:solidFill>
+                <a:latin typeface="NanumGothic"/>
+                <a:ea typeface="NanumGothic"/>
+                <a:cs typeface="NanumGothic"/>
+              </a:rPr>
+              <a:t>   ·   37 / 43</a:t>
             </a:r>
           </a:p>
         </p:txBody>
@@ -33506,54 +33988,7 @@
       </p:sp>
       <p:sp>
         <p:nvSpPr>
-          <p:cNvPr id="8" name="TextBox 7"/>
-          <p:cNvSpPr txBox="1"/>
-          <p:nvPr/>
-        </p:nvSpPr>
-        <p:spPr>
-          <a:xfrm>
-            <a:off x="10241280" y="6419088"/>
-            <a:ext cx="1463040" cy="365760"/>
-          </a:xfrm>
-          <a:prstGeom prst="rect">
-            <a:avLst/>
-          </a:prstGeom>
-          <a:noFill/>
-        </p:spPr>
-        <p:txBody>
-          <a:bodyPr wrap="square" anchor="ctr" lIns="0" rIns="0" tIns="0" bIns="0">
-            <a:spAutoFit/>
-          </a:bodyPr>
-          <a:lstStyle/>
-          <a:p>
-            <a:pPr algn="r">
-              <a:lnSpc>
-                <a:spcPct val="100000"/>
-              </a:lnSpc>
-              <a:spcBef>
-                <a:spcPts val="0"/>
-              </a:spcBef>
-              <a:spcAft>
-                <a:spcPts val="600"/>
-              </a:spcAft>
-            </a:pPr>
-            <a:r>
-              <a:rPr sz="900" b="1">
-                <a:solidFill>
-                  <a:srgbClr val="0EA5E9"/>
-                </a:solidFill>
-                <a:latin typeface="NanumGothic"/>
-                <a:ea typeface="NanumGothic"/>
-                <a:cs typeface="NanumGothic"/>
-              </a:rPr>
-              <a:t>Day 2 · 화</a:t>
-            </a:r>
-          </a:p>
-        </p:txBody>
-      </p:sp>
-      <p:sp>
-        <p:nvSpPr>
-          <p:cNvPr id="9" name="Oval 8"/>
+          <p:cNvPr id="8" name="Oval 7"/>
           <p:cNvSpPr/>
           <p:nvPr/>
         </p:nvSpPr>
@@ -33597,7 +34032,7 @@
       </p:sp>
       <p:sp>
         <p:nvSpPr>
-          <p:cNvPr id="10" name="TextBox 9"/>
+          <p:cNvPr id="9" name="TextBox 8"/>
           <p:cNvSpPr txBox="1"/>
           <p:nvPr/>
         </p:nvSpPr>
@@ -33644,7 +34079,7 @@
       </p:sp>
       <p:sp>
         <p:nvSpPr>
-          <p:cNvPr id="11" name="TextBox 10"/>
+          <p:cNvPr id="10" name="TextBox 9"/>
           <p:cNvSpPr txBox="1"/>
           <p:nvPr/>
         </p:nvSpPr>
@@ -33691,7 +34126,7 @@
       </p:sp>
       <p:sp>
         <p:nvSpPr>
-          <p:cNvPr id="12" name="Oval 11"/>
+          <p:cNvPr id="11" name="Oval 10"/>
           <p:cNvSpPr/>
           <p:nvPr/>
         </p:nvSpPr>
@@ -33735,7 +34170,7 @@
       </p:sp>
       <p:sp>
         <p:nvSpPr>
-          <p:cNvPr id="13" name="TextBox 12"/>
+          <p:cNvPr id="12" name="TextBox 11"/>
           <p:cNvSpPr txBox="1"/>
           <p:nvPr/>
         </p:nvSpPr>
@@ -33782,7 +34217,7 @@
       </p:sp>
       <p:sp>
         <p:nvSpPr>
-          <p:cNvPr id="14" name="TextBox 13"/>
+          <p:cNvPr id="13" name="TextBox 12"/>
           <p:cNvSpPr txBox="1"/>
           <p:nvPr/>
         </p:nvSpPr>
@@ -33829,7 +34264,7 @@
       </p:sp>
       <p:sp>
         <p:nvSpPr>
-          <p:cNvPr id="15" name="Oval 14"/>
+          <p:cNvPr id="14" name="Oval 13"/>
           <p:cNvSpPr/>
           <p:nvPr/>
         </p:nvSpPr>
@@ -33873,7 +34308,7 @@
       </p:sp>
       <p:sp>
         <p:nvSpPr>
-          <p:cNvPr id="16" name="TextBox 15"/>
+          <p:cNvPr id="15" name="TextBox 14"/>
           <p:cNvSpPr txBox="1"/>
           <p:nvPr/>
         </p:nvSpPr>
@@ -33920,7 +34355,7 @@
       </p:sp>
       <p:sp>
         <p:nvSpPr>
-          <p:cNvPr id="17" name="TextBox 16"/>
+          <p:cNvPr id="16" name="TextBox 15"/>
           <p:cNvSpPr txBox="1"/>
           <p:nvPr/>
         </p:nvSpPr>
@@ -33961,6 +34396,64 @@
                 <a:cs typeface="NanumGothic"/>
               </a:rPr>
               <a:t>프로젝트 루트 ./CLAUDE.md (전역은 ~/.claude/CLAUDE.md)</a:t>
+            </a:r>
+          </a:p>
+        </p:txBody>
+      </p:sp>
+      <p:sp>
+        <p:nvSpPr>
+          <p:cNvPr id="17" name="TextBox 16"/>
+          <p:cNvSpPr txBox="1"/>
+          <p:nvPr/>
+        </p:nvSpPr>
+        <p:spPr>
+          <a:xfrm>
+            <a:off x="8988552" y="6419088"/>
+            <a:ext cx="2697480" cy="365760"/>
+          </a:xfrm>
+          <a:prstGeom prst="rect">
+            <a:avLst/>
+          </a:prstGeom>
+          <a:noFill/>
+        </p:spPr>
+        <p:txBody>
+          <a:bodyPr wrap="square" anchor="ctr" lIns="0" rIns="0" tIns="0" bIns="0">
+            <a:spAutoFit/>
+          </a:bodyPr>
+          <a:lstStyle/>
+          <a:p>
+            <a:pPr algn="r">
+              <a:lnSpc>
+                <a:spcPct val="100000"/>
+              </a:lnSpc>
+              <a:spcBef>
+                <a:spcPts val="0"/>
+              </a:spcBef>
+              <a:spcAft>
+                <a:spcPts val="600"/>
+              </a:spcAft>
+            </a:pPr>
+            <a:r>
+              <a:rPr sz="900" b="1">
+                <a:solidFill>
+                  <a:srgbClr val="0EA5E9"/>
+                </a:solidFill>
+                <a:latin typeface="NanumGothic"/>
+                <a:ea typeface="NanumGothic"/>
+                <a:cs typeface="NanumGothic"/>
+              </a:rPr>
+              <a:t>Day 2 · 화</a:t>
+            </a:r>
+            <a:r>
+              <a:rPr sz="900" b="1">
+                <a:solidFill>
+                  <a:srgbClr val="64748B"/>
+                </a:solidFill>
+                <a:latin typeface="NanumGothic"/>
+                <a:ea typeface="NanumGothic"/>
+                <a:cs typeface="NanumGothic"/>
+              </a:rPr>
+              <a:t>   ·   38 / 43</a:t>
             </a:r>
           </a:p>
         </p:txBody>
@@ -34258,54 +34751,7 @@
       </p:sp>
       <p:sp>
         <p:nvSpPr>
-          <p:cNvPr id="8" name="TextBox 7"/>
-          <p:cNvSpPr txBox="1"/>
-          <p:nvPr/>
-        </p:nvSpPr>
-        <p:spPr>
-          <a:xfrm>
-            <a:off x="10241280" y="6419088"/>
-            <a:ext cx="1463040" cy="365760"/>
-          </a:xfrm>
-          <a:prstGeom prst="rect">
-            <a:avLst/>
-          </a:prstGeom>
-          <a:noFill/>
-        </p:spPr>
-        <p:txBody>
-          <a:bodyPr wrap="square" anchor="ctr" lIns="0" rIns="0" tIns="0" bIns="0">
-            <a:spAutoFit/>
-          </a:bodyPr>
-          <a:lstStyle/>
-          <a:p>
-            <a:pPr algn="r">
-              <a:lnSpc>
-                <a:spcPct val="100000"/>
-              </a:lnSpc>
-              <a:spcBef>
-                <a:spcPts val="0"/>
-              </a:spcBef>
-              <a:spcAft>
-                <a:spcPts val="600"/>
-              </a:spcAft>
-            </a:pPr>
-            <a:r>
-              <a:rPr sz="900" b="1">
-                <a:solidFill>
-                  <a:srgbClr val="0EA5E9"/>
-                </a:solidFill>
-                <a:latin typeface="NanumGothic"/>
-                <a:ea typeface="NanumGothic"/>
-                <a:cs typeface="NanumGothic"/>
-              </a:rPr>
-              <a:t>Day 2 · 화</a:t>
-            </a:r>
-          </a:p>
-        </p:txBody>
-      </p:sp>
-      <p:sp>
-        <p:nvSpPr>
-          <p:cNvPr id="9" name="Oval 8"/>
+          <p:cNvPr id="8" name="Oval 7"/>
           <p:cNvSpPr/>
           <p:nvPr/>
         </p:nvSpPr>
@@ -34349,7 +34795,7 @@
       </p:sp>
       <p:sp>
         <p:nvSpPr>
-          <p:cNvPr id="10" name="TextBox 9"/>
+          <p:cNvPr id="9" name="TextBox 8"/>
           <p:cNvSpPr txBox="1"/>
           <p:nvPr/>
         </p:nvSpPr>
@@ -34396,7 +34842,7 @@
       </p:sp>
       <p:sp>
         <p:nvSpPr>
-          <p:cNvPr id="11" name="TextBox 10"/>
+          <p:cNvPr id="10" name="TextBox 9"/>
           <p:cNvSpPr txBox="1"/>
           <p:nvPr/>
         </p:nvSpPr>
@@ -34443,7 +34889,7 @@
       </p:sp>
       <p:sp>
         <p:nvSpPr>
-          <p:cNvPr id="12" name="Oval 11"/>
+          <p:cNvPr id="11" name="Oval 10"/>
           <p:cNvSpPr/>
           <p:nvPr/>
         </p:nvSpPr>
@@ -34487,7 +34933,7 @@
       </p:sp>
       <p:sp>
         <p:nvSpPr>
-          <p:cNvPr id="13" name="TextBox 12"/>
+          <p:cNvPr id="12" name="TextBox 11"/>
           <p:cNvSpPr txBox="1"/>
           <p:nvPr/>
         </p:nvSpPr>
@@ -34534,7 +34980,7 @@
       </p:sp>
       <p:sp>
         <p:nvSpPr>
-          <p:cNvPr id="14" name="TextBox 13"/>
+          <p:cNvPr id="13" name="TextBox 12"/>
           <p:cNvSpPr txBox="1"/>
           <p:nvPr/>
         </p:nvSpPr>
@@ -34581,7 +35027,7 @@
       </p:sp>
       <p:sp>
         <p:nvSpPr>
-          <p:cNvPr id="15" name="Oval 14"/>
+          <p:cNvPr id="14" name="Oval 13"/>
           <p:cNvSpPr/>
           <p:nvPr/>
         </p:nvSpPr>
@@ -34625,7 +35071,7 @@
       </p:sp>
       <p:sp>
         <p:nvSpPr>
-          <p:cNvPr id="16" name="TextBox 15"/>
+          <p:cNvPr id="15" name="TextBox 14"/>
           <p:cNvSpPr txBox="1"/>
           <p:nvPr/>
         </p:nvSpPr>
@@ -34672,7 +35118,7 @@
       </p:sp>
       <p:sp>
         <p:nvSpPr>
-          <p:cNvPr id="17" name="TextBox 16"/>
+          <p:cNvPr id="16" name="TextBox 15"/>
           <p:cNvSpPr txBox="1"/>
           <p:nvPr/>
         </p:nvSpPr>
@@ -34719,7 +35165,7 @@
       </p:sp>
       <p:sp>
         <p:nvSpPr>
-          <p:cNvPr id="18" name="Rounded Rectangle 17"/>
+          <p:cNvPr id="17" name="Rounded Rectangle 16"/>
           <p:cNvSpPr/>
           <p:nvPr/>
         </p:nvSpPr>
@@ -34765,7 +35211,7 @@
       </p:sp>
       <p:sp>
         <p:nvSpPr>
-          <p:cNvPr id="19" name="TextBox 18"/>
+          <p:cNvPr id="18" name="TextBox 17"/>
           <p:cNvSpPr txBox="1"/>
           <p:nvPr/>
         </p:nvSpPr>
@@ -34817,6 +35263,64 @@
                 <a:cs typeface="NanumGothic"/>
               </a:rPr>
               <a:t>github.com/yeachan-heo/oh-my-claudecode</a:t>
+            </a:r>
+          </a:p>
+        </p:txBody>
+      </p:sp>
+      <p:sp>
+        <p:nvSpPr>
+          <p:cNvPr id="19" name="TextBox 18"/>
+          <p:cNvSpPr txBox="1"/>
+          <p:nvPr/>
+        </p:nvSpPr>
+        <p:spPr>
+          <a:xfrm>
+            <a:off x="8988552" y="6419088"/>
+            <a:ext cx="2697480" cy="365760"/>
+          </a:xfrm>
+          <a:prstGeom prst="rect">
+            <a:avLst/>
+          </a:prstGeom>
+          <a:noFill/>
+        </p:spPr>
+        <p:txBody>
+          <a:bodyPr wrap="square" anchor="ctr" lIns="0" rIns="0" tIns="0" bIns="0">
+            <a:spAutoFit/>
+          </a:bodyPr>
+          <a:lstStyle/>
+          <a:p>
+            <a:pPr algn="r">
+              <a:lnSpc>
+                <a:spcPct val="100000"/>
+              </a:lnSpc>
+              <a:spcBef>
+                <a:spcPts val="0"/>
+              </a:spcBef>
+              <a:spcAft>
+                <a:spcPts val="600"/>
+              </a:spcAft>
+            </a:pPr>
+            <a:r>
+              <a:rPr sz="900" b="1">
+                <a:solidFill>
+                  <a:srgbClr val="0EA5E9"/>
+                </a:solidFill>
+                <a:latin typeface="NanumGothic"/>
+                <a:ea typeface="NanumGothic"/>
+                <a:cs typeface="NanumGothic"/>
+              </a:rPr>
+              <a:t>Day 2 · 화</a:t>
+            </a:r>
+            <a:r>
+              <a:rPr sz="900" b="1">
+                <a:solidFill>
+                  <a:srgbClr val="64748B"/>
+                </a:solidFill>
+                <a:latin typeface="NanumGothic"/>
+                <a:ea typeface="NanumGothic"/>
+                <a:cs typeface="NanumGothic"/>
+              </a:rPr>
+              <a:t>   ·   39 / 43</a:t>
             </a:r>
           </a:p>
         </p:txBody>
@@ -35123,6 +35627,64 @@
           </a:p>
         </p:txBody>
       </p:sp>
+      <p:sp>
+        <p:nvSpPr>
+          <p:cNvPr id="8" name="TextBox 7"/>
+          <p:cNvSpPr txBox="1"/>
+          <p:nvPr/>
+        </p:nvSpPr>
+        <p:spPr>
+          <a:xfrm>
+            <a:off x="8988552" y="6419088"/>
+            <a:ext cx="2697480" cy="365760"/>
+          </a:xfrm>
+          <a:prstGeom prst="rect">
+            <a:avLst/>
+          </a:prstGeom>
+          <a:noFill/>
+        </p:spPr>
+        <p:txBody>
+          <a:bodyPr wrap="square" anchor="ctr" lIns="0" rIns="0" tIns="0" bIns="0">
+            <a:spAutoFit/>
+          </a:bodyPr>
+          <a:lstStyle/>
+          <a:p>
+            <a:pPr algn="r">
+              <a:lnSpc>
+                <a:spcPct val="100000"/>
+              </a:lnSpc>
+              <a:spcBef>
+                <a:spcPts val="0"/>
+              </a:spcBef>
+              <a:spcAft>
+                <a:spcPts val="600"/>
+              </a:spcAft>
+            </a:pPr>
+            <a:r>
+              <a:rPr sz="900" b="1">
+                <a:solidFill>
+                  <a:srgbClr val="0EA5E9"/>
+                </a:solidFill>
+                <a:latin typeface="NanumGothic"/>
+                <a:ea typeface="NanumGothic"/>
+                <a:cs typeface="NanumGothic"/>
+              </a:rPr>
+              <a:t>Day 2 · 화</a:t>
+            </a:r>
+            <a:r>
+              <a:rPr sz="900" b="1">
+                <a:solidFill>
+                  <a:srgbClr val="CBD5E1"/>
+                </a:solidFill>
+                <a:latin typeface="NanumGothic"/>
+                <a:ea typeface="NanumGothic"/>
+                <a:cs typeface="NanumGothic"/>
+              </a:rPr>
+              <a:t>   ·   4 / 43</a:t>
+            </a:r>
+          </a:p>
+        </p:txBody>
+      </p:sp>
     </p:spTree>
   </p:cSld>
   <p:clrMapOvr>
@@ -35416,54 +35978,7 @@
       </p:sp>
       <p:sp>
         <p:nvSpPr>
-          <p:cNvPr id="8" name="TextBox 7"/>
-          <p:cNvSpPr txBox="1"/>
-          <p:nvPr/>
-        </p:nvSpPr>
-        <p:spPr>
-          <a:xfrm>
-            <a:off x="10241280" y="6419088"/>
-            <a:ext cx="1463040" cy="365760"/>
-          </a:xfrm>
-          <a:prstGeom prst="rect">
-            <a:avLst/>
-          </a:prstGeom>
-          <a:noFill/>
-        </p:spPr>
-        <p:txBody>
-          <a:bodyPr wrap="square" anchor="ctr" lIns="0" rIns="0" tIns="0" bIns="0">
-            <a:spAutoFit/>
-          </a:bodyPr>
-          <a:lstStyle/>
-          <a:p>
-            <a:pPr algn="r">
-              <a:lnSpc>
-                <a:spcPct val="100000"/>
-              </a:lnSpc>
-              <a:spcBef>
-                <a:spcPts val="0"/>
-              </a:spcBef>
-              <a:spcAft>
-                <a:spcPts val="600"/>
-              </a:spcAft>
-            </a:pPr>
-            <a:r>
-              <a:rPr sz="900" b="1">
-                <a:solidFill>
-                  <a:srgbClr val="0EA5E9"/>
-                </a:solidFill>
-                <a:latin typeface="NanumGothic"/>
-                <a:ea typeface="NanumGothic"/>
-                <a:cs typeface="NanumGothic"/>
-              </a:rPr>
-              <a:t>Day 2 · 화</a:t>
-            </a:r>
-          </a:p>
-        </p:txBody>
-      </p:sp>
-      <p:sp>
-        <p:nvSpPr>
-          <p:cNvPr id="9" name="Oval 8"/>
+          <p:cNvPr id="8" name="Oval 7"/>
           <p:cNvSpPr/>
           <p:nvPr/>
         </p:nvSpPr>
@@ -35507,7 +36022,7 @@
       </p:sp>
       <p:sp>
         <p:nvSpPr>
-          <p:cNvPr id="10" name="TextBox 9"/>
+          <p:cNvPr id="9" name="TextBox 8"/>
           <p:cNvSpPr txBox="1"/>
           <p:nvPr/>
         </p:nvSpPr>
@@ -35554,7 +36069,7 @@
       </p:sp>
       <p:sp>
         <p:nvSpPr>
-          <p:cNvPr id="11" name="TextBox 10"/>
+          <p:cNvPr id="10" name="TextBox 9"/>
           <p:cNvSpPr txBox="1"/>
           <p:nvPr/>
         </p:nvSpPr>
@@ -35601,7 +36116,7 @@
       </p:sp>
       <p:sp>
         <p:nvSpPr>
-          <p:cNvPr id="12" name="Oval 11"/>
+          <p:cNvPr id="11" name="Oval 10"/>
           <p:cNvSpPr/>
           <p:nvPr/>
         </p:nvSpPr>
@@ -35645,7 +36160,7 @@
       </p:sp>
       <p:sp>
         <p:nvSpPr>
-          <p:cNvPr id="13" name="TextBox 12"/>
+          <p:cNvPr id="12" name="TextBox 11"/>
           <p:cNvSpPr txBox="1"/>
           <p:nvPr/>
         </p:nvSpPr>
@@ -35692,7 +36207,7 @@
       </p:sp>
       <p:sp>
         <p:nvSpPr>
-          <p:cNvPr id="14" name="TextBox 13"/>
+          <p:cNvPr id="13" name="TextBox 12"/>
           <p:cNvSpPr txBox="1"/>
           <p:nvPr/>
         </p:nvSpPr>
@@ -35739,7 +36254,7 @@
       </p:sp>
       <p:sp>
         <p:nvSpPr>
-          <p:cNvPr id="15" name="Oval 14"/>
+          <p:cNvPr id="14" name="Oval 13"/>
           <p:cNvSpPr/>
           <p:nvPr/>
         </p:nvSpPr>
@@ -35783,7 +36298,7 @@
       </p:sp>
       <p:sp>
         <p:nvSpPr>
-          <p:cNvPr id="16" name="TextBox 15"/>
+          <p:cNvPr id="15" name="TextBox 14"/>
           <p:cNvSpPr txBox="1"/>
           <p:nvPr/>
         </p:nvSpPr>
@@ -35830,7 +36345,7 @@
       </p:sp>
       <p:sp>
         <p:nvSpPr>
-          <p:cNvPr id="17" name="TextBox 16"/>
+          <p:cNvPr id="16" name="TextBox 15"/>
           <p:cNvSpPr txBox="1"/>
           <p:nvPr/>
         </p:nvSpPr>
@@ -35871,6 +36386,64 @@
                 <a:cs typeface="NanumGothic"/>
               </a:rPr>
               <a:t>team 기능엔 tmux 필요 (brew/apt install tmux)</a:t>
+            </a:r>
+          </a:p>
+        </p:txBody>
+      </p:sp>
+      <p:sp>
+        <p:nvSpPr>
+          <p:cNvPr id="17" name="TextBox 16"/>
+          <p:cNvSpPr txBox="1"/>
+          <p:nvPr/>
+        </p:nvSpPr>
+        <p:spPr>
+          <a:xfrm>
+            <a:off x="8988552" y="6419088"/>
+            <a:ext cx="2697480" cy="365760"/>
+          </a:xfrm>
+          <a:prstGeom prst="rect">
+            <a:avLst/>
+          </a:prstGeom>
+          <a:noFill/>
+        </p:spPr>
+        <p:txBody>
+          <a:bodyPr wrap="square" anchor="ctr" lIns="0" rIns="0" tIns="0" bIns="0">
+            <a:spAutoFit/>
+          </a:bodyPr>
+          <a:lstStyle/>
+          <a:p>
+            <a:pPr algn="r">
+              <a:lnSpc>
+                <a:spcPct val="100000"/>
+              </a:lnSpc>
+              <a:spcBef>
+                <a:spcPts val="0"/>
+              </a:spcBef>
+              <a:spcAft>
+                <a:spcPts val="600"/>
+              </a:spcAft>
+            </a:pPr>
+            <a:r>
+              <a:rPr sz="900" b="1">
+                <a:solidFill>
+                  <a:srgbClr val="0EA5E9"/>
+                </a:solidFill>
+                <a:latin typeface="NanumGothic"/>
+                <a:ea typeface="NanumGothic"/>
+                <a:cs typeface="NanumGothic"/>
+              </a:rPr>
+              <a:t>Day 2 · 화</a:t>
+            </a:r>
+            <a:r>
+              <a:rPr sz="900" b="1">
+                <a:solidFill>
+                  <a:srgbClr val="64748B"/>
+                </a:solidFill>
+                <a:latin typeface="NanumGothic"/>
+                <a:ea typeface="NanumGothic"/>
+                <a:cs typeface="NanumGothic"/>
+              </a:rPr>
+              <a:t>   ·   40 / 43</a:t>
             </a:r>
           </a:p>
         </p:txBody>
@@ -36168,54 +36741,7 @@
       </p:sp>
       <p:sp>
         <p:nvSpPr>
-          <p:cNvPr id="8" name="TextBox 7"/>
-          <p:cNvSpPr txBox="1"/>
-          <p:nvPr/>
-        </p:nvSpPr>
-        <p:spPr>
-          <a:xfrm>
-            <a:off x="10241280" y="6419088"/>
-            <a:ext cx="1463040" cy="365760"/>
-          </a:xfrm>
-          <a:prstGeom prst="rect">
-            <a:avLst/>
-          </a:prstGeom>
-          <a:noFill/>
-        </p:spPr>
-        <p:txBody>
-          <a:bodyPr wrap="square" anchor="ctr" lIns="0" rIns="0" tIns="0" bIns="0">
-            <a:spAutoFit/>
-          </a:bodyPr>
-          <a:lstStyle/>
-          <a:p>
-            <a:pPr algn="r">
-              <a:lnSpc>
-                <a:spcPct val="100000"/>
-              </a:lnSpc>
-              <a:spcBef>
-                <a:spcPts val="0"/>
-              </a:spcBef>
-              <a:spcAft>
-                <a:spcPts val="600"/>
-              </a:spcAft>
-            </a:pPr>
-            <a:r>
-              <a:rPr sz="900" b="1">
-                <a:solidFill>
-                  <a:srgbClr val="0EA5E9"/>
-                </a:solidFill>
-                <a:latin typeface="NanumGothic"/>
-                <a:ea typeface="NanumGothic"/>
-                <a:cs typeface="NanumGothic"/>
-              </a:rPr>
-              <a:t>Day 2 · 화</a:t>
-            </a:r>
-          </a:p>
-        </p:txBody>
-      </p:sp>
-      <p:sp>
-        <p:nvSpPr>
-          <p:cNvPr id="9" name="Oval 8"/>
+          <p:cNvPr id="8" name="Oval 7"/>
           <p:cNvSpPr/>
           <p:nvPr/>
         </p:nvSpPr>
@@ -36259,7 +36785,7 @@
       </p:sp>
       <p:sp>
         <p:nvSpPr>
-          <p:cNvPr id="10" name="TextBox 9"/>
+          <p:cNvPr id="9" name="TextBox 8"/>
           <p:cNvSpPr txBox="1"/>
           <p:nvPr/>
         </p:nvSpPr>
@@ -36306,7 +36832,7 @@
       </p:sp>
       <p:sp>
         <p:nvSpPr>
-          <p:cNvPr id="11" name="TextBox 10"/>
+          <p:cNvPr id="10" name="TextBox 9"/>
           <p:cNvSpPr txBox="1"/>
           <p:nvPr/>
         </p:nvSpPr>
@@ -36353,7 +36879,7 @@
       </p:sp>
       <p:sp>
         <p:nvSpPr>
-          <p:cNvPr id="12" name="Oval 11"/>
+          <p:cNvPr id="11" name="Oval 10"/>
           <p:cNvSpPr/>
           <p:nvPr/>
         </p:nvSpPr>
@@ -36397,7 +36923,7 @@
       </p:sp>
       <p:sp>
         <p:nvSpPr>
-          <p:cNvPr id="13" name="TextBox 12"/>
+          <p:cNvPr id="12" name="TextBox 11"/>
           <p:cNvSpPr txBox="1"/>
           <p:nvPr/>
         </p:nvSpPr>
@@ -36444,7 +36970,7 @@
       </p:sp>
       <p:sp>
         <p:nvSpPr>
-          <p:cNvPr id="14" name="TextBox 13"/>
+          <p:cNvPr id="13" name="TextBox 12"/>
           <p:cNvSpPr txBox="1"/>
           <p:nvPr/>
         </p:nvSpPr>
@@ -36491,7 +37017,7 @@
       </p:sp>
       <p:sp>
         <p:nvSpPr>
-          <p:cNvPr id="15" name="Oval 14"/>
+          <p:cNvPr id="14" name="Oval 13"/>
           <p:cNvSpPr/>
           <p:nvPr/>
         </p:nvSpPr>
@@ -36535,7 +37061,7 @@
       </p:sp>
       <p:sp>
         <p:nvSpPr>
-          <p:cNvPr id="16" name="TextBox 15"/>
+          <p:cNvPr id="15" name="TextBox 14"/>
           <p:cNvSpPr txBox="1"/>
           <p:nvPr/>
         </p:nvSpPr>
@@ -36582,7 +37108,7 @@
       </p:sp>
       <p:sp>
         <p:nvSpPr>
-          <p:cNvPr id="17" name="TextBox 16"/>
+          <p:cNvPr id="16" name="TextBox 15"/>
           <p:cNvSpPr txBox="1"/>
           <p:nvPr/>
         </p:nvSpPr>
@@ -36623,6 +37149,64 @@
                 <a:cs typeface="NanumGothic"/>
               </a:rPr>
               <a:t>전략 기획 · 외부 모델(codex·gemini)로 교차검토</a:t>
+            </a:r>
+          </a:p>
+        </p:txBody>
+      </p:sp>
+      <p:sp>
+        <p:nvSpPr>
+          <p:cNvPr id="17" name="TextBox 16"/>
+          <p:cNvSpPr txBox="1"/>
+          <p:nvPr/>
+        </p:nvSpPr>
+        <p:spPr>
+          <a:xfrm>
+            <a:off x="8988552" y="6419088"/>
+            <a:ext cx="2697480" cy="365760"/>
+          </a:xfrm>
+          <a:prstGeom prst="rect">
+            <a:avLst/>
+          </a:prstGeom>
+          <a:noFill/>
+        </p:spPr>
+        <p:txBody>
+          <a:bodyPr wrap="square" anchor="ctr" lIns="0" rIns="0" tIns="0" bIns="0">
+            <a:spAutoFit/>
+          </a:bodyPr>
+          <a:lstStyle/>
+          <a:p>
+            <a:pPr algn="r">
+              <a:lnSpc>
+                <a:spcPct val="100000"/>
+              </a:lnSpc>
+              <a:spcBef>
+                <a:spcPts val="0"/>
+              </a:spcBef>
+              <a:spcAft>
+                <a:spcPts val="600"/>
+              </a:spcAft>
+            </a:pPr>
+            <a:r>
+              <a:rPr sz="900" b="1">
+                <a:solidFill>
+                  <a:srgbClr val="0EA5E9"/>
+                </a:solidFill>
+                <a:latin typeface="NanumGothic"/>
+                <a:ea typeface="NanumGothic"/>
+                <a:cs typeface="NanumGothic"/>
+              </a:rPr>
+              <a:t>Day 2 · 화</a:t>
+            </a:r>
+            <a:r>
+              <a:rPr sz="900" b="1">
+                <a:solidFill>
+                  <a:srgbClr val="64748B"/>
+                </a:solidFill>
+                <a:latin typeface="NanumGothic"/>
+                <a:ea typeface="NanumGothic"/>
+                <a:cs typeface="NanumGothic"/>
+              </a:rPr>
+              <a:t>   ·   41 / 43</a:t>
             </a:r>
           </a:p>
         </p:txBody>
@@ -36920,54 +37504,7 @@
       </p:sp>
       <p:sp>
         <p:nvSpPr>
-          <p:cNvPr id="8" name="TextBox 7"/>
-          <p:cNvSpPr txBox="1"/>
-          <p:nvPr/>
-        </p:nvSpPr>
-        <p:spPr>
-          <a:xfrm>
-            <a:off x="10241280" y="6419088"/>
-            <a:ext cx="1463040" cy="365760"/>
-          </a:xfrm>
-          <a:prstGeom prst="rect">
-            <a:avLst/>
-          </a:prstGeom>
-          <a:noFill/>
-        </p:spPr>
-        <p:txBody>
-          <a:bodyPr wrap="square" anchor="ctr" lIns="0" rIns="0" tIns="0" bIns="0">
-            <a:spAutoFit/>
-          </a:bodyPr>
-          <a:lstStyle/>
-          <a:p>
-            <a:pPr algn="r">
-              <a:lnSpc>
-                <a:spcPct val="100000"/>
-              </a:lnSpc>
-              <a:spcBef>
-                <a:spcPts val="0"/>
-              </a:spcBef>
-              <a:spcAft>
-                <a:spcPts val="600"/>
-              </a:spcAft>
-            </a:pPr>
-            <a:r>
-              <a:rPr sz="900" b="1">
-                <a:solidFill>
-                  <a:srgbClr val="0EA5E9"/>
-                </a:solidFill>
-                <a:latin typeface="NanumGothic"/>
-                <a:ea typeface="NanumGothic"/>
-                <a:cs typeface="NanumGothic"/>
-              </a:rPr>
-              <a:t>Day 2 · 화</a:t>
-            </a:r>
-          </a:p>
-        </p:txBody>
-      </p:sp>
-      <p:sp>
-        <p:nvSpPr>
-          <p:cNvPr id="9" name="Rounded Rectangle 8"/>
+          <p:cNvPr id="8" name="Rounded Rectangle 7"/>
           <p:cNvSpPr/>
           <p:nvPr/>
         </p:nvSpPr>
@@ -37013,7 +37550,7 @@
       </p:sp>
       <p:sp>
         <p:nvSpPr>
-          <p:cNvPr id="10" name="TextBox 9"/>
+          <p:cNvPr id="9" name="TextBox 8"/>
           <p:cNvSpPr txBox="1"/>
           <p:nvPr/>
         </p:nvSpPr>
@@ -37060,7 +37597,7 @@
       </p:sp>
       <p:sp>
         <p:nvSpPr>
-          <p:cNvPr id="11" name="Oval 10"/>
+          <p:cNvPr id="10" name="Oval 9"/>
           <p:cNvSpPr/>
           <p:nvPr/>
         </p:nvSpPr>
@@ -37104,7 +37641,7 @@
       </p:sp>
       <p:sp>
         <p:nvSpPr>
-          <p:cNvPr id="12" name="TextBox 11"/>
+          <p:cNvPr id="11" name="TextBox 10"/>
           <p:cNvSpPr txBox="1"/>
           <p:nvPr/>
         </p:nvSpPr>
@@ -37151,7 +37688,7 @@
       </p:sp>
       <p:sp>
         <p:nvSpPr>
-          <p:cNvPr id="13" name="TextBox 12"/>
+          <p:cNvPr id="12" name="TextBox 11"/>
           <p:cNvSpPr txBox="1"/>
           <p:nvPr/>
         </p:nvSpPr>
@@ -37198,7 +37735,7 @@
       </p:sp>
       <p:sp>
         <p:nvSpPr>
-          <p:cNvPr id="14" name="Oval 13"/>
+          <p:cNvPr id="13" name="Oval 12"/>
           <p:cNvSpPr/>
           <p:nvPr/>
         </p:nvSpPr>
@@ -37242,7 +37779,7 @@
       </p:sp>
       <p:sp>
         <p:nvSpPr>
-          <p:cNvPr id="15" name="TextBox 14"/>
+          <p:cNvPr id="14" name="TextBox 13"/>
           <p:cNvSpPr txBox="1"/>
           <p:nvPr/>
         </p:nvSpPr>
@@ -37289,7 +37826,7 @@
       </p:sp>
       <p:sp>
         <p:nvSpPr>
-          <p:cNvPr id="16" name="TextBox 15"/>
+          <p:cNvPr id="15" name="TextBox 14"/>
           <p:cNvSpPr txBox="1"/>
           <p:nvPr/>
         </p:nvSpPr>
@@ -37336,7 +37873,7 @@
       </p:sp>
       <p:sp>
         <p:nvSpPr>
-          <p:cNvPr id="17" name="Oval 16"/>
+          <p:cNvPr id="16" name="Oval 15"/>
           <p:cNvSpPr/>
           <p:nvPr/>
         </p:nvSpPr>
@@ -37380,7 +37917,7 @@
       </p:sp>
       <p:sp>
         <p:nvSpPr>
-          <p:cNvPr id="18" name="TextBox 17"/>
+          <p:cNvPr id="17" name="TextBox 16"/>
           <p:cNvSpPr txBox="1"/>
           <p:nvPr/>
         </p:nvSpPr>
@@ -37427,7 +37964,7 @@
       </p:sp>
       <p:sp>
         <p:nvSpPr>
-          <p:cNvPr id="19" name="TextBox 18"/>
+          <p:cNvPr id="18" name="TextBox 17"/>
           <p:cNvSpPr txBox="1"/>
           <p:nvPr/>
         </p:nvSpPr>
@@ -37474,7 +38011,7 @@
       </p:sp>
       <p:sp>
         <p:nvSpPr>
-          <p:cNvPr id="20" name="Oval 19"/>
+          <p:cNvPr id="19" name="Oval 18"/>
           <p:cNvSpPr/>
           <p:nvPr/>
         </p:nvSpPr>
@@ -37518,7 +38055,7 @@
       </p:sp>
       <p:sp>
         <p:nvSpPr>
-          <p:cNvPr id="21" name="TextBox 20"/>
+          <p:cNvPr id="20" name="TextBox 19"/>
           <p:cNvSpPr txBox="1"/>
           <p:nvPr/>
         </p:nvSpPr>
@@ -37565,7 +38102,7 @@
       </p:sp>
       <p:sp>
         <p:nvSpPr>
-          <p:cNvPr id="22" name="TextBox 21"/>
+          <p:cNvPr id="21" name="TextBox 20"/>
           <p:cNvSpPr txBox="1"/>
           <p:nvPr/>
         </p:nvSpPr>
@@ -37612,7 +38149,7 @@
       </p:sp>
       <p:sp>
         <p:nvSpPr>
-          <p:cNvPr id="23" name="Rounded Rectangle 22"/>
+          <p:cNvPr id="22" name="Rounded Rectangle 21"/>
           <p:cNvSpPr/>
           <p:nvPr/>
         </p:nvSpPr>
@@ -37656,7 +38193,7 @@
       </p:sp>
       <p:sp>
         <p:nvSpPr>
-          <p:cNvPr id="24" name="TextBox 23"/>
+          <p:cNvPr id="23" name="TextBox 22"/>
           <p:cNvSpPr txBox="1"/>
           <p:nvPr/>
         </p:nvSpPr>
@@ -37703,7 +38240,7 @@
       </p:sp>
       <p:sp>
         <p:nvSpPr>
-          <p:cNvPr id="25" name="TextBox 24"/>
+          <p:cNvPr id="24" name="TextBox 23"/>
           <p:cNvSpPr txBox="1"/>
           <p:nvPr/>
         </p:nvSpPr>
@@ -37745,6 +38282,64 @@
               </a:rPr>
               <a:t>설정 완료 + 플러그인 설치된 작업 환경
 예시: examples/claude-setup (settings.json · CLAUDE.md)</a:t>
+            </a:r>
+          </a:p>
+        </p:txBody>
+      </p:sp>
+      <p:sp>
+        <p:nvSpPr>
+          <p:cNvPr id="25" name="TextBox 24"/>
+          <p:cNvSpPr txBox="1"/>
+          <p:nvPr/>
+        </p:nvSpPr>
+        <p:spPr>
+          <a:xfrm>
+            <a:off x="8988552" y="6419088"/>
+            <a:ext cx="2697480" cy="365760"/>
+          </a:xfrm>
+          <a:prstGeom prst="rect">
+            <a:avLst/>
+          </a:prstGeom>
+          <a:noFill/>
+        </p:spPr>
+        <p:txBody>
+          <a:bodyPr wrap="square" anchor="ctr" lIns="0" rIns="0" tIns="0" bIns="0">
+            <a:spAutoFit/>
+          </a:bodyPr>
+          <a:lstStyle/>
+          <a:p>
+            <a:pPr algn="r">
+              <a:lnSpc>
+                <a:spcPct val="100000"/>
+              </a:lnSpc>
+              <a:spcBef>
+                <a:spcPts val="0"/>
+              </a:spcBef>
+              <a:spcAft>
+                <a:spcPts val="600"/>
+              </a:spcAft>
+            </a:pPr>
+            <a:r>
+              <a:rPr sz="900" b="1">
+                <a:solidFill>
+                  <a:srgbClr val="0EA5E9"/>
+                </a:solidFill>
+                <a:latin typeface="NanumGothic"/>
+                <a:ea typeface="NanumGothic"/>
+                <a:cs typeface="NanumGothic"/>
+              </a:rPr>
+              <a:t>Day 2 · 화</a:t>
+            </a:r>
+            <a:r>
+              <a:rPr sz="900" b="1">
+                <a:solidFill>
+                  <a:srgbClr val="64748B"/>
+                </a:solidFill>
+                <a:latin typeface="NanumGothic"/>
+                <a:ea typeface="NanumGothic"/>
+                <a:cs typeface="NanumGothic"/>
+              </a:rPr>
+              <a:t>   ·   42 / 43</a:t>
             </a:r>
           </a:p>
         </p:txBody>
@@ -38048,53 +38643,6 @@
         </p:nvSpPr>
         <p:spPr>
           <a:xfrm>
-            <a:off x="10241280" y="6419088"/>
-            <a:ext cx="1463040" cy="365760"/>
-          </a:xfrm>
-          <a:prstGeom prst="rect">
-            <a:avLst/>
-          </a:prstGeom>
-          <a:noFill/>
-        </p:spPr>
-        <p:txBody>
-          <a:bodyPr wrap="square" anchor="ctr" lIns="0" rIns="0" tIns="0" bIns="0">
-            <a:spAutoFit/>
-          </a:bodyPr>
-          <a:lstStyle/>
-          <a:p>
-            <a:pPr algn="r">
-              <a:lnSpc>
-                <a:spcPct val="100000"/>
-              </a:lnSpc>
-              <a:spcBef>
-                <a:spcPts val="0"/>
-              </a:spcBef>
-              <a:spcAft>
-                <a:spcPts val="600"/>
-              </a:spcAft>
-            </a:pPr>
-            <a:r>
-              <a:rPr sz="900" b="1">
-                <a:solidFill>
-                  <a:srgbClr val="0EA5E9"/>
-                </a:solidFill>
-                <a:latin typeface="NanumGothic"/>
-                <a:ea typeface="NanumGothic"/>
-                <a:cs typeface="NanumGothic"/>
-              </a:rPr>
-              <a:t>Day 2 · 화</a:t>
-            </a:r>
-          </a:p>
-        </p:txBody>
-      </p:sp>
-      <p:sp>
-        <p:nvSpPr>
-          <p:cNvPr id="9" name="TextBox 8"/>
-          <p:cNvSpPr txBox="1"/>
-          <p:nvPr/>
-        </p:nvSpPr>
-        <p:spPr>
-          <a:xfrm>
             <a:off x="548640" y="1783080"/>
             <a:ext cx="6400800" cy="365760"/>
           </a:xfrm>
@@ -38136,7 +38684,7 @@
       </p:sp>
       <p:sp>
         <p:nvSpPr>
-          <p:cNvPr id="10" name="Oval 9"/>
+          <p:cNvPr id="9" name="Oval 8"/>
           <p:cNvSpPr/>
           <p:nvPr/>
         </p:nvSpPr>
@@ -38180,7 +38728,7 @@
       </p:sp>
       <p:sp>
         <p:nvSpPr>
-          <p:cNvPr id="11" name="TextBox 10"/>
+          <p:cNvPr id="10" name="TextBox 9"/>
           <p:cNvSpPr txBox="1"/>
           <p:nvPr/>
         </p:nvSpPr>
@@ -38227,7 +38775,7 @@
       </p:sp>
       <p:sp>
         <p:nvSpPr>
-          <p:cNvPr id="12" name="Oval 11"/>
+          <p:cNvPr id="11" name="Oval 10"/>
           <p:cNvSpPr/>
           <p:nvPr/>
         </p:nvSpPr>
@@ -38271,7 +38819,7 @@
       </p:sp>
       <p:sp>
         <p:nvSpPr>
-          <p:cNvPr id="13" name="TextBox 12"/>
+          <p:cNvPr id="12" name="TextBox 11"/>
           <p:cNvSpPr txBox="1"/>
           <p:nvPr/>
         </p:nvSpPr>
@@ -38318,7 +38866,7 @@
       </p:sp>
       <p:sp>
         <p:nvSpPr>
-          <p:cNvPr id="14" name="Oval 13"/>
+          <p:cNvPr id="13" name="Oval 12"/>
           <p:cNvSpPr/>
           <p:nvPr/>
         </p:nvSpPr>
@@ -38362,7 +38910,7 @@
       </p:sp>
       <p:sp>
         <p:nvSpPr>
-          <p:cNvPr id="15" name="TextBox 14"/>
+          <p:cNvPr id="14" name="TextBox 13"/>
           <p:cNvSpPr txBox="1"/>
           <p:nvPr/>
         </p:nvSpPr>
@@ -38409,7 +38957,7 @@
       </p:sp>
       <p:sp>
         <p:nvSpPr>
-          <p:cNvPr id="16" name="Rounded Rectangle 15"/>
+          <p:cNvPr id="15" name="Rounded Rectangle 14"/>
           <p:cNvSpPr/>
           <p:nvPr/>
         </p:nvSpPr>
@@ -38455,7 +39003,7 @@
       </p:sp>
       <p:sp>
         <p:nvSpPr>
-          <p:cNvPr id="17" name="TextBox 16"/>
+          <p:cNvPr id="16" name="TextBox 15"/>
           <p:cNvSpPr txBox="1"/>
           <p:nvPr/>
         </p:nvSpPr>
@@ -38502,7 +39050,7 @@
       </p:sp>
       <p:sp>
         <p:nvSpPr>
-          <p:cNvPr id="18" name="TextBox 17"/>
+          <p:cNvPr id="17" name="TextBox 16"/>
           <p:cNvSpPr txBox="1"/>
           <p:nvPr/>
         </p:nvSpPr>
@@ -38543,6 +39091,64 @@
                 <a:cs typeface="NanumGothic"/>
               </a:rPr>
               <a:t>세팅한 도구로 실생활 미니 프로젝트를 기획·개발하고, 리서치 프로세스 이론을 배운 뒤 팀과 주제를 정합니다.</a:t>
+            </a:r>
+          </a:p>
+        </p:txBody>
+      </p:sp>
+      <p:sp>
+        <p:nvSpPr>
+          <p:cNvPr id="18" name="TextBox 17"/>
+          <p:cNvSpPr txBox="1"/>
+          <p:nvPr/>
+        </p:nvSpPr>
+        <p:spPr>
+          <a:xfrm>
+            <a:off x="8988552" y="6419088"/>
+            <a:ext cx="2697480" cy="365760"/>
+          </a:xfrm>
+          <a:prstGeom prst="rect">
+            <a:avLst/>
+          </a:prstGeom>
+          <a:noFill/>
+        </p:spPr>
+        <p:txBody>
+          <a:bodyPr wrap="square" anchor="ctr" lIns="0" rIns="0" tIns="0" bIns="0">
+            <a:spAutoFit/>
+          </a:bodyPr>
+          <a:lstStyle/>
+          <a:p>
+            <a:pPr algn="r">
+              <a:lnSpc>
+                <a:spcPct val="100000"/>
+              </a:lnSpc>
+              <a:spcBef>
+                <a:spcPts val="0"/>
+              </a:spcBef>
+              <a:spcAft>
+                <a:spcPts val="600"/>
+              </a:spcAft>
+            </a:pPr>
+            <a:r>
+              <a:rPr sz="900" b="1">
+                <a:solidFill>
+                  <a:srgbClr val="0EA5E9"/>
+                </a:solidFill>
+                <a:latin typeface="NanumGothic"/>
+                <a:ea typeface="NanumGothic"/>
+                <a:cs typeface="NanumGothic"/>
+              </a:rPr>
+              <a:t>Day 2 · 화</a:t>
+            </a:r>
+            <a:r>
+              <a:rPr sz="900" b="1">
+                <a:solidFill>
+                  <a:srgbClr val="64748B"/>
+                </a:solidFill>
+                <a:latin typeface="NanumGothic"/>
+                <a:ea typeface="NanumGothic"/>
+                <a:cs typeface="NanumGothic"/>
+              </a:rPr>
+              <a:t>   ·   43 / 43</a:t>
             </a:r>
           </a:p>
         </p:txBody>
@@ -38840,54 +39446,7 @@
       </p:sp>
       <p:sp>
         <p:nvSpPr>
-          <p:cNvPr id="8" name="TextBox 7"/>
-          <p:cNvSpPr txBox="1"/>
-          <p:nvPr/>
-        </p:nvSpPr>
-        <p:spPr>
-          <a:xfrm>
-            <a:off x="10241280" y="6419088"/>
-            <a:ext cx="1463040" cy="365760"/>
-          </a:xfrm>
-          <a:prstGeom prst="rect">
-            <a:avLst/>
-          </a:prstGeom>
-          <a:noFill/>
-        </p:spPr>
-        <p:txBody>
-          <a:bodyPr wrap="square" anchor="ctr" lIns="0" rIns="0" tIns="0" bIns="0">
-            <a:spAutoFit/>
-          </a:bodyPr>
-          <a:lstStyle/>
-          <a:p>
-            <a:pPr algn="r">
-              <a:lnSpc>
-                <a:spcPct val="100000"/>
-              </a:lnSpc>
-              <a:spcBef>
-                <a:spcPts val="0"/>
-              </a:spcBef>
-              <a:spcAft>
-                <a:spcPts val="600"/>
-              </a:spcAft>
-            </a:pPr>
-            <a:r>
-              <a:rPr sz="900" b="1">
-                <a:solidFill>
-                  <a:srgbClr val="0EA5E9"/>
-                </a:solidFill>
-                <a:latin typeface="NanumGothic"/>
-                <a:ea typeface="NanumGothic"/>
-                <a:cs typeface="NanumGothic"/>
-              </a:rPr>
-              <a:t>Day 2 · 화</a:t>
-            </a:r>
-          </a:p>
-        </p:txBody>
-      </p:sp>
-      <p:sp>
-        <p:nvSpPr>
-          <p:cNvPr id="9" name="Rounded Rectangle 8"/>
+          <p:cNvPr id="8" name="Rounded Rectangle 7"/>
           <p:cNvSpPr/>
           <p:nvPr/>
         </p:nvSpPr>
@@ -38933,7 +39492,7 @@
       </p:sp>
       <p:sp>
         <p:nvSpPr>
-          <p:cNvPr id="10" name="TextBox 9"/>
+          <p:cNvPr id="9" name="TextBox 8"/>
           <p:cNvSpPr txBox="1"/>
           <p:nvPr/>
         </p:nvSpPr>
@@ -38980,7 +39539,7 @@
       </p:sp>
       <p:sp>
         <p:nvSpPr>
-          <p:cNvPr id="11" name="TextBox 10"/>
+          <p:cNvPr id="10" name="TextBox 9"/>
           <p:cNvSpPr txBox="1"/>
           <p:nvPr/>
         </p:nvSpPr>
@@ -39027,7 +39586,7 @@
       </p:sp>
       <p:sp>
         <p:nvSpPr>
-          <p:cNvPr id="12" name="Rounded Rectangle 11"/>
+          <p:cNvPr id="11" name="Rounded Rectangle 10"/>
           <p:cNvSpPr/>
           <p:nvPr/>
         </p:nvSpPr>
@@ -39073,7 +39632,7 @@
       </p:sp>
       <p:sp>
         <p:nvSpPr>
-          <p:cNvPr id="13" name="Oval 12"/>
+          <p:cNvPr id="12" name="Oval 11"/>
           <p:cNvSpPr/>
           <p:nvPr/>
         </p:nvSpPr>
@@ -39117,7 +39676,7 @@
       </p:sp>
       <p:sp>
         <p:nvSpPr>
-          <p:cNvPr id="14" name="TextBox 13"/>
+          <p:cNvPr id="13" name="TextBox 12"/>
           <p:cNvSpPr txBox="1"/>
           <p:nvPr/>
         </p:nvSpPr>
@@ -39164,7 +39723,7 @@
       </p:sp>
       <p:sp>
         <p:nvSpPr>
-          <p:cNvPr id="15" name="TextBox 14"/>
+          <p:cNvPr id="14" name="TextBox 13"/>
           <p:cNvSpPr txBox="1"/>
           <p:nvPr/>
         </p:nvSpPr>
@@ -39211,7 +39770,7 @@
       </p:sp>
       <p:sp>
         <p:nvSpPr>
-          <p:cNvPr id="16" name="Rounded Rectangle 15"/>
+          <p:cNvPr id="15" name="Rounded Rectangle 14"/>
           <p:cNvSpPr/>
           <p:nvPr/>
         </p:nvSpPr>
@@ -39257,7 +39816,7 @@
       </p:sp>
       <p:sp>
         <p:nvSpPr>
-          <p:cNvPr id="17" name="Oval 16"/>
+          <p:cNvPr id="16" name="Oval 15"/>
           <p:cNvSpPr/>
           <p:nvPr/>
         </p:nvSpPr>
@@ -39301,7 +39860,7 @@
       </p:sp>
       <p:sp>
         <p:nvSpPr>
-          <p:cNvPr id="18" name="TextBox 17"/>
+          <p:cNvPr id="17" name="TextBox 16"/>
           <p:cNvSpPr txBox="1"/>
           <p:nvPr/>
         </p:nvSpPr>
@@ -39348,7 +39907,7 @@
       </p:sp>
       <p:sp>
         <p:nvSpPr>
-          <p:cNvPr id="19" name="TextBox 18"/>
+          <p:cNvPr id="18" name="TextBox 17"/>
           <p:cNvSpPr txBox="1"/>
           <p:nvPr/>
         </p:nvSpPr>
@@ -39395,7 +39954,7 @@
       </p:sp>
       <p:sp>
         <p:nvSpPr>
-          <p:cNvPr id="20" name="Rounded Rectangle 19"/>
+          <p:cNvPr id="19" name="Rounded Rectangle 18"/>
           <p:cNvSpPr/>
           <p:nvPr/>
         </p:nvSpPr>
@@ -39441,7 +40000,7 @@
       </p:sp>
       <p:sp>
         <p:nvSpPr>
-          <p:cNvPr id="21" name="Oval 20"/>
+          <p:cNvPr id="20" name="Oval 19"/>
           <p:cNvSpPr/>
           <p:nvPr/>
         </p:nvSpPr>
@@ -39485,7 +40044,7 @@
       </p:sp>
       <p:sp>
         <p:nvSpPr>
-          <p:cNvPr id="22" name="TextBox 21"/>
+          <p:cNvPr id="21" name="TextBox 20"/>
           <p:cNvSpPr txBox="1"/>
           <p:nvPr/>
         </p:nvSpPr>
@@ -39532,7 +40091,7 @@
       </p:sp>
       <p:sp>
         <p:nvSpPr>
-          <p:cNvPr id="23" name="TextBox 22"/>
+          <p:cNvPr id="22" name="TextBox 21"/>
           <p:cNvSpPr txBox="1"/>
           <p:nvPr/>
         </p:nvSpPr>
@@ -39579,7 +40138,7 @@
       </p:sp>
       <p:sp>
         <p:nvSpPr>
-          <p:cNvPr id="24" name="Rounded Rectangle 23"/>
+          <p:cNvPr id="23" name="Rounded Rectangle 22"/>
           <p:cNvSpPr/>
           <p:nvPr/>
         </p:nvSpPr>
@@ -39625,7 +40184,7 @@
       </p:sp>
       <p:sp>
         <p:nvSpPr>
-          <p:cNvPr id="25" name="Oval 24"/>
+          <p:cNvPr id="24" name="Oval 23"/>
           <p:cNvSpPr/>
           <p:nvPr/>
         </p:nvSpPr>
@@ -39669,7 +40228,7 @@
       </p:sp>
       <p:sp>
         <p:nvSpPr>
-          <p:cNvPr id="26" name="TextBox 25"/>
+          <p:cNvPr id="25" name="TextBox 24"/>
           <p:cNvSpPr txBox="1"/>
           <p:nvPr/>
         </p:nvSpPr>
@@ -39716,7 +40275,7 @@
       </p:sp>
       <p:sp>
         <p:nvSpPr>
-          <p:cNvPr id="27" name="TextBox 26"/>
+          <p:cNvPr id="26" name="TextBox 25"/>
           <p:cNvSpPr txBox="1"/>
           <p:nvPr/>
         </p:nvSpPr>
@@ -39763,7 +40322,7 @@
       </p:sp>
       <p:sp>
         <p:nvSpPr>
-          <p:cNvPr id="28" name="Rounded Rectangle 27"/>
+          <p:cNvPr id="27" name="Rounded Rectangle 26"/>
           <p:cNvSpPr/>
           <p:nvPr/>
         </p:nvSpPr>
@@ -39809,7 +40368,7 @@
       </p:sp>
       <p:sp>
         <p:nvSpPr>
-          <p:cNvPr id="29" name="Oval 28"/>
+          <p:cNvPr id="28" name="Oval 27"/>
           <p:cNvSpPr/>
           <p:nvPr/>
         </p:nvSpPr>
@@ -39853,7 +40412,7 @@
       </p:sp>
       <p:sp>
         <p:nvSpPr>
-          <p:cNvPr id="30" name="TextBox 29"/>
+          <p:cNvPr id="29" name="TextBox 28"/>
           <p:cNvSpPr txBox="1"/>
           <p:nvPr/>
         </p:nvSpPr>
@@ -39900,7 +40459,7 @@
       </p:sp>
       <p:sp>
         <p:nvSpPr>
-          <p:cNvPr id="31" name="TextBox 30"/>
+          <p:cNvPr id="30" name="TextBox 29"/>
           <p:cNvSpPr txBox="1"/>
           <p:nvPr/>
         </p:nvSpPr>
@@ -39947,7 +40506,7 @@
       </p:sp>
       <p:sp>
         <p:nvSpPr>
-          <p:cNvPr id="32" name="Rounded Rectangle 31"/>
+          <p:cNvPr id="31" name="Rounded Rectangle 30"/>
           <p:cNvSpPr/>
           <p:nvPr/>
         </p:nvSpPr>
@@ -39993,7 +40552,7 @@
       </p:sp>
       <p:sp>
         <p:nvSpPr>
-          <p:cNvPr id="33" name="Oval 32"/>
+          <p:cNvPr id="32" name="Oval 31"/>
           <p:cNvSpPr/>
           <p:nvPr/>
         </p:nvSpPr>
@@ -40037,7 +40596,7 @@
       </p:sp>
       <p:sp>
         <p:nvSpPr>
-          <p:cNvPr id="34" name="TextBox 33"/>
+          <p:cNvPr id="33" name="TextBox 32"/>
           <p:cNvSpPr txBox="1"/>
           <p:nvPr/>
         </p:nvSpPr>
@@ -40084,7 +40643,7 @@
       </p:sp>
       <p:sp>
         <p:nvSpPr>
-          <p:cNvPr id="35" name="TextBox 34"/>
+          <p:cNvPr id="34" name="TextBox 33"/>
           <p:cNvSpPr txBox="1"/>
           <p:nvPr/>
         </p:nvSpPr>
@@ -40131,7 +40690,7 @@
       </p:sp>
       <p:sp>
         <p:nvSpPr>
-          <p:cNvPr id="36" name="Rounded Rectangle 35"/>
+          <p:cNvPr id="35" name="Rounded Rectangle 34"/>
           <p:cNvSpPr/>
           <p:nvPr/>
         </p:nvSpPr>
@@ -40177,7 +40736,7 @@
       </p:sp>
       <p:sp>
         <p:nvSpPr>
-          <p:cNvPr id="37" name="Oval 36"/>
+          <p:cNvPr id="36" name="Oval 35"/>
           <p:cNvSpPr/>
           <p:nvPr/>
         </p:nvSpPr>
@@ -40221,7 +40780,7 @@
       </p:sp>
       <p:sp>
         <p:nvSpPr>
-          <p:cNvPr id="38" name="TextBox 37"/>
+          <p:cNvPr id="37" name="TextBox 36"/>
           <p:cNvSpPr txBox="1"/>
           <p:nvPr/>
         </p:nvSpPr>
@@ -40268,7 +40827,7 @@
       </p:sp>
       <p:sp>
         <p:nvSpPr>
-          <p:cNvPr id="39" name="TextBox 38"/>
+          <p:cNvPr id="38" name="TextBox 37"/>
           <p:cNvSpPr txBox="1"/>
           <p:nvPr/>
         </p:nvSpPr>
@@ -40315,7 +40874,7 @@
       </p:sp>
       <p:sp>
         <p:nvSpPr>
-          <p:cNvPr id="40" name="Rounded Rectangle 39"/>
+          <p:cNvPr id="39" name="Rounded Rectangle 38"/>
           <p:cNvSpPr/>
           <p:nvPr/>
         </p:nvSpPr>
@@ -40361,7 +40920,7 @@
       </p:sp>
       <p:sp>
         <p:nvSpPr>
-          <p:cNvPr id="41" name="Oval 40"/>
+          <p:cNvPr id="40" name="Oval 39"/>
           <p:cNvSpPr/>
           <p:nvPr/>
         </p:nvSpPr>
@@ -40405,7 +40964,7 @@
       </p:sp>
       <p:sp>
         <p:nvSpPr>
-          <p:cNvPr id="42" name="TextBox 41"/>
+          <p:cNvPr id="41" name="TextBox 40"/>
           <p:cNvSpPr txBox="1"/>
           <p:nvPr/>
         </p:nvSpPr>
@@ -40452,7 +41011,7 @@
       </p:sp>
       <p:sp>
         <p:nvSpPr>
-          <p:cNvPr id="43" name="TextBox 42"/>
+          <p:cNvPr id="42" name="TextBox 41"/>
           <p:cNvSpPr txBox="1"/>
           <p:nvPr/>
         </p:nvSpPr>
@@ -40499,7 +41058,7 @@
       </p:sp>
       <p:sp>
         <p:nvSpPr>
-          <p:cNvPr id="44" name="Rounded Rectangle 43"/>
+          <p:cNvPr id="43" name="Rounded Rectangle 42"/>
           <p:cNvSpPr/>
           <p:nvPr/>
         </p:nvSpPr>
@@ -40545,7 +41104,7 @@
       </p:sp>
       <p:sp>
         <p:nvSpPr>
-          <p:cNvPr id="45" name="Oval 44"/>
+          <p:cNvPr id="44" name="Oval 43"/>
           <p:cNvSpPr/>
           <p:nvPr/>
         </p:nvSpPr>
@@ -40589,7 +41148,7 @@
       </p:sp>
       <p:sp>
         <p:nvSpPr>
-          <p:cNvPr id="46" name="TextBox 45"/>
+          <p:cNvPr id="45" name="TextBox 44"/>
           <p:cNvSpPr txBox="1"/>
           <p:nvPr/>
         </p:nvSpPr>
@@ -40636,7 +41195,7 @@
       </p:sp>
       <p:sp>
         <p:nvSpPr>
-          <p:cNvPr id="47" name="TextBox 46"/>
+          <p:cNvPr id="46" name="TextBox 45"/>
           <p:cNvSpPr txBox="1"/>
           <p:nvPr/>
         </p:nvSpPr>
@@ -40683,7 +41242,7 @@
       </p:sp>
       <p:sp>
         <p:nvSpPr>
-          <p:cNvPr id="48" name="Rounded Rectangle 47"/>
+          <p:cNvPr id="47" name="Rounded Rectangle 46"/>
           <p:cNvSpPr/>
           <p:nvPr/>
         </p:nvSpPr>
@@ -40729,7 +41288,7 @@
       </p:sp>
       <p:sp>
         <p:nvSpPr>
-          <p:cNvPr id="49" name="Oval 48"/>
+          <p:cNvPr id="48" name="Oval 47"/>
           <p:cNvSpPr/>
           <p:nvPr/>
         </p:nvSpPr>
@@ -40773,7 +41332,7 @@
       </p:sp>
       <p:sp>
         <p:nvSpPr>
-          <p:cNvPr id="50" name="TextBox 49"/>
+          <p:cNvPr id="49" name="TextBox 48"/>
           <p:cNvSpPr txBox="1"/>
           <p:nvPr/>
         </p:nvSpPr>
@@ -40820,7 +41379,7 @@
       </p:sp>
       <p:sp>
         <p:nvSpPr>
-          <p:cNvPr id="51" name="TextBox 50"/>
+          <p:cNvPr id="50" name="TextBox 49"/>
           <p:cNvSpPr txBox="1"/>
           <p:nvPr/>
         </p:nvSpPr>
@@ -40867,7 +41426,7 @@
       </p:sp>
       <p:sp>
         <p:nvSpPr>
-          <p:cNvPr id="52" name="Rounded Rectangle 51"/>
+          <p:cNvPr id="51" name="Rounded Rectangle 50"/>
           <p:cNvSpPr/>
           <p:nvPr/>
         </p:nvSpPr>
@@ -40913,7 +41472,7 @@
       </p:sp>
       <p:sp>
         <p:nvSpPr>
-          <p:cNvPr id="53" name="Oval 52"/>
+          <p:cNvPr id="52" name="Oval 51"/>
           <p:cNvSpPr/>
           <p:nvPr/>
         </p:nvSpPr>
@@ -40957,7 +41516,7 @@
       </p:sp>
       <p:sp>
         <p:nvSpPr>
-          <p:cNvPr id="54" name="TextBox 53"/>
+          <p:cNvPr id="53" name="TextBox 52"/>
           <p:cNvSpPr txBox="1"/>
           <p:nvPr/>
         </p:nvSpPr>
@@ -41004,7 +41563,7 @@
       </p:sp>
       <p:sp>
         <p:nvSpPr>
-          <p:cNvPr id="55" name="TextBox 54"/>
+          <p:cNvPr id="54" name="TextBox 53"/>
           <p:cNvSpPr txBox="1"/>
           <p:nvPr/>
         </p:nvSpPr>
@@ -41045,6 +41604,64 @@
                 <a:cs typeface="NanumGothic"/>
               </a:rPr>
               <a:t>과학·신약 사례</a:t>
+            </a:r>
+          </a:p>
+        </p:txBody>
+      </p:sp>
+      <p:sp>
+        <p:nvSpPr>
+          <p:cNvPr id="55" name="TextBox 54"/>
+          <p:cNvSpPr txBox="1"/>
+          <p:nvPr/>
+        </p:nvSpPr>
+        <p:spPr>
+          <a:xfrm>
+            <a:off x="8988552" y="6419088"/>
+            <a:ext cx="2697480" cy="365760"/>
+          </a:xfrm>
+          <a:prstGeom prst="rect">
+            <a:avLst/>
+          </a:prstGeom>
+          <a:noFill/>
+        </p:spPr>
+        <p:txBody>
+          <a:bodyPr wrap="square" anchor="ctr" lIns="0" rIns="0" tIns="0" bIns="0">
+            <a:spAutoFit/>
+          </a:bodyPr>
+          <a:lstStyle/>
+          <a:p>
+            <a:pPr algn="r">
+              <a:lnSpc>
+                <a:spcPct val="100000"/>
+              </a:lnSpc>
+              <a:spcBef>
+                <a:spcPts val="0"/>
+              </a:spcBef>
+              <a:spcAft>
+                <a:spcPts val="600"/>
+              </a:spcAft>
+            </a:pPr>
+            <a:r>
+              <a:rPr sz="900" b="1">
+                <a:solidFill>
+                  <a:srgbClr val="0EA5E9"/>
+                </a:solidFill>
+                <a:latin typeface="NanumGothic"/>
+                <a:ea typeface="NanumGothic"/>
+                <a:cs typeface="NanumGothic"/>
+              </a:rPr>
+              <a:t>Day 2 · 화</a:t>
+            </a:r>
+            <a:r>
+              <a:rPr sz="900" b="1">
+                <a:solidFill>
+                  <a:srgbClr val="64748B"/>
+                </a:solidFill>
+                <a:latin typeface="NanumGothic"/>
+                <a:ea typeface="NanumGothic"/>
+                <a:cs typeface="NanumGothic"/>
+              </a:rPr>
+              <a:t>   ·   5 / 43</a:t>
             </a:r>
           </a:p>
         </p:txBody>
@@ -41342,54 +41959,7 @@
       </p:sp>
       <p:sp>
         <p:nvSpPr>
-          <p:cNvPr id="8" name="TextBox 7"/>
-          <p:cNvSpPr txBox="1"/>
-          <p:nvPr/>
-        </p:nvSpPr>
-        <p:spPr>
-          <a:xfrm>
-            <a:off x="10241280" y="6419088"/>
-            <a:ext cx="1463040" cy="365760"/>
-          </a:xfrm>
-          <a:prstGeom prst="rect">
-            <a:avLst/>
-          </a:prstGeom>
-          <a:noFill/>
-        </p:spPr>
-        <p:txBody>
-          <a:bodyPr wrap="square" anchor="ctr" lIns="0" rIns="0" tIns="0" bIns="0">
-            <a:spAutoFit/>
-          </a:bodyPr>
-          <a:lstStyle/>
-          <a:p>
-            <a:pPr algn="r">
-              <a:lnSpc>
-                <a:spcPct val="100000"/>
-              </a:lnSpc>
-              <a:spcBef>
-                <a:spcPts val="0"/>
-              </a:spcBef>
-              <a:spcAft>
-                <a:spcPts val="600"/>
-              </a:spcAft>
-            </a:pPr>
-            <a:r>
-              <a:rPr sz="900" b="1">
-                <a:solidFill>
-                  <a:srgbClr val="0EA5E9"/>
-                </a:solidFill>
-                <a:latin typeface="NanumGothic"/>
-                <a:ea typeface="NanumGothic"/>
-                <a:cs typeface="NanumGothic"/>
-              </a:rPr>
-              <a:t>Day 2 · 화</a:t>
-            </a:r>
-          </a:p>
-        </p:txBody>
-      </p:sp>
-      <p:sp>
-        <p:nvSpPr>
-          <p:cNvPr id="9" name="Oval 8"/>
+          <p:cNvPr id="8" name="Oval 7"/>
           <p:cNvSpPr/>
           <p:nvPr/>
         </p:nvSpPr>
@@ -41433,7 +42003,7 @@
       </p:sp>
       <p:sp>
         <p:nvSpPr>
-          <p:cNvPr id="10" name="TextBox 9"/>
+          <p:cNvPr id="9" name="TextBox 8"/>
           <p:cNvSpPr txBox="1"/>
           <p:nvPr/>
         </p:nvSpPr>
@@ -41480,7 +42050,7 @@
       </p:sp>
       <p:sp>
         <p:nvSpPr>
-          <p:cNvPr id="11" name="TextBox 10"/>
+          <p:cNvPr id="10" name="TextBox 9"/>
           <p:cNvSpPr txBox="1"/>
           <p:nvPr/>
         </p:nvSpPr>
@@ -41527,7 +42097,7 @@
       </p:sp>
       <p:sp>
         <p:nvSpPr>
-          <p:cNvPr id="12" name="Oval 11"/>
+          <p:cNvPr id="11" name="Oval 10"/>
           <p:cNvSpPr/>
           <p:nvPr/>
         </p:nvSpPr>
@@ -41571,7 +42141,7 @@
       </p:sp>
       <p:sp>
         <p:nvSpPr>
-          <p:cNvPr id="13" name="TextBox 12"/>
+          <p:cNvPr id="12" name="TextBox 11"/>
           <p:cNvSpPr txBox="1"/>
           <p:nvPr/>
         </p:nvSpPr>
@@ -41618,7 +42188,7 @@
       </p:sp>
       <p:sp>
         <p:nvSpPr>
-          <p:cNvPr id="14" name="TextBox 13"/>
+          <p:cNvPr id="13" name="TextBox 12"/>
           <p:cNvSpPr txBox="1"/>
           <p:nvPr/>
         </p:nvSpPr>
@@ -41665,7 +42235,7 @@
       </p:sp>
       <p:sp>
         <p:nvSpPr>
-          <p:cNvPr id="15" name="Oval 14"/>
+          <p:cNvPr id="14" name="Oval 13"/>
           <p:cNvSpPr/>
           <p:nvPr/>
         </p:nvSpPr>
@@ -41709,7 +42279,7 @@
       </p:sp>
       <p:sp>
         <p:nvSpPr>
-          <p:cNvPr id="16" name="TextBox 15"/>
+          <p:cNvPr id="15" name="TextBox 14"/>
           <p:cNvSpPr txBox="1"/>
           <p:nvPr/>
         </p:nvSpPr>
@@ -41756,7 +42326,7 @@
       </p:sp>
       <p:sp>
         <p:nvSpPr>
-          <p:cNvPr id="17" name="TextBox 16"/>
+          <p:cNvPr id="16" name="TextBox 15"/>
           <p:cNvSpPr txBox="1"/>
           <p:nvPr/>
         </p:nvSpPr>
@@ -41797,6 +42367,64 @@
                 <a:cs typeface="NanumGothic"/>
               </a:rPr>
               <a:t>이번 주 팀 프로젝트의 형태</a:t>
+            </a:r>
+          </a:p>
+        </p:txBody>
+      </p:sp>
+      <p:sp>
+        <p:nvSpPr>
+          <p:cNvPr id="17" name="TextBox 16"/>
+          <p:cNvSpPr txBox="1"/>
+          <p:nvPr/>
+        </p:nvSpPr>
+        <p:spPr>
+          <a:xfrm>
+            <a:off x="8988552" y="6419088"/>
+            <a:ext cx="2697480" cy="365760"/>
+          </a:xfrm>
+          <a:prstGeom prst="rect">
+            <a:avLst/>
+          </a:prstGeom>
+          <a:noFill/>
+        </p:spPr>
+        <p:txBody>
+          <a:bodyPr wrap="square" anchor="ctr" lIns="0" rIns="0" tIns="0" bIns="0">
+            <a:spAutoFit/>
+          </a:bodyPr>
+          <a:lstStyle/>
+          <a:p>
+            <a:pPr algn="r">
+              <a:lnSpc>
+                <a:spcPct val="100000"/>
+              </a:lnSpc>
+              <a:spcBef>
+                <a:spcPts val="0"/>
+              </a:spcBef>
+              <a:spcAft>
+                <a:spcPts val="600"/>
+              </a:spcAft>
+            </a:pPr>
+            <a:r>
+              <a:rPr sz="900" b="1">
+                <a:solidFill>
+                  <a:srgbClr val="0EA5E9"/>
+                </a:solidFill>
+                <a:latin typeface="NanumGothic"/>
+                <a:ea typeface="NanumGothic"/>
+                <a:cs typeface="NanumGothic"/>
+              </a:rPr>
+              <a:t>Day 2 · 화</a:t>
+            </a:r>
+            <a:r>
+              <a:rPr sz="900" b="1">
+                <a:solidFill>
+                  <a:srgbClr val="64748B"/>
+                </a:solidFill>
+                <a:latin typeface="NanumGothic"/>
+                <a:ea typeface="NanumGothic"/>
+                <a:cs typeface="NanumGothic"/>
+              </a:rPr>
+              <a:t>   ·   6 / 43</a:t>
             </a:r>
           </a:p>
         </p:txBody>
@@ -42094,54 +42722,7 @@
       </p:sp>
       <p:sp>
         <p:nvSpPr>
-          <p:cNvPr id="8" name="TextBox 7"/>
-          <p:cNvSpPr txBox="1"/>
-          <p:nvPr/>
-        </p:nvSpPr>
-        <p:spPr>
-          <a:xfrm>
-            <a:off x="10241280" y="6419088"/>
-            <a:ext cx="1463040" cy="365760"/>
-          </a:xfrm>
-          <a:prstGeom prst="rect">
-            <a:avLst/>
-          </a:prstGeom>
-          <a:noFill/>
-        </p:spPr>
-        <p:txBody>
-          <a:bodyPr wrap="square" anchor="ctr" lIns="0" rIns="0" tIns="0" bIns="0">
-            <a:spAutoFit/>
-          </a:bodyPr>
-          <a:lstStyle/>
-          <a:p>
-            <a:pPr algn="r">
-              <a:lnSpc>
-                <a:spcPct val="100000"/>
-              </a:lnSpc>
-              <a:spcBef>
-                <a:spcPts val="0"/>
-              </a:spcBef>
-              <a:spcAft>
-                <a:spcPts val="600"/>
-              </a:spcAft>
-            </a:pPr>
-            <a:r>
-              <a:rPr sz="900" b="1">
-                <a:solidFill>
-                  <a:srgbClr val="0EA5E9"/>
-                </a:solidFill>
-                <a:latin typeface="NanumGothic"/>
-                <a:ea typeface="NanumGothic"/>
-                <a:cs typeface="NanumGothic"/>
-              </a:rPr>
-              <a:t>Day 2 · 화</a:t>
-            </a:r>
-          </a:p>
-        </p:txBody>
-      </p:sp>
-      <p:sp>
-        <p:nvSpPr>
-          <p:cNvPr id="9" name="Oval 8"/>
+          <p:cNvPr id="8" name="Oval 7"/>
           <p:cNvSpPr/>
           <p:nvPr/>
         </p:nvSpPr>
@@ -42185,7 +42766,7 @@
       </p:sp>
       <p:sp>
         <p:nvSpPr>
-          <p:cNvPr id="10" name="TextBox 9"/>
+          <p:cNvPr id="9" name="TextBox 8"/>
           <p:cNvSpPr txBox="1"/>
           <p:nvPr/>
         </p:nvSpPr>
@@ -42232,7 +42813,7 @@
       </p:sp>
       <p:sp>
         <p:nvSpPr>
-          <p:cNvPr id="11" name="TextBox 10"/>
+          <p:cNvPr id="10" name="TextBox 9"/>
           <p:cNvSpPr txBox="1"/>
           <p:nvPr/>
         </p:nvSpPr>
@@ -42279,7 +42860,7 @@
       </p:sp>
       <p:sp>
         <p:nvSpPr>
-          <p:cNvPr id="12" name="Oval 11"/>
+          <p:cNvPr id="11" name="Oval 10"/>
           <p:cNvSpPr/>
           <p:nvPr/>
         </p:nvSpPr>
@@ -42323,7 +42904,7 @@
       </p:sp>
       <p:sp>
         <p:nvSpPr>
-          <p:cNvPr id="13" name="TextBox 12"/>
+          <p:cNvPr id="12" name="TextBox 11"/>
           <p:cNvSpPr txBox="1"/>
           <p:nvPr/>
         </p:nvSpPr>
@@ -42370,7 +42951,7 @@
       </p:sp>
       <p:sp>
         <p:nvSpPr>
-          <p:cNvPr id="14" name="TextBox 13"/>
+          <p:cNvPr id="13" name="TextBox 12"/>
           <p:cNvSpPr txBox="1"/>
           <p:nvPr/>
         </p:nvSpPr>
@@ -42417,7 +42998,7 @@
       </p:sp>
       <p:sp>
         <p:nvSpPr>
-          <p:cNvPr id="15" name="Oval 14"/>
+          <p:cNvPr id="14" name="Oval 13"/>
           <p:cNvSpPr/>
           <p:nvPr/>
         </p:nvSpPr>
@@ -42461,7 +43042,7 @@
       </p:sp>
       <p:sp>
         <p:nvSpPr>
-          <p:cNvPr id="16" name="TextBox 15"/>
+          <p:cNvPr id="15" name="TextBox 14"/>
           <p:cNvSpPr txBox="1"/>
           <p:nvPr/>
         </p:nvSpPr>
@@ -42508,7 +43089,7 @@
       </p:sp>
       <p:sp>
         <p:nvSpPr>
-          <p:cNvPr id="17" name="TextBox 16"/>
+          <p:cNvPr id="16" name="TextBox 15"/>
           <p:cNvSpPr txBox="1"/>
           <p:nvPr/>
         </p:nvSpPr>
@@ -42555,7 +43136,7 @@
       </p:sp>
       <p:sp>
         <p:nvSpPr>
-          <p:cNvPr id="18" name="Oval 17"/>
+          <p:cNvPr id="17" name="Oval 16"/>
           <p:cNvSpPr/>
           <p:nvPr/>
         </p:nvSpPr>
@@ -42599,7 +43180,7 @@
       </p:sp>
       <p:sp>
         <p:nvSpPr>
-          <p:cNvPr id="19" name="TextBox 18"/>
+          <p:cNvPr id="18" name="TextBox 17"/>
           <p:cNvSpPr txBox="1"/>
           <p:nvPr/>
         </p:nvSpPr>
@@ -42646,7 +43227,7 @@
       </p:sp>
       <p:sp>
         <p:nvSpPr>
-          <p:cNvPr id="20" name="TextBox 19"/>
+          <p:cNvPr id="19" name="TextBox 18"/>
           <p:cNvSpPr txBox="1"/>
           <p:nvPr/>
         </p:nvSpPr>
@@ -42693,7 +43274,7 @@
       </p:sp>
       <p:sp>
         <p:nvSpPr>
-          <p:cNvPr id="21" name="Rounded Rectangle 20"/>
+          <p:cNvPr id="20" name="Rounded Rectangle 19"/>
           <p:cNvSpPr/>
           <p:nvPr/>
         </p:nvSpPr>
@@ -42739,7 +43320,7 @@
       </p:sp>
       <p:sp>
         <p:nvSpPr>
-          <p:cNvPr id="22" name="TextBox 21"/>
+          <p:cNvPr id="21" name="TextBox 20"/>
           <p:cNvSpPr txBox="1"/>
           <p:nvPr/>
         </p:nvSpPr>
@@ -42791,6 +43372,64 @@
                 <a:cs typeface="NanumGothic"/>
               </a:rPr>
               <a:t>답만 내는 게 아니라 '행동'한다 — LLM과의 핵심 차이</a:t>
+            </a:r>
+          </a:p>
+        </p:txBody>
+      </p:sp>
+      <p:sp>
+        <p:nvSpPr>
+          <p:cNvPr id="22" name="TextBox 21"/>
+          <p:cNvSpPr txBox="1"/>
+          <p:nvPr/>
+        </p:nvSpPr>
+        <p:spPr>
+          <a:xfrm>
+            <a:off x="8988552" y="6419088"/>
+            <a:ext cx="2697480" cy="365760"/>
+          </a:xfrm>
+          <a:prstGeom prst="rect">
+            <a:avLst/>
+          </a:prstGeom>
+          <a:noFill/>
+        </p:spPr>
+        <p:txBody>
+          <a:bodyPr wrap="square" anchor="ctr" lIns="0" rIns="0" tIns="0" bIns="0">
+            <a:spAutoFit/>
+          </a:bodyPr>
+          <a:lstStyle/>
+          <a:p>
+            <a:pPr algn="r">
+              <a:lnSpc>
+                <a:spcPct val="100000"/>
+              </a:lnSpc>
+              <a:spcBef>
+                <a:spcPts val="0"/>
+              </a:spcBef>
+              <a:spcAft>
+                <a:spcPts val="600"/>
+              </a:spcAft>
+            </a:pPr>
+            <a:r>
+              <a:rPr sz="900" b="1">
+                <a:solidFill>
+                  <a:srgbClr val="0EA5E9"/>
+                </a:solidFill>
+                <a:latin typeface="NanumGothic"/>
+                <a:ea typeface="NanumGothic"/>
+                <a:cs typeface="NanumGothic"/>
+              </a:rPr>
+              <a:t>Day 2 · 화</a:t>
+            </a:r>
+            <a:r>
+              <a:rPr sz="900" b="1">
+                <a:solidFill>
+                  <a:srgbClr val="64748B"/>
+                </a:solidFill>
+                <a:latin typeface="NanumGothic"/>
+                <a:ea typeface="NanumGothic"/>
+                <a:cs typeface="NanumGothic"/>
+              </a:rPr>
+              <a:t>   ·   7 / 43</a:t>
             </a:r>
           </a:p>
         </p:txBody>
@@ -43088,54 +43727,7 @@
       </p:sp>
       <p:sp>
         <p:nvSpPr>
-          <p:cNvPr id="8" name="TextBox 7"/>
-          <p:cNvSpPr txBox="1"/>
-          <p:nvPr/>
-        </p:nvSpPr>
-        <p:spPr>
-          <a:xfrm>
-            <a:off x="10241280" y="6419088"/>
-            <a:ext cx="1463040" cy="365760"/>
-          </a:xfrm>
-          <a:prstGeom prst="rect">
-            <a:avLst/>
-          </a:prstGeom>
-          <a:noFill/>
-        </p:spPr>
-        <p:txBody>
-          <a:bodyPr wrap="square" anchor="ctr" lIns="0" rIns="0" tIns="0" bIns="0">
-            <a:spAutoFit/>
-          </a:bodyPr>
-          <a:lstStyle/>
-          <a:p>
-            <a:pPr algn="r">
-              <a:lnSpc>
-                <a:spcPct val="100000"/>
-              </a:lnSpc>
-              <a:spcBef>
-                <a:spcPts val="0"/>
-              </a:spcBef>
-              <a:spcAft>
-                <a:spcPts val="600"/>
-              </a:spcAft>
-            </a:pPr>
-            <a:r>
-              <a:rPr sz="900" b="1">
-                <a:solidFill>
-                  <a:srgbClr val="0EA5E9"/>
-                </a:solidFill>
-                <a:latin typeface="NanumGothic"/>
-                <a:ea typeface="NanumGothic"/>
-                <a:cs typeface="NanumGothic"/>
-              </a:rPr>
-              <a:t>Day 2 · 화</a:t>
-            </a:r>
-          </a:p>
-        </p:txBody>
-      </p:sp>
-      <p:sp>
-        <p:nvSpPr>
-          <p:cNvPr id="9" name="Rounded Rectangle 8"/>
+          <p:cNvPr id="8" name="Rounded Rectangle 7"/>
           <p:cNvSpPr/>
           <p:nvPr/>
         </p:nvSpPr>
@@ -43181,7 +43773,7 @@
       </p:sp>
       <p:sp>
         <p:nvSpPr>
-          <p:cNvPr id="10" name="Rounded Rectangle 9"/>
+          <p:cNvPr id="9" name="Rounded Rectangle 8"/>
           <p:cNvSpPr/>
           <p:nvPr/>
         </p:nvSpPr>
@@ -43225,7 +43817,7 @@
       </p:sp>
       <p:sp>
         <p:nvSpPr>
-          <p:cNvPr id="11" name="TextBox 10"/>
+          <p:cNvPr id="10" name="TextBox 9"/>
           <p:cNvSpPr txBox="1"/>
           <p:nvPr/>
         </p:nvSpPr>
@@ -43272,7 +43864,7 @@
       </p:sp>
       <p:sp>
         <p:nvSpPr>
-          <p:cNvPr id="12" name="TextBox 11"/>
+          <p:cNvPr id="11" name="TextBox 10"/>
           <p:cNvSpPr txBox="1"/>
           <p:nvPr/>
         </p:nvSpPr>
@@ -43330,7 +43922,7 @@
       </p:sp>
       <p:sp>
         <p:nvSpPr>
-          <p:cNvPr id="13" name="TextBox 12"/>
+          <p:cNvPr id="12" name="TextBox 11"/>
           <p:cNvSpPr txBox="1"/>
           <p:nvPr/>
         </p:nvSpPr>
@@ -43388,7 +43980,7 @@
       </p:sp>
       <p:sp>
         <p:nvSpPr>
-          <p:cNvPr id="14" name="TextBox 13"/>
+          <p:cNvPr id="13" name="TextBox 12"/>
           <p:cNvSpPr txBox="1"/>
           <p:nvPr/>
         </p:nvSpPr>
@@ -43446,7 +44038,7 @@
       </p:sp>
       <p:sp>
         <p:nvSpPr>
-          <p:cNvPr id="15" name="TextBox 14"/>
+          <p:cNvPr id="14" name="TextBox 13"/>
           <p:cNvSpPr txBox="1"/>
           <p:nvPr/>
         </p:nvSpPr>
@@ -43504,7 +44096,7 @@
       </p:sp>
       <p:sp>
         <p:nvSpPr>
-          <p:cNvPr id="16" name="Rounded Rectangle 15"/>
+          <p:cNvPr id="15" name="Rounded Rectangle 14"/>
           <p:cNvSpPr/>
           <p:nvPr/>
         </p:nvSpPr>
@@ -43550,7 +44142,7 @@
       </p:sp>
       <p:sp>
         <p:nvSpPr>
-          <p:cNvPr id="17" name="Rounded Rectangle 16"/>
+          <p:cNvPr id="16" name="Rounded Rectangle 15"/>
           <p:cNvSpPr/>
           <p:nvPr/>
         </p:nvSpPr>
@@ -43594,7 +44186,7 @@
       </p:sp>
       <p:sp>
         <p:nvSpPr>
-          <p:cNvPr id="18" name="TextBox 17"/>
+          <p:cNvPr id="17" name="TextBox 16"/>
           <p:cNvSpPr txBox="1"/>
           <p:nvPr/>
         </p:nvSpPr>
@@ -43641,7 +44233,7 @@
       </p:sp>
       <p:sp>
         <p:nvSpPr>
-          <p:cNvPr id="19" name="TextBox 18"/>
+          <p:cNvPr id="18" name="TextBox 17"/>
           <p:cNvSpPr txBox="1"/>
           <p:nvPr/>
         </p:nvSpPr>
@@ -43699,7 +44291,7 @@
       </p:sp>
       <p:sp>
         <p:nvSpPr>
-          <p:cNvPr id="20" name="TextBox 19"/>
+          <p:cNvPr id="19" name="TextBox 18"/>
           <p:cNvSpPr txBox="1"/>
           <p:nvPr/>
         </p:nvSpPr>
@@ -43757,7 +44349,7 @@
       </p:sp>
       <p:sp>
         <p:nvSpPr>
-          <p:cNvPr id="21" name="TextBox 20"/>
+          <p:cNvPr id="20" name="TextBox 19"/>
           <p:cNvSpPr txBox="1"/>
           <p:nvPr/>
         </p:nvSpPr>
@@ -43815,7 +44407,7 @@
       </p:sp>
       <p:sp>
         <p:nvSpPr>
-          <p:cNvPr id="22" name="TextBox 21"/>
+          <p:cNvPr id="21" name="TextBox 20"/>
           <p:cNvSpPr txBox="1"/>
           <p:nvPr/>
         </p:nvSpPr>
@@ -43867,6 +44459,64 @@
                 <a:cs typeface="NanumGothic"/>
               </a:rPr>
               <a:t>스스로 반복·판단</a:t>
+            </a:r>
+          </a:p>
+        </p:txBody>
+      </p:sp>
+      <p:sp>
+        <p:nvSpPr>
+          <p:cNvPr id="22" name="TextBox 21"/>
+          <p:cNvSpPr txBox="1"/>
+          <p:nvPr/>
+        </p:nvSpPr>
+        <p:spPr>
+          <a:xfrm>
+            <a:off x="8988552" y="6419088"/>
+            <a:ext cx="2697480" cy="365760"/>
+          </a:xfrm>
+          <a:prstGeom prst="rect">
+            <a:avLst/>
+          </a:prstGeom>
+          <a:noFill/>
+        </p:spPr>
+        <p:txBody>
+          <a:bodyPr wrap="square" anchor="ctr" lIns="0" rIns="0" tIns="0" bIns="0">
+            <a:spAutoFit/>
+          </a:bodyPr>
+          <a:lstStyle/>
+          <a:p>
+            <a:pPr algn="r">
+              <a:lnSpc>
+                <a:spcPct val="100000"/>
+              </a:lnSpc>
+              <a:spcBef>
+                <a:spcPts val="0"/>
+              </a:spcBef>
+              <a:spcAft>
+                <a:spcPts val="600"/>
+              </a:spcAft>
+            </a:pPr>
+            <a:r>
+              <a:rPr sz="900" b="1">
+                <a:solidFill>
+                  <a:srgbClr val="0EA5E9"/>
+                </a:solidFill>
+                <a:latin typeface="NanumGothic"/>
+                <a:ea typeface="NanumGothic"/>
+                <a:cs typeface="NanumGothic"/>
+              </a:rPr>
+              <a:t>Day 2 · 화</a:t>
+            </a:r>
+            <a:r>
+              <a:rPr sz="900" b="1">
+                <a:solidFill>
+                  <a:srgbClr val="64748B"/>
+                </a:solidFill>
+                <a:latin typeface="NanumGothic"/>
+                <a:ea typeface="NanumGothic"/>
+                <a:cs typeface="NanumGothic"/>
+              </a:rPr>
+              <a:t>   ·   8 / 43</a:t>
             </a:r>
           </a:p>
         </p:txBody>
@@ -44164,54 +44814,7 @@
       </p:sp>
       <p:sp>
         <p:nvSpPr>
-          <p:cNvPr id="8" name="TextBox 7"/>
-          <p:cNvSpPr txBox="1"/>
-          <p:nvPr/>
-        </p:nvSpPr>
-        <p:spPr>
-          <a:xfrm>
-            <a:off x="10241280" y="6419088"/>
-            <a:ext cx="1463040" cy="365760"/>
-          </a:xfrm>
-          <a:prstGeom prst="rect">
-            <a:avLst/>
-          </a:prstGeom>
-          <a:noFill/>
-        </p:spPr>
-        <p:txBody>
-          <a:bodyPr wrap="square" anchor="ctr" lIns="0" rIns="0" tIns="0" bIns="0">
-            <a:spAutoFit/>
-          </a:bodyPr>
-          <a:lstStyle/>
-          <a:p>
-            <a:pPr algn="r">
-              <a:lnSpc>
-                <a:spcPct val="100000"/>
-              </a:lnSpc>
-              <a:spcBef>
-                <a:spcPts val="0"/>
-              </a:spcBef>
-              <a:spcAft>
-                <a:spcPts val="600"/>
-              </a:spcAft>
-            </a:pPr>
-            <a:r>
-              <a:rPr sz="900" b="1">
-                <a:solidFill>
-                  <a:srgbClr val="0EA5E9"/>
-                </a:solidFill>
-                <a:latin typeface="NanumGothic"/>
-                <a:ea typeface="NanumGothic"/>
-                <a:cs typeface="NanumGothic"/>
-              </a:rPr>
-              <a:t>Day 2 · 화</a:t>
-            </a:r>
-          </a:p>
-        </p:txBody>
-      </p:sp>
-      <p:sp>
-        <p:nvSpPr>
-          <p:cNvPr id="9" name="Rounded Rectangle 8"/>
+          <p:cNvPr id="8" name="Rounded Rectangle 7"/>
           <p:cNvSpPr/>
           <p:nvPr/>
         </p:nvSpPr>
@@ -44257,7 +44860,7 @@
       </p:sp>
       <p:sp>
         <p:nvSpPr>
-          <p:cNvPr id="10" name="Rectangle 9"/>
+          <p:cNvPr id="9" name="Rectangle 8"/>
           <p:cNvSpPr/>
           <p:nvPr/>
         </p:nvSpPr>
@@ -44301,7 +44904,7 @@
       </p:sp>
       <p:sp>
         <p:nvSpPr>
-          <p:cNvPr id="11" name="TextBox 10"/>
+          <p:cNvPr id="10" name="TextBox 9"/>
           <p:cNvSpPr txBox="1"/>
           <p:nvPr/>
         </p:nvSpPr>
@@ -44348,7 +44951,7 @@
       </p:sp>
       <p:sp>
         <p:nvSpPr>
-          <p:cNvPr id="12" name="TextBox 11"/>
+          <p:cNvPr id="11" name="TextBox 10"/>
           <p:cNvSpPr txBox="1"/>
           <p:nvPr/>
         </p:nvSpPr>
@@ -44395,7 +44998,7 @@
       </p:sp>
       <p:sp>
         <p:nvSpPr>
-          <p:cNvPr id="13" name="TextBox 12"/>
+          <p:cNvPr id="12" name="TextBox 11"/>
           <p:cNvSpPr txBox="1"/>
           <p:nvPr/>
         </p:nvSpPr>
@@ -44442,7 +45045,7 @@
       </p:sp>
       <p:sp>
         <p:nvSpPr>
-          <p:cNvPr id="14" name="TextBox 13"/>
+          <p:cNvPr id="13" name="TextBox 12"/>
           <p:cNvSpPr txBox="1"/>
           <p:nvPr/>
         </p:nvSpPr>
@@ -44489,7 +45092,7 @@
       </p:sp>
       <p:sp>
         <p:nvSpPr>
-          <p:cNvPr id="15" name="Rounded Rectangle 14"/>
+          <p:cNvPr id="14" name="Rounded Rectangle 13"/>
           <p:cNvSpPr/>
           <p:nvPr/>
         </p:nvSpPr>
@@ -44535,7 +45138,7 @@
       </p:sp>
       <p:sp>
         <p:nvSpPr>
-          <p:cNvPr id="16" name="Rectangle 15"/>
+          <p:cNvPr id="15" name="Rectangle 14"/>
           <p:cNvSpPr/>
           <p:nvPr/>
         </p:nvSpPr>
@@ -44579,7 +45182,7 @@
       </p:sp>
       <p:sp>
         <p:nvSpPr>
-          <p:cNvPr id="17" name="TextBox 16"/>
+          <p:cNvPr id="16" name="TextBox 15"/>
           <p:cNvSpPr txBox="1"/>
           <p:nvPr/>
         </p:nvSpPr>
@@ -44626,7 +45229,7 @@
       </p:sp>
       <p:sp>
         <p:nvSpPr>
-          <p:cNvPr id="18" name="TextBox 17"/>
+          <p:cNvPr id="17" name="TextBox 16"/>
           <p:cNvSpPr txBox="1"/>
           <p:nvPr/>
         </p:nvSpPr>
@@ -44673,7 +45276,7 @@
       </p:sp>
       <p:sp>
         <p:nvSpPr>
-          <p:cNvPr id="19" name="TextBox 18"/>
+          <p:cNvPr id="18" name="TextBox 17"/>
           <p:cNvSpPr txBox="1"/>
           <p:nvPr/>
         </p:nvSpPr>
@@ -44720,7 +45323,7 @@
       </p:sp>
       <p:sp>
         <p:nvSpPr>
-          <p:cNvPr id="20" name="TextBox 19"/>
+          <p:cNvPr id="19" name="TextBox 18"/>
           <p:cNvSpPr txBox="1"/>
           <p:nvPr/>
         </p:nvSpPr>
@@ -44767,7 +45370,7 @@
       </p:sp>
       <p:sp>
         <p:nvSpPr>
-          <p:cNvPr id="21" name="Rounded Rectangle 20"/>
+          <p:cNvPr id="20" name="Rounded Rectangle 19"/>
           <p:cNvSpPr/>
           <p:nvPr/>
         </p:nvSpPr>
@@ -44813,7 +45416,7 @@
       </p:sp>
       <p:sp>
         <p:nvSpPr>
-          <p:cNvPr id="22" name="Rectangle 21"/>
+          <p:cNvPr id="21" name="Rectangle 20"/>
           <p:cNvSpPr/>
           <p:nvPr/>
         </p:nvSpPr>
@@ -44857,7 +45460,7 @@
       </p:sp>
       <p:sp>
         <p:nvSpPr>
-          <p:cNvPr id="23" name="TextBox 22"/>
+          <p:cNvPr id="22" name="TextBox 21"/>
           <p:cNvSpPr txBox="1"/>
           <p:nvPr/>
         </p:nvSpPr>
@@ -44904,7 +45507,7 @@
       </p:sp>
       <p:sp>
         <p:nvSpPr>
-          <p:cNvPr id="24" name="TextBox 23"/>
+          <p:cNvPr id="23" name="TextBox 22"/>
           <p:cNvSpPr txBox="1"/>
           <p:nvPr/>
         </p:nvSpPr>
@@ -44951,7 +45554,7 @@
       </p:sp>
       <p:sp>
         <p:nvSpPr>
-          <p:cNvPr id="25" name="TextBox 24"/>
+          <p:cNvPr id="24" name="TextBox 23"/>
           <p:cNvSpPr txBox="1"/>
           <p:nvPr/>
         </p:nvSpPr>
@@ -44998,7 +45601,7 @@
       </p:sp>
       <p:sp>
         <p:nvSpPr>
-          <p:cNvPr id="26" name="TextBox 25"/>
+          <p:cNvPr id="25" name="TextBox 24"/>
           <p:cNvSpPr txBox="1"/>
           <p:nvPr/>
         </p:nvSpPr>
@@ -45045,7 +45648,7 @@
       </p:sp>
       <p:sp>
         <p:nvSpPr>
-          <p:cNvPr id="27" name="Rounded Rectangle 26"/>
+          <p:cNvPr id="26" name="Rounded Rectangle 25"/>
           <p:cNvSpPr/>
           <p:nvPr/>
         </p:nvSpPr>
@@ -45091,7 +45694,7 @@
       </p:sp>
       <p:sp>
         <p:nvSpPr>
-          <p:cNvPr id="28" name="Rectangle 27"/>
+          <p:cNvPr id="27" name="Rectangle 26"/>
           <p:cNvSpPr/>
           <p:nvPr/>
         </p:nvSpPr>
@@ -45135,7 +45738,7 @@
       </p:sp>
       <p:sp>
         <p:nvSpPr>
-          <p:cNvPr id="29" name="TextBox 28"/>
+          <p:cNvPr id="28" name="TextBox 27"/>
           <p:cNvSpPr txBox="1"/>
           <p:nvPr/>
         </p:nvSpPr>
@@ -45182,7 +45785,7 @@
       </p:sp>
       <p:sp>
         <p:nvSpPr>
-          <p:cNvPr id="30" name="TextBox 29"/>
+          <p:cNvPr id="29" name="TextBox 28"/>
           <p:cNvSpPr txBox="1"/>
           <p:nvPr/>
         </p:nvSpPr>
@@ -45229,7 +45832,7 @@
       </p:sp>
       <p:sp>
         <p:nvSpPr>
-          <p:cNvPr id="31" name="TextBox 30"/>
+          <p:cNvPr id="30" name="TextBox 29"/>
           <p:cNvSpPr txBox="1"/>
           <p:nvPr/>
         </p:nvSpPr>
@@ -45276,7 +45879,7 @@
       </p:sp>
       <p:sp>
         <p:nvSpPr>
-          <p:cNvPr id="32" name="Rounded Rectangle 31"/>
+          <p:cNvPr id="31" name="Rounded Rectangle 30"/>
           <p:cNvSpPr/>
           <p:nvPr/>
         </p:nvSpPr>
@@ -45322,7 +45925,7 @@
       </p:sp>
       <p:sp>
         <p:nvSpPr>
-          <p:cNvPr id="33" name="TextBox 32"/>
+          <p:cNvPr id="32" name="TextBox 31"/>
           <p:cNvSpPr txBox="1"/>
           <p:nvPr/>
         </p:nvSpPr>
@@ -45374,6 +45977,64 @@
                 <a:cs typeface="NanumGothic"/>
               </a:rPr>
               <a:t>목표를 달성할 때까지 이 루프를 반복 — 이제 각 단계를 하나씩</a:t>
+            </a:r>
+          </a:p>
+        </p:txBody>
+      </p:sp>
+      <p:sp>
+        <p:nvSpPr>
+          <p:cNvPr id="33" name="TextBox 32"/>
+          <p:cNvSpPr txBox="1"/>
+          <p:nvPr/>
+        </p:nvSpPr>
+        <p:spPr>
+          <a:xfrm>
+            <a:off x="8988552" y="6419088"/>
+            <a:ext cx="2697480" cy="365760"/>
+          </a:xfrm>
+          <a:prstGeom prst="rect">
+            <a:avLst/>
+          </a:prstGeom>
+          <a:noFill/>
+        </p:spPr>
+        <p:txBody>
+          <a:bodyPr wrap="square" anchor="ctr" lIns="0" rIns="0" tIns="0" bIns="0">
+            <a:spAutoFit/>
+          </a:bodyPr>
+          <a:lstStyle/>
+          <a:p>
+            <a:pPr algn="r">
+              <a:lnSpc>
+                <a:spcPct val="100000"/>
+              </a:lnSpc>
+              <a:spcBef>
+                <a:spcPts val="0"/>
+              </a:spcBef>
+              <a:spcAft>
+                <a:spcPts val="600"/>
+              </a:spcAft>
+            </a:pPr>
+            <a:r>
+              <a:rPr sz="900" b="1">
+                <a:solidFill>
+                  <a:srgbClr val="0EA5E9"/>
+                </a:solidFill>
+                <a:latin typeface="NanumGothic"/>
+                <a:ea typeface="NanumGothic"/>
+                <a:cs typeface="NanumGothic"/>
+              </a:rPr>
+              <a:t>Day 2 · 화</a:t>
+            </a:r>
+            <a:r>
+              <a:rPr sz="900" b="1">
+                <a:solidFill>
+                  <a:srgbClr val="64748B"/>
+                </a:solidFill>
+                <a:latin typeface="NanumGothic"/>
+                <a:ea typeface="NanumGothic"/>
+                <a:cs typeface="NanumGothic"/>
+              </a:rPr>
+              <a:t>   ·   9 / 43</a:t>
             </a:r>
           </a:p>
         </p:txBody>

--- a/slides/day2.pptx
+++ b/slides/day2.pptx
@@ -4349,7 +4349,7 @@
                 <a:ea typeface="NanumGothic"/>
                 <a:cs typeface="NanumGothic"/>
               </a:rPr>
-              <a:t>AI 에이전트와 응용  ·  원광대학교 5일 교육</a:t>
+              <a:t>신약 개발을 위한 AI Agent 특강</a:t>
             </a:r>
           </a:p>
         </p:txBody>
@@ -5112,7 +5112,7 @@
                 <a:ea typeface="NanumGothic"/>
                 <a:cs typeface="NanumGothic"/>
               </a:rPr>
-              <a:t>AI 에이전트와 응용  ·  원광대학교 5일 교육</a:t>
+              <a:t>신약 개발을 위한 AI Agent 특강</a:t>
             </a:r>
           </a:p>
         </p:txBody>
@@ -5875,7 +5875,7 @@
                 <a:ea typeface="NanumGothic"/>
                 <a:cs typeface="NanumGothic"/>
               </a:rPr>
-              <a:t>AI 에이전트와 응용  ·  원광대학교 5일 교육</a:t>
+              <a:t>신약 개발을 위한 AI Agent 특강</a:t>
             </a:r>
           </a:p>
         </p:txBody>
@@ -6638,7 +6638,7 @@
                 <a:ea typeface="NanumGothic"/>
                 <a:cs typeface="NanumGothic"/>
               </a:rPr>
-              <a:t>AI 에이전트와 응용  ·  원광대학교 5일 교육</a:t>
+              <a:t>신약 개발을 위한 AI Agent 특강</a:t>
             </a:r>
           </a:p>
         </p:txBody>
@@ -7505,7 +7505,7 @@
                 <a:ea typeface="NanumGothic"/>
                 <a:cs typeface="NanumGothic"/>
               </a:rPr>
-              <a:t>AI 에이전트와 응용  ·  원광대학교 5일 교육</a:t>
+              <a:t>신약 개발을 위한 AI Agent 특강</a:t>
             </a:r>
           </a:p>
         </p:txBody>
@@ -8510,7 +8510,7 @@
                 <a:ea typeface="NanumGothic"/>
                 <a:cs typeface="NanumGothic"/>
               </a:rPr>
-              <a:t>AI 에이전트와 응용  ·  원광대학교 5일 교육</a:t>
+              <a:t>신약 개발을 위한 AI Agent 특강</a:t>
             </a:r>
           </a:p>
         </p:txBody>
@@ -9273,7 +9273,7 @@
                 <a:ea typeface="NanumGothic"/>
                 <a:cs typeface="NanumGothic"/>
               </a:rPr>
-              <a:t>AI 에이전트와 응용  ·  원광대학교 5일 교육</a:t>
+              <a:t>신약 개발을 위한 AI Agent 특강</a:t>
             </a:r>
           </a:p>
         </p:txBody>
@@ -10278,7 +10278,7 @@
                 <a:ea typeface="NanumGothic"/>
                 <a:cs typeface="NanumGothic"/>
               </a:rPr>
-              <a:t>AI 에이전트와 응용  ·  원광대학교 5일 교육</a:t>
+              <a:t>신약 개발을 위한 AI Agent 특강</a:t>
             </a:r>
           </a:p>
         </p:txBody>
@@ -11283,7 +11283,7 @@
                 <a:ea typeface="NanumGothic"/>
                 <a:cs typeface="NanumGothic"/>
               </a:rPr>
-              <a:t>AI 에이전트와 응용  ·  원광대학교 5일 교육</a:t>
+              <a:t>신약 개발을 위한 AI Agent 특강</a:t>
             </a:r>
           </a:p>
         </p:txBody>
@@ -12801,7 +12801,7 @@
                 <a:ea typeface="NanumGothic"/>
                 <a:cs typeface="NanumGothic"/>
               </a:rPr>
-              <a:t>AI 에이전트와 응용  ·  원광대학교 5일 교육</a:t>
+              <a:t>신약 개발을 위한 AI Agent 특강</a:t>
             </a:r>
           </a:p>
         </p:txBody>
@@ -13564,7 +13564,7 @@
                 <a:ea typeface="NanumGothic"/>
                 <a:cs typeface="NanumGothic"/>
               </a:rPr>
-              <a:t>AI 에이전트와 응용  ·  원광대학교 5일 교육</a:t>
+              <a:t>신약 개발을 위한 AI Agent 특강</a:t>
             </a:r>
           </a:p>
         </p:txBody>
@@ -14836,7 +14836,7 @@
                 <a:ea typeface="NanumGothic"/>
                 <a:cs typeface="NanumGothic"/>
               </a:rPr>
-              <a:t>AI 에이전트와 응용  ·  원광대학교 5일 교육</a:t>
+              <a:t>신약 개발을 위한 AI Agent 특강</a:t>
             </a:r>
           </a:p>
         </p:txBody>
@@ -15599,7 +15599,7 @@
                 <a:ea typeface="NanumGothic"/>
                 <a:cs typeface="NanumGothic"/>
               </a:rPr>
-              <a:t>AI 에이전트와 응용  ·  원광대학교 5일 교육</a:t>
+              <a:t>신약 개발을 위한 AI Agent 특강</a:t>
             </a:r>
           </a:p>
         </p:txBody>
@@ -16362,7 +16362,7 @@
                 <a:ea typeface="NanumGothic"/>
                 <a:cs typeface="NanumGothic"/>
               </a:rPr>
-              <a:t>AI 에이전트와 응용  ·  원광대학교 5일 교육</a:t>
+              <a:t>신약 개발을 위한 AI Agent 특강</a:t>
             </a:r>
           </a:p>
         </p:txBody>
@@ -17229,7 +17229,7 @@
                 <a:ea typeface="NanumGothic"/>
                 <a:cs typeface="NanumGothic"/>
               </a:rPr>
-              <a:t>AI 에이전트와 응용  ·  원광대학교 5일 교육</a:t>
+              <a:t>신약 개발을 위한 AI Agent 특강</a:t>
             </a:r>
           </a:p>
         </p:txBody>
@@ -18234,7 +18234,7 @@
                 <a:ea typeface="NanumGothic"/>
                 <a:cs typeface="NanumGothic"/>
               </a:rPr>
-              <a:t>AI 에이전트와 응용  ·  원광대학교 5일 교육</a:t>
+              <a:t>신약 개발을 위한 AI Agent 특강</a:t>
             </a:r>
           </a:p>
         </p:txBody>
@@ -20030,7 +20030,7 @@
                 <a:ea typeface="NanumGothic"/>
                 <a:cs typeface="NanumGothic"/>
               </a:rPr>
-              <a:t>AI 에이전트와 응용  ·  원광대학교 5일 교육</a:t>
+              <a:t>신약 개발을 위한 AI Agent 특강</a:t>
             </a:r>
           </a:p>
         </p:txBody>
@@ -21395,7 +21395,7 @@
                 <a:ea typeface="NanumGothic"/>
                 <a:cs typeface="NanumGothic"/>
               </a:rPr>
-              <a:t>AI 에이전트와 응용  ·  원광대학교 5일 교육</a:t>
+              <a:t>신약 개발을 위한 AI Agent 특강</a:t>
             </a:r>
           </a:p>
         </p:txBody>
@@ -22988,7 +22988,7 @@
                 <a:ea typeface="NanumGothic"/>
                 <a:cs typeface="NanumGothic"/>
               </a:rPr>
-              <a:t>AI 에이전트와 응용  ·  원광대학교 5일 교육</a:t>
+              <a:t>신약 개발을 위한 AI Agent 특강</a:t>
             </a:r>
           </a:p>
         </p:txBody>
@@ -23751,7 +23751,7 @@
                 <a:ea typeface="NanumGothic"/>
                 <a:cs typeface="NanumGothic"/>
               </a:rPr>
-              <a:t>AI 에이전트와 응용  ·  원광대학교 5일 교육</a:t>
+              <a:t>신약 개발을 위한 AI Agent 특강</a:t>
             </a:r>
           </a:p>
         </p:txBody>
@@ -24838,7 +24838,7 @@
                 <a:ea typeface="NanumGothic"/>
                 <a:cs typeface="NanumGothic"/>
               </a:rPr>
-              <a:t>AI 에이전트와 응용  ·  원광대학교 5일 교육</a:t>
+              <a:t>신약 개발을 위한 AI Agent 특강</a:t>
             </a:r>
           </a:p>
         </p:txBody>
@@ -26327,7 +26327,7 @@
                 <a:ea typeface="NanumGothic"/>
                 <a:cs typeface="NanumGothic"/>
               </a:rPr>
-              <a:t>AI 에이전트와 응용  ·  원광대학교 5일 교육</a:t>
+              <a:t>신약 개발을 위한 AI Agent 특강</a:t>
             </a:r>
           </a:p>
         </p:txBody>
@@ -27194,7 +27194,7 @@
                 <a:ea typeface="NanumGothic"/>
                 <a:cs typeface="NanumGothic"/>
               </a:rPr>
-              <a:t>AI 에이전트와 응용  ·  원광대학교 5일 교육</a:t>
+              <a:t>신약 개발을 위한 AI Agent 특강</a:t>
             </a:r>
           </a:p>
         </p:txBody>
@@ -28281,7 +28281,7 @@
                 <a:ea typeface="NanumGothic"/>
                 <a:cs typeface="NanumGothic"/>
               </a:rPr>
-              <a:t>AI 에이전트와 응용  ·  원광대학교 5일 교육</a:t>
+              <a:t>신약 개발을 위한 AI Agent 특강</a:t>
             </a:r>
           </a:p>
         </p:txBody>
@@ -29044,7 +29044,7 @@
                 <a:ea typeface="NanumGothic"/>
                 <a:cs typeface="NanumGothic"/>
               </a:rPr>
-              <a:t>AI 에이전트와 응용  ·  원광대학교 5일 교육</a:t>
+              <a:t>신약 개발을 위한 AI Agent 특강</a:t>
             </a:r>
           </a:p>
         </p:txBody>
@@ -30538,7 +30538,7 @@
                 <a:ea typeface="NanumGothic"/>
                 <a:cs typeface="NanumGothic"/>
               </a:rPr>
-              <a:t>AI 에이전트와 응용  ·  원광대학교 5일 교육</a:t>
+              <a:t>신약 개발을 위한 AI Agent 특강</a:t>
             </a:r>
           </a:p>
         </p:txBody>
@@ -32131,7 +32131,7 @@
                 <a:ea typeface="NanumGothic"/>
                 <a:cs typeface="NanumGothic"/>
               </a:rPr>
-              <a:t>AI 에이전트와 응용  ·  원광대학교 5일 교육</a:t>
+              <a:t>신약 개발을 위한 AI Agent 특강</a:t>
             </a:r>
           </a:p>
         </p:txBody>
@@ -33218,7 +33218,7 @@
                 <a:ea typeface="NanumGothic"/>
                 <a:cs typeface="NanumGothic"/>
               </a:rPr>
-              <a:t>AI 에이전트와 응용  ·  원광대학교 5일 교육</a:t>
+              <a:t>신약 개발을 위한 AI Agent 특강</a:t>
             </a:r>
           </a:p>
         </p:txBody>
@@ -33981,7 +33981,7 @@
                 <a:ea typeface="NanumGothic"/>
                 <a:cs typeface="NanumGothic"/>
               </a:rPr>
-              <a:t>AI 에이전트와 응용  ·  원광대학교 5일 교육</a:t>
+              <a:t>신약 개발을 위한 AI Agent 특강</a:t>
             </a:r>
           </a:p>
         </p:txBody>
@@ -34744,7 +34744,7 @@
                 <a:ea typeface="NanumGothic"/>
                 <a:cs typeface="NanumGothic"/>
               </a:rPr>
-              <a:t>AI 에이전트와 응용  ·  원광대학교 5일 교육</a:t>
+              <a:t>신약 개발을 위한 AI Agent 특강</a:t>
             </a:r>
           </a:p>
         </p:txBody>
@@ -35971,7 +35971,7 @@
                 <a:ea typeface="NanumGothic"/>
                 <a:cs typeface="NanumGothic"/>
               </a:rPr>
-              <a:t>AI 에이전트와 응용  ·  원광대학교 5일 교육</a:t>
+              <a:t>신약 개발을 위한 AI Agent 특강</a:t>
             </a:r>
           </a:p>
         </p:txBody>
@@ -36734,7 +36734,7 @@
                 <a:ea typeface="NanumGothic"/>
                 <a:cs typeface="NanumGothic"/>
               </a:rPr>
-              <a:t>AI 에이전트와 응용  ·  원광대학교 5일 교육</a:t>
+              <a:t>신약 개발을 위한 AI Agent 특강</a:t>
             </a:r>
           </a:p>
         </p:txBody>
@@ -37497,7 +37497,7 @@
                 <a:ea typeface="NanumGothic"/>
                 <a:cs typeface="NanumGothic"/>
               </a:rPr>
-              <a:t>AI 에이전트와 응용  ·  원광대학교 5일 교육</a:t>
+              <a:t>신약 개발을 위한 AI Agent 특강</a:t>
             </a:r>
           </a:p>
         </p:txBody>
@@ -38630,7 +38630,7 @@
                 <a:ea typeface="NanumGothic"/>
                 <a:cs typeface="NanumGothic"/>
               </a:rPr>
-              <a:t>AI 에이전트와 응용  ·  원광대학교 5일 교육</a:t>
+              <a:t>신약 개발을 위한 AI Agent 특강</a:t>
             </a:r>
           </a:p>
         </p:txBody>
@@ -39439,7 +39439,7 @@
                 <a:ea typeface="NanumGothic"/>
                 <a:cs typeface="NanumGothic"/>
               </a:rPr>
-              <a:t>AI 에이전트와 응용  ·  원광대학교 5일 교육</a:t>
+              <a:t>신약 개발을 위한 AI Agent 특강</a:t>
             </a:r>
           </a:p>
         </p:txBody>
@@ -41952,7 +41952,7 @@
                 <a:ea typeface="NanumGothic"/>
                 <a:cs typeface="NanumGothic"/>
               </a:rPr>
-              <a:t>AI 에이전트와 응용  ·  원광대학교 5일 교육</a:t>
+              <a:t>신약 개발을 위한 AI Agent 특강</a:t>
             </a:r>
           </a:p>
         </p:txBody>
@@ -42715,7 +42715,7 @@
                 <a:ea typeface="NanumGothic"/>
                 <a:cs typeface="NanumGothic"/>
               </a:rPr>
-              <a:t>AI 에이전트와 응용  ·  원광대학교 5일 교육</a:t>
+              <a:t>신약 개발을 위한 AI Agent 특강</a:t>
             </a:r>
           </a:p>
         </p:txBody>
@@ -43720,7 +43720,7 @@
                 <a:ea typeface="NanumGothic"/>
                 <a:cs typeface="NanumGothic"/>
               </a:rPr>
-              <a:t>AI 에이전트와 응용  ·  원광대학교 5일 교육</a:t>
+              <a:t>신약 개발을 위한 AI Agent 특강</a:t>
             </a:r>
           </a:p>
         </p:txBody>
@@ -44807,7 +44807,7 @@
                 <a:ea typeface="NanumGothic"/>
                 <a:cs typeface="NanumGothic"/>
               </a:rPr>
-              <a:t>AI 에이전트와 응용  ·  원광대학교 5일 교육</a:t>
+              <a:t>신약 개발을 위한 AI Agent 특강</a:t>
             </a:r>
           </a:p>
         </p:txBody>

--- a/slides/day2.pptx
+++ b/slides/day2.pptx
@@ -7156,7 +7156,7 @@
                 <a:ea typeface="NanumGothic"/>
                 <a:cs typeface="NanumGothic"/>
               </a:rPr>
-              <a:t>이 반복이 LLM과 에이전트를 가르는 핵심</a:t>
+              <a:t>이 반복 구조가 LLM과 에이전트를 구분하는 핵심이다.</a:t>
             </a:r>
           </a:p>
         </p:txBody>
@@ -8161,7 +8161,7 @@
                 <a:ea typeface="NanumGothic"/>
                 <a:cs typeface="NanumGothic"/>
               </a:rPr>
-              <a:t>도구가 LLM의 한계(최신성·계산·실행)를 메운다</a:t>
+              <a:t>도구는 최신성·계산·실행과 같은 LLM의 한계를 보완한다.</a:t>
             </a:r>
           </a:p>
         </p:txBody>
@@ -9929,7 +9929,7 @@
                 <a:ea typeface="NanumGothic"/>
                 <a:cs typeface="NanumGothic"/>
               </a:rPr>
-              <a:t>자율성이 높을수록 검증·안전장치가 중요</a:t>
+              <a:t>자율성이 높아질수록 검증과 안전장치의 중요성도 함께 커진다.</a:t>
             </a:r>
           </a:p>
         </p:txBody>
@@ -10934,7 +10934,7 @@
                 <a:ea typeface="NanumGothic"/>
                 <a:cs typeface="NanumGothic"/>
               </a:rPr>
-              <a:t>성공담은 생존편향 큼 — 검증·보안·유지보수가 취약</a:t>
+              <a:t>성공 사례는 생존 편향이 크며, 바이브코딩 결과물은 검증·보안·유지보수 측면에서 취약할 수 있다.</a:t>
             </a:r>
           </a:p>
         </p:txBody>
@@ -12452,7 +12452,7 @@
                 <a:ea typeface="NanumGothic"/>
                 <a:cs typeface="NanumGothic"/>
               </a:rPr>
-              <a:t>큰 한 번보다, 작은 단위로 반복하는 것이 핵심 — 이제 각 단계를 하나씩</a:t>
+              <a:t>한 번에 크게 시도하기보다 작은 단위로 반복하는 것이 핵심이며, 이어서 각 단계를 차례로 살펴본다.</a:t>
             </a:r>
           </a:p>
         </p:txBody>
@@ -16880,7 +16880,7 @@
                 <a:ea typeface="NanumGothic"/>
                 <a:cs typeface="NanumGothic"/>
               </a:rPr>
-              <a:t>검증 없는 반복은 위험 — 사람이 매번 결과를 확인</a:t>
+              <a:t>검증 없는 반복은 위험하므로, 사람이 매 단계의 결과를 직접 확인해야 한다.</a:t>
             </a:r>
           </a:p>
         </p:txBody>
@@ -17885,7 +17885,7 @@
                 <a:ea typeface="NanumGothic"/>
                 <a:cs typeface="NanumGothic"/>
               </a:rPr>
-              <a:t>자율성↑=위험↑ — 사람 승인·백업·검증 필수</a:t>
+              <a:t>자율성이 높아질수록 위험도 커지므로, 사람의 승인과 백업, 검증이 반드시 필요하다.</a:t>
             </a:r>
           </a:p>
         </p:txBody>
@@ -19681,7 +19681,7 @@
                 <a:ea typeface="NanumGothic"/>
                 <a:cs typeface="NanumGothic"/>
               </a:rPr>
-              <a:t>자세한 이론·구현은 Day 3~4 — 오늘은 큰 틀만</a:t>
+              <a:t>자세한 이론과 구현은 3~4일차에 다루며, 오늘은 전체 틀만 이해한다.</a:t>
             </a:r>
           </a:p>
         </p:txBody>
@@ -20686,7 +20686,7 @@
                 <a:ea typeface="NanumGothic"/>
                 <a:cs typeface="NanumGothic"/>
               </a:rPr>
-              <a:t>기회(신약·문헌고찰)와 과장(co-scientist)을 함께 — AI 출력은 반드시 사람이 검증</a:t>
+              <a:t>신약 개발·문헌고찰의 기회와 과장된 사례를 함께 살펴보되, AI의 출력은 반드시 사람이 검증해야 한다.</a:t>
             </a:r>
           </a:p>
         </p:txBody>
@@ -26845,7 +26845,7 @@
                 <a:ea typeface="NanumGothic"/>
                 <a:cs typeface="NanumGothic"/>
               </a:rPr>
-              <a:t>대안(선택): uv — 빠른 모던 도구 · Anaconda — 데이터 패키지 일괄</a:t>
+              <a:t>대안으로 빠른 최신 도구인 uv나 데이터 패키지를 한 번에 제공하는 Anaconda를 선택할 수도 있다.</a:t>
             </a:r>
           </a:p>
         </p:txBody>
@@ -35262,7 +35262,7 @@
                 <a:ea typeface="NanumGothic"/>
                 <a:cs typeface="NanumGothic"/>
               </a:rPr>
-              <a:t>github.com/yeachan-heo/oh-my-claudecode</a:t>
+              <a:t>공식 저장소는 github.com/yeachan-heo/oh-my-claudecode 에서 확인할 수 있다.</a:t>
             </a:r>
           </a:p>
         </p:txBody>
@@ -43371,7 +43371,7 @@
                 <a:ea typeface="NanumGothic"/>
                 <a:cs typeface="NanumGothic"/>
               </a:rPr>
-              <a:t>답만 내는 게 아니라 '행동'한다 — LLM과의 핵심 차이</a:t>
+              <a:t>에이전트는 답을 내는 데 그치지 않고 직접 '행동'한다는 점이 LLM과의 핵심 차이다.</a:t>
             </a:r>
           </a:p>
         </p:txBody>
@@ -45976,7 +45976,7 @@
                 <a:ea typeface="NanumGothic"/>
                 <a:cs typeface="NanumGothic"/>
               </a:rPr>
-              <a:t>목표를 달성할 때까지 이 루프를 반복 — 이제 각 단계를 하나씩</a:t>
+              <a:t>목표를 달성할 때까지 이 루프를 반복하며, 이어서 각 단계를 차례로 살펴본다.</a:t>
             </a:r>
           </a:p>
         </p:txBody>
